--- a/ch07/Django4-ch07.pptx
+++ b/ch07/Django4-ch07.pptx
@@ -189,7 +189,7 @@
   </p:defaultTextStyle>
   <p:extLst>
     <p:ext uri="{EFAFB233-063F-42B5-8137-9DF3F51BA10A}">
-      <p15:sldGuideLst xmlns:p15="http://schemas.microsoft.com/office/powerpoint/2012/main">
+      <p15:sldGuideLst xmlns:p15="http://schemas.microsoft.com/office/powerpoint/2012/main" xmlns="">
         <p15:guide id="1" orient="horz" pos="2160">
           <p15:clr>
             <a:srgbClr val="A4A3A4"/>
@@ -1814,7 +1814,7 @@
             <a:fld id="{FBFE2433-649F-42E5-AECB-94990831C40A}" type="datetimeFigureOut">
               <a:rPr lang="zh-TW" altLang="en-US" smtClean="0"/>
               <a:pPr/>
-              <a:t>2026/6/4</a:t>
+              <a:t>2026/6/5</a:t>
             </a:fld>
             <a:endParaRPr lang="zh-TW" altLang="en-US"/>
           </a:p>
@@ -5989,7 +5989,7 @@
         <p:cNvPr id="1" name="">
           <a:extLst>
             <a:ext uri="{FF2B5EF4-FFF2-40B4-BE49-F238E27FC236}">
-              <a16:creationId xmlns:a16="http://schemas.microsoft.com/office/drawing/2014/main" id="{1BF7B01F-313F-69EE-5B3A-1E42440358EB}"/>
+              <a16:creationId xmlns:a16="http://schemas.microsoft.com/office/drawing/2014/main" xmlns="" id="{1BF7B01F-313F-69EE-5B3A-1E42440358EB}"/>
             </a:ext>
           </a:extLst>
         </p:cNvPr>
@@ -6009,7 +6009,7 @@
           <p:cNvPr id="2" name="投影片影像版面配置區 1">
             <a:extLst>
               <a:ext uri="{FF2B5EF4-FFF2-40B4-BE49-F238E27FC236}">
-                <a16:creationId xmlns:a16="http://schemas.microsoft.com/office/drawing/2014/main" id="{E3CDEB4F-24E4-7C25-3735-F476494B43EC}"/>
+                <a16:creationId xmlns:a16="http://schemas.microsoft.com/office/drawing/2014/main" xmlns="" id="{E3CDEB4F-24E4-7C25-3735-F476494B43EC}"/>
               </a:ext>
             </a:extLst>
           </p:cNvPr>
@@ -6027,7 +6027,7 @@
           <p:cNvPr id="3" name="備忘稿版面配置區 2">
             <a:extLst>
               <a:ext uri="{FF2B5EF4-FFF2-40B4-BE49-F238E27FC236}">
-                <a16:creationId xmlns:a16="http://schemas.microsoft.com/office/drawing/2014/main" id="{E30A5D5E-843F-BB44-23FA-1AC00B21505E}"/>
+                <a16:creationId xmlns:a16="http://schemas.microsoft.com/office/drawing/2014/main" xmlns="" id="{E30A5D5E-843F-BB44-23FA-1AC00B21505E}"/>
               </a:ext>
             </a:extLst>
           </p:cNvPr>
@@ -6439,7 +6439,7 @@
           <p:cNvPr id="4" name="投影片編號版面配置區 3">
             <a:extLst>
               <a:ext uri="{FF2B5EF4-FFF2-40B4-BE49-F238E27FC236}">
-                <a16:creationId xmlns:a16="http://schemas.microsoft.com/office/drawing/2014/main" id="{200C0695-1346-8CA7-F449-5D24D58BE32D}"/>
+                <a16:creationId xmlns:a16="http://schemas.microsoft.com/office/drawing/2014/main" xmlns="" id="{200C0695-1346-8CA7-F449-5D24D58BE32D}"/>
               </a:ext>
             </a:extLst>
           </p:cNvPr>
@@ -8393,7 +8393,7 @@
             <a:fld id="{DF19C816-D38B-498E-804E-00D02760FC7A}" type="datetime1">
               <a:rPr lang="zh-TW" altLang="en-US" smtClean="0"/>
               <a:pPr/>
-              <a:t>2026/6/4</a:t>
+              <a:t>2026/6/5</a:t>
             </a:fld>
             <a:endParaRPr lang="zh-TW" altLang="en-US"/>
           </a:p>
@@ -8788,7 +8788,7 @@
             <a:fld id="{BFF116A9-7278-4674-BCA0-66C5F066EB15}" type="datetime1">
               <a:rPr lang="zh-TW" altLang="en-US" smtClean="0"/>
               <a:pPr/>
-              <a:t>2026/6/4</a:t>
+              <a:t>2026/6/5</a:t>
             </a:fld>
             <a:endParaRPr lang="zh-TW" altLang="en-US"/>
           </a:p>
@@ -9323,7 +9323,7 @@
             <a:fld id="{97D0AF00-ACBD-4185-8358-D82955DAF0D3}" type="datetime1">
               <a:rPr lang="zh-TW" altLang="en-US" smtClean="0"/>
               <a:pPr/>
-              <a:t>2026/6/4</a:t>
+              <a:t>2026/6/5</a:t>
             </a:fld>
             <a:endParaRPr lang="zh-TW" altLang="en-US"/>
           </a:p>
@@ -9457,7 +9457,7 @@
             <a:fld id="{E16BAABA-C288-41C0-9D8E-87773CE9488B}" type="datetime1">
               <a:rPr lang="zh-TW" altLang="en-US" smtClean="0"/>
               <a:pPr/>
-              <a:t>2026/6/4</a:t>
+              <a:t>2026/6/5</a:t>
             </a:fld>
             <a:endParaRPr lang="zh-TW" altLang="en-US"/>
           </a:p>
@@ -10002,7 +10002,7 @@
             <a:fld id="{E6F79EFE-5102-4BAD-A377-702F02C2814E}" type="datetime1">
               <a:rPr lang="zh-TW" altLang="en-US" smtClean="0"/>
               <a:pPr/>
-              <a:t>2026/6/4</a:t>
+              <a:t>2026/6/5</a:t>
             </a:fld>
             <a:endParaRPr lang="zh-TW" altLang="en-US"/>
           </a:p>
@@ -10299,7 +10299,7 @@
             <a:fld id="{240F5BD8-68CC-49A6-B769-229D3FACB86C}" type="datetime1">
               <a:rPr lang="zh-TW" altLang="en-US" smtClean="0"/>
               <a:pPr/>
-              <a:t>2026/6/4</a:t>
+              <a:t>2026/6/5</a:t>
             </a:fld>
             <a:endParaRPr lang="zh-TW" altLang="en-US"/>
           </a:p>
@@ -10960,7 +10960,7 @@
             <a:fld id="{C95C3C99-9A5D-4B12-8519-BF3493FEA3BD}" type="datetime1">
               <a:rPr lang="zh-TW" altLang="en-US" smtClean="0"/>
               <a:pPr/>
-              <a:t>2026/6/4</a:t>
+              <a:t>2026/6/5</a:t>
             </a:fld>
             <a:endParaRPr lang="zh-TW" altLang="en-US"/>
           </a:p>
@@ -11398,7 +11398,7 @@
             <a:fld id="{C0C1B973-9C4C-43B9-BBC9-7D038B5E66BB}" type="datetime1">
               <a:rPr lang="zh-TW" altLang="en-US" smtClean="0"/>
               <a:pPr/>
-              <a:t>2026/6/4</a:t>
+              <a:t>2026/6/5</a:t>
             </a:fld>
             <a:endParaRPr lang="zh-TW" altLang="en-US"/>
           </a:p>
@@ -11713,7 +11713,7 @@
             <a:fld id="{E3A2E384-56FB-46D9-B267-C20E836A8212}" type="datetime1">
               <a:rPr lang="zh-TW" altLang="en-US" smtClean="0"/>
               <a:pPr/>
-              <a:t>2026/6/4</a:t>
+              <a:t>2026/6/5</a:t>
             </a:fld>
             <a:endParaRPr lang="zh-TW" altLang="en-US"/>
           </a:p>
@@ -12448,7 +12448,7 @@
             <a:fld id="{33A25C06-3635-48B4-9326-561BB1229EEB}" type="datetime1">
               <a:rPr lang="zh-TW" altLang="en-US" smtClean="0"/>
               <a:pPr/>
-              <a:t>2026/6/4</a:t>
+              <a:t>2026/6/5</a:t>
             </a:fld>
             <a:endParaRPr lang="zh-TW" altLang="en-US"/>
           </a:p>
@@ -13114,7 +13114,7 @@
             <a:fld id="{BA9F43BE-0941-4E88-B57D-D38DECBCB997}" type="datetime1">
               <a:rPr lang="zh-TW" altLang="en-US" smtClean="0"/>
               <a:pPr/>
-              <a:t>2026/6/4</a:t>
+              <a:t>2026/6/5</a:t>
             </a:fld>
             <a:endParaRPr lang="zh-TW" altLang="en-US"/>
           </a:p>
@@ -13388,7 +13388,7 @@
             <a:fld id="{73E7C058-3467-44CD-AC53-31F205DF3CA0}" type="datetime1">
               <a:rPr lang="zh-TW" altLang="en-US" smtClean="0"/>
               <a:pPr/>
-              <a:t>2026/6/4</a:t>
+              <a:t>2026/6/5</a:t>
             </a:fld>
             <a:endParaRPr lang="zh-TW" altLang="en-US"/>
           </a:p>
@@ -14142,6 +14142,10 @@
               <a:rPr lang="zh-TW" altLang="en-US" dirty="0"/>
               <a:t>第七堂</a:t>
             </a:r>
+            <a:r>
+              <a:rPr lang="en-US" altLang="zh-TW" dirty="0"/>
+              <a:t/>
+            </a:r>
             <a:br>
               <a:rPr lang="en-US" altLang="zh-TW" dirty="0"/>
             </a:br>
@@ -14328,21 +14332,21 @@
                 <a:gridCol w="2765248">
                   <a:extLst>
                     <a:ext uri="{9D8B030D-6E8A-4147-A177-3AD203B41FA5}">
-                      <a16:colId xmlns:a16="http://schemas.microsoft.com/office/drawing/2014/main" val="20000"/>
+                      <a16:colId xmlns:a16="http://schemas.microsoft.com/office/drawing/2014/main" xmlns="" val="20000"/>
                     </a:ext>
                   </a:extLst>
                 </a:gridCol>
                 <a:gridCol w="2765248">
                   <a:extLst>
                     <a:ext uri="{9D8B030D-6E8A-4147-A177-3AD203B41FA5}">
-                      <a16:colId xmlns:a16="http://schemas.microsoft.com/office/drawing/2014/main" val="20001"/>
+                      <a16:colId xmlns:a16="http://schemas.microsoft.com/office/drawing/2014/main" xmlns="" val="20001"/>
                     </a:ext>
                   </a:extLst>
                 </a:gridCol>
                 <a:gridCol w="2766104">
                   <a:extLst>
                     <a:ext uri="{9D8B030D-6E8A-4147-A177-3AD203B41FA5}">
-                      <a16:colId xmlns:a16="http://schemas.microsoft.com/office/drawing/2014/main" val="20002"/>
+                      <a16:colId xmlns:a16="http://schemas.microsoft.com/office/drawing/2014/main" xmlns="" val="20002"/>
                     </a:ext>
                   </a:extLst>
                 </a:gridCol>
@@ -14443,7 +14447,7 @@
                 </a:tc>
                 <a:extLst>
                   <a:ext uri="{0D108BD9-81ED-4DB2-BD59-A6C34878D82A}">
-                    <a16:rowId xmlns:a16="http://schemas.microsoft.com/office/drawing/2014/main" val="10000"/>
+                    <a16:rowId xmlns:a16="http://schemas.microsoft.com/office/drawing/2014/main" xmlns="" val="10000"/>
                   </a:ext>
                 </a:extLst>
               </a:tr>
@@ -14549,7 +14553,7 @@
                 </a:tc>
                 <a:extLst>
                   <a:ext uri="{0D108BD9-81ED-4DB2-BD59-A6C34878D82A}">
-                    <a16:rowId xmlns:a16="http://schemas.microsoft.com/office/drawing/2014/main" val="10001"/>
+                    <a16:rowId xmlns:a16="http://schemas.microsoft.com/office/drawing/2014/main" xmlns="" val="10001"/>
                   </a:ext>
                 </a:extLst>
               </a:tr>
@@ -14655,7 +14659,7 @@
                 </a:tc>
                 <a:extLst>
                   <a:ext uri="{0D108BD9-81ED-4DB2-BD59-A6C34878D82A}">
-                    <a16:rowId xmlns:a16="http://schemas.microsoft.com/office/drawing/2014/main" val="10002"/>
+                    <a16:rowId xmlns:a16="http://schemas.microsoft.com/office/drawing/2014/main" xmlns="" val="10002"/>
                   </a:ext>
                 </a:extLst>
               </a:tr>
@@ -14691,21 +14695,21 @@
                 <a:gridCol w="2760022">
                   <a:extLst>
                     <a:ext uri="{9D8B030D-6E8A-4147-A177-3AD203B41FA5}">
-                      <a16:colId xmlns:a16="http://schemas.microsoft.com/office/drawing/2014/main" val="20000"/>
+                      <a16:colId xmlns:a16="http://schemas.microsoft.com/office/drawing/2014/main" xmlns="" val="20000"/>
                     </a:ext>
                   </a:extLst>
                 </a:gridCol>
                 <a:gridCol w="2760022">
                   <a:extLst>
                     <a:ext uri="{9D8B030D-6E8A-4147-A177-3AD203B41FA5}">
-                      <a16:colId xmlns:a16="http://schemas.microsoft.com/office/drawing/2014/main" val="20001"/>
+                      <a16:colId xmlns:a16="http://schemas.microsoft.com/office/drawing/2014/main" xmlns="" val="20001"/>
                     </a:ext>
                   </a:extLst>
                 </a:gridCol>
                 <a:gridCol w="2760876">
                   <a:extLst>
                     <a:ext uri="{9D8B030D-6E8A-4147-A177-3AD203B41FA5}">
-                      <a16:colId xmlns:a16="http://schemas.microsoft.com/office/drawing/2014/main" val="20002"/>
+                      <a16:colId xmlns:a16="http://schemas.microsoft.com/office/drawing/2014/main" xmlns="" val="20002"/>
                     </a:ext>
                   </a:extLst>
                 </a:gridCol>
@@ -14806,7 +14810,7 @@
                 </a:tc>
                 <a:extLst>
                   <a:ext uri="{0D108BD9-81ED-4DB2-BD59-A6C34878D82A}">
-                    <a16:rowId xmlns:a16="http://schemas.microsoft.com/office/drawing/2014/main" val="10000"/>
+                    <a16:rowId xmlns:a16="http://schemas.microsoft.com/office/drawing/2014/main" xmlns="" val="10000"/>
                   </a:ext>
                 </a:extLst>
               </a:tr>
@@ -14906,7 +14910,7 @@
                 </a:tc>
                 <a:extLst>
                   <a:ext uri="{0D108BD9-81ED-4DB2-BD59-A6C34878D82A}">
-                    <a16:rowId xmlns:a16="http://schemas.microsoft.com/office/drawing/2014/main" val="10001"/>
+                    <a16:rowId xmlns:a16="http://schemas.microsoft.com/office/drawing/2014/main" xmlns="" val="10001"/>
                   </a:ext>
                 </a:extLst>
               </a:tr>
@@ -15012,7 +15016,7 @@
                 </a:tc>
                 <a:extLst>
                   <a:ext uri="{0D108BD9-81ED-4DB2-BD59-A6C34878D82A}">
-                    <a16:rowId xmlns:a16="http://schemas.microsoft.com/office/drawing/2014/main" val="10002"/>
+                    <a16:rowId xmlns:a16="http://schemas.microsoft.com/office/drawing/2014/main" xmlns="" val="10002"/>
                   </a:ext>
                 </a:extLst>
               </a:tr>
@@ -15112,7 +15116,7 @@
                 </a:tc>
                 <a:extLst>
                   <a:ext uri="{0D108BD9-81ED-4DB2-BD59-A6C34878D82A}">
-                    <a16:rowId xmlns:a16="http://schemas.microsoft.com/office/drawing/2014/main" val="10003"/>
+                    <a16:rowId xmlns:a16="http://schemas.microsoft.com/office/drawing/2014/main" xmlns="" val="10003"/>
                   </a:ext>
                 </a:extLst>
               </a:tr>
@@ -15130,6 +15134,13 @@
   <p:clrMapOvr>
     <a:masterClrMapping/>
   </p:clrMapOvr>
+  <p:timing>
+    <p:tnLst>
+      <p:par>
+        <p:cTn id="1" dur="indefinite" restart="never" nodeType="tmRoot"/>
+      </p:par>
+    </p:tnLst>
+  </p:timing>
 </p:sld>
 </file>
 
@@ -15252,21 +15263,21 @@
                 <a:gridCol w="2765248">
                   <a:extLst>
                     <a:ext uri="{9D8B030D-6E8A-4147-A177-3AD203B41FA5}">
-                      <a16:colId xmlns:a16="http://schemas.microsoft.com/office/drawing/2014/main" val="20000"/>
+                      <a16:colId xmlns:a16="http://schemas.microsoft.com/office/drawing/2014/main" xmlns="" val="20000"/>
                     </a:ext>
                   </a:extLst>
                 </a:gridCol>
                 <a:gridCol w="2765248">
                   <a:extLst>
                     <a:ext uri="{9D8B030D-6E8A-4147-A177-3AD203B41FA5}">
-                      <a16:colId xmlns:a16="http://schemas.microsoft.com/office/drawing/2014/main" val="20001"/>
+                      <a16:colId xmlns:a16="http://schemas.microsoft.com/office/drawing/2014/main" xmlns="" val="20001"/>
                     </a:ext>
                   </a:extLst>
                 </a:gridCol>
                 <a:gridCol w="2766104">
                   <a:extLst>
                     <a:ext uri="{9D8B030D-6E8A-4147-A177-3AD203B41FA5}">
-                      <a16:colId xmlns:a16="http://schemas.microsoft.com/office/drawing/2014/main" val="20002"/>
+                      <a16:colId xmlns:a16="http://schemas.microsoft.com/office/drawing/2014/main" xmlns="" val="20002"/>
                     </a:ext>
                   </a:extLst>
                 </a:gridCol>
@@ -15367,7 +15378,7 @@
                 </a:tc>
                 <a:extLst>
                   <a:ext uri="{0D108BD9-81ED-4DB2-BD59-A6C34878D82A}">
-                    <a16:rowId xmlns:a16="http://schemas.microsoft.com/office/drawing/2014/main" val="10000"/>
+                    <a16:rowId xmlns:a16="http://schemas.microsoft.com/office/drawing/2014/main" xmlns="" val="10000"/>
                   </a:ext>
                 </a:extLst>
               </a:tr>
@@ -15467,7 +15478,7 @@
                 </a:tc>
                 <a:extLst>
                   <a:ext uri="{0D108BD9-81ED-4DB2-BD59-A6C34878D82A}">
-                    <a16:rowId xmlns:a16="http://schemas.microsoft.com/office/drawing/2014/main" val="10001"/>
+                    <a16:rowId xmlns:a16="http://schemas.microsoft.com/office/drawing/2014/main" xmlns="" val="10001"/>
                   </a:ext>
                 </a:extLst>
               </a:tr>
@@ -15573,7 +15584,7 @@
                 </a:tc>
                 <a:extLst>
                   <a:ext uri="{0D108BD9-81ED-4DB2-BD59-A6C34878D82A}">
-                    <a16:rowId xmlns:a16="http://schemas.microsoft.com/office/drawing/2014/main" val="10002"/>
+                    <a16:rowId xmlns:a16="http://schemas.microsoft.com/office/drawing/2014/main" xmlns="" val="10002"/>
                   </a:ext>
                 </a:extLst>
               </a:tr>
@@ -15673,7 +15684,7 @@
                 </a:tc>
                 <a:extLst>
                   <a:ext uri="{0D108BD9-81ED-4DB2-BD59-A6C34878D82A}">
-                    <a16:rowId xmlns:a16="http://schemas.microsoft.com/office/drawing/2014/main" val="10003"/>
+                    <a16:rowId xmlns:a16="http://schemas.microsoft.com/office/drawing/2014/main" xmlns="" val="10003"/>
                   </a:ext>
                 </a:extLst>
               </a:tr>
@@ -15691,6 +15702,13 @@
   <p:clrMapOvr>
     <a:masterClrMapping/>
   </p:clrMapOvr>
+  <p:timing>
+    <p:tnLst>
+      <p:par>
+        <p:cTn id="1" dur="indefinite" restart="never" nodeType="tmRoot"/>
+      </p:par>
+    </p:tnLst>
+  </p:timing>
 </p:sld>
 </file>
 
@@ -15825,21 +15843,21 @@
                 <a:gridCol w="2844507">
                   <a:extLst>
                     <a:ext uri="{9D8B030D-6E8A-4147-A177-3AD203B41FA5}">
-                      <a16:colId xmlns:a16="http://schemas.microsoft.com/office/drawing/2014/main" val="20000"/>
+                      <a16:colId xmlns:a16="http://schemas.microsoft.com/office/drawing/2014/main" xmlns="" val="20000"/>
                     </a:ext>
                   </a:extLst>
                 </a:gridCol>
                 <a:gridCol w="2844507">
                   <a:extLst>
                     <a:ext uri="{9D8B030D-6E8A-4147-A177-3AD203B41FA5}">
-                      <a16:colId xmlns:a16="http://schemas.microsoft.com/office/drawing/2014/main" val="20001"/>
+                      <a16:colId xmlns:a16="http://schemas.microsoft.com/office/drawing/2014/main" xmlns="" val="20001"/>
                     </a:ext>
                   </a:extLst>
                 </a:gridCol>
                 <a:gridCol w="2845387">
                   <a:extLst>
                     <a:ext uri="{9D8B030D-6E8A-4147-A177-3AD203B41FA5}">
-                      <a16:colId xmlns:a16="http://schemas.microsoft.com/office/drawing/2014/main" val="20002"/>
+                      <a16:colId xmlns:a16="http://schemas.microsoft.com/office/drawing/2014/main" xmlns="" val="20002"/>
                     </a:ext>
                   </a:extLst>
                 </a:gridCol>
@@ -15940,7 +15958,7 @@
                 </a:tc>
                 <a:extLst>
                   <a:ext uri="{0D108BD9-81ED-4DB2-BD59-A6C34878D82A}">
-                    <a16:rowId xmlns:a16="http://schemas.microsoft.com/office/drawing/2014/main" val="10000"/>
+                    <a16:rowId xmlns:a16="http://schemas.microsoft.com/office/drawing/2014/main" xmlns="" val="10000"/>
                   </a:ext>
                 </a:extLst>
               </a:tr>
@@ -16040,7 +16058,7 @@
                 </a:tc>
                 <a:extLst>
                   <a:ext uri="{0D108BD9-81ED-4DB2-BD59-A6C34878D82A}">
-                    <a16:rowId xmlns:a16="http://schemas.microsoft.com/office/drawing/2014/main" val="10001"/>
+                    <a16:rowId xmlns:a16="http://schemas.microsoft.com/office/drawing/2014/main" xmlns="" val="10001"/>
                   </a:ext>
                 </a:extLst>
               </a:tr>
@@ -16146,7 +16164,7 @@
                 </a:tc>
                 <a:extLst>
                   <a:ext uri="{0D108BD9-81ED-4DB2-BD59-A6C34878D82A}">
-                    <a16:rowId xmlns:a16="http://schemas.microsoft.com/office/drawing/2014/main" val="10002"/>
+                    <a16:rowId xmlns:a16="http://schemas.microsoft.com/office/drawing/2014/main" xmlns="" val="10002"/>
                   </a:ext>
                 </a:extLst>
               </a:tr>
@@ -16240,7 +16258,7 @@
                 </a:tc>
                 <a:extLst>
                   <a:ext uri="{0D108BD9-81ED-4DB2-BD59-A6C34878D82A}">
-                    <a16:rowId xmlns:a16="http://schemas.microsoft.com/office/drawing/2014/main" val="10003"/>
+                    <a16:rowId xmlns:a16="http://schemas.microsoft.com/office/drawing/2014/main" xmlns="" val="10003"/>
                   </a:ext>
                 </a:extLst>
               </a:tr>
@@ -16334,7 +16352,7 @@
                 </a:tc>
                 <a:extLst>
                   <a:ext uri="{0D108BD9-81ED-4DB2-BD59-A6C34878D82A}">
-                    <a16:rowId xmlns:a16="http://schemas.microsoft.com/office/drawing/2014/main" val="10004"/>
+                    <a16:rowId xmlns:a16="http://schemas.microsoft.com/office/drawing/2014/main" xmlns="" val="10004"/>
                   </a:ext>
                 </a:extLst>
               </a:tr>
@@ -16428,7 +16446,7 @@
                 </a:tc>
                 <a:extLst>
                   <a:ext uri="{0D108BD9-81ED-4DB2-BD59-A6C34878D82A}">
-                    <a16:rowId xmlns:a16="http://schemas.microsoft.com/office/drawing/2014/main" val="10005"/>
+                    <a16:rowId xmlns:a16="http://schemas.microsoft.com/office/drawing/2014/main" xmlns="" val="10005"/>
                   </a:ext>
                 </a:extLst>
               </a:tr>
@@ -16446,6 +16464,13 @@
   <p:clrMapOvr>
     <a:masterClrMapping/>
   </p:clrMapOvr>
+  <p:timing>
+    <p:tnLst>
+      <p:par>
+        <p:cTn id="1" dur="indefinite" restart="never" nodeType="tmRoot"/>
+      </p:par>
+    </p:tnLst>
+  </p:timing>
 </p:sld>
 </file>
 
@@ -16857,6 +16882,13 @@
   <p:clrMapOvr>
     <a:masterClrMapping/>
   </p:clrMapOvr>
+  <p:timing>
+    <p:tnLst>
+      <p:par>
+        <p:cTn id="1" dur="indefinite" restart="never" nodeType="tmRoot"/>
+      </p:par>
+    </p:tnLst>
+  </p:timing>
 </p:sld>
 </file>
 
@@ -17292,6 +17324,13 @@
   <p:clrMapOvr>
     <a:masterClrMapping/>
   </p:clrMapOvr>
+  <p:timing>
+    <p:tnLst>
+      <p:par>
+        <p:cTn id="1" dur="indefinite" restart="never" nodeType="tmRoot"/>
+      </p:par>
+    </p:tnLst>
+  </p:timing>
 </p:sld>
 </file>
 
@@ -18460,7 +18499,15 @@
             </a:r>
             <a:r>
               <a:rPr lang="en-US" altLang="zh-TW" dirty="0" err="1"/>
-              <a:t>models.CASCADE</a:t>
+              <a:t>models.</a:t>
+            </a:r>
+            <a:r>
+              <a:rPr lang="en-US" altLang="zh-TW" dirty="0" err="1">
+                <a:solidFill>
+                  <a:srgbClr val="FF0000"/>
+                </a:solidFill>
+              </a:rPr>
+              <a:t>CASCADE</a:t>
             </a:r>
             <a:r>
               <a:rPr lang="zh-TW" altLang="zh-TW" dirty="0"/>
@@ -18480,22 +18527,14 @@
             </a:r>
             <a:r>
               <a:rPr lang="zh-TW" altLang="zh-TW" dirty="0"/>
-              <a:t>）也要一併執行刪除的</a:t>
-            </a:r>
-            <a:r>
-              <a:rPr lang="zh-TW" altLang="zh-TW"/>
-              <a:t>動作。</a:t>
-            </a:r>
-            <a:endParaRPr lang="en-US" altLang="zh-TW"/>
-          </a:p>
-          <a:p>
-            <a:r>
-              <a:rPr lang="zh-TW" altLang="zh-TW"/>
-              <a:t>其它</a:t>
-            </a:r>
+              <a:t>）也要一併執行刪除的動作。</a:t>
+            </a:r>
+            <a:endParaRPr lang="en-US" altLang="zh-TW" dirty="0"/>
+          </a:p>
+          <a:p>
             <a:r>
               <a:rPr lang="zh-TW" altLang="zh-TW" dirty="0"/>
-              <a:t>常設定的動作如下所示：</a:t>
+              <a:t>其它常設定的動作如下所示：</a:t>
             </a:r>
           </a:p>
           <a:p>
@@ -18506,14 +18545,10 @@
             </a:r>
             <a:r>
               <a:rPr lang="zh-TW" altLang="zh-TW" dirty="0"/>
-              <a:t>：禁止刪除並產生</a:t>
-            </a:r>
-            <a:r>
-              <a:rPr lang="zh-TW" altLang="zh-TW"/>
-              <a:t>一個</a:t>
-            </a:r>
-            <a:r>
-              <a:rPr lang="en-US" altLang="zh-TW"/>
+              <a:t>：禁止刪除並產生一個</a:t>
+            </a:r>
+            <a:r>
+              <a:rPr lang="en-US" altLang="zh-TW" dirty="0"/>
               <a:t>Exception</a:t>
             </a:r>
             <a:r>
@@ -19021,6 +19056,10 @@
               <a:rPr lang="zh-TW" altLang="zh-TW" dirty="0"/>
               <a:t>為</a:t>
             </a:r>
+            <a:r>
+              <a:rPr lang="en-US" altLang="zh-TW" dirty="0"/>
+              <a:t/>
+            </a:r>
             <a:br>
               <a:rPr lang="en-US" altLang="zh-TW" dirty="0"/>
             </a:br>
@@ -19200,7 +19239,7 @@
           <p:cNvPr id="2" name="標題 1">
             <a:extLst>
               <a:ext uri="{FF2B5EF4-FFF2-40B4-BE49-F238E27FC236}">
-                <a16:creationId xmlns:a16="http://schemas.microsoft.com/office/drawing/2014/main" id="{403F2721-E46E-5C05-3E9C-9EA4D6687533}"/>
+                <a16:creationId xmlns:a16="http://schemas.microsoft.com/office/drawing/2014/main" xmlns="" id="{403F2721-E46E-5C05-3E9C-9EA4D6687533}"/>
               </a:ext>
             </a:extLst>
           </p:cNvPr>
@@ -19229,7 +19268,7 @@
           <p:cNvPr id="3" name="投影片編號版面配置區 2">
             <a:extLst>
               <a:ext uri="{FF2B5EF4-FFF2-40B4-BE49-F238E27FC236}">
-                <a16:creationId xmlns:a16="http://schemas.microsoft.com/office/drawing/2014/main" id="{B020AEA6-02AD-9824-DC47-95F954221135}"/>
+                <a16:creationId xmlns:a16="http://schemas.microsoft.com/office/drawing/2014/main" xmlns="" id="{B020AEA6-02AD-9824-DC47-95F954221135}"/>
               </a:ext>
             </a:extLst>
           </p:cNvPr>
@@ -19259,7 +19298,7 @@
           <p:cNvPr id="4" name="內容版面配置區 3">
             <a:extLst>
               <a:ext uri="{FF2B5EF4-FFF2-40B4-BE49-F238E27FC236}">
-                <a16:creationId xmlns:a16="http://schemas.microsoft.com/office/drawing/2014/main" id="{626D35BE-0E4B-7C61-FA2A-FED586A49AA6}"/>
+                <a16:creationId xmlns:a16="http://schemas.microsoft.com/office/drawing/2014/main" xmlns="" id="{626D35BE-0E4B-7C61-FA2A-FED586A49AA6}"/>
               </a:ext>
             </a:extLst>
           </p:cNvPr>
@@ -20073,7 +20112,7 @@
           <p:cNvPr id="2" name="標題 1">
             <a:extLst>
               <a:ext uri="{FF2B5EF4-FFF2-40B4-BE49-F238E27FC236}">
-                <a16:creationId xmlns:a16="http://schemas.microsoft.com/office/drawing/2014/main" id="{314FA47A-912B-FF88-B9E3-AE6D9F671EAC}"/>
+                <a16:creationId xmlns:a16="http://schemas.microsoft.com/office/drawing/2014/main" xmlns="" id="{314FA47A-912B-FF88-B9E3-AE6D9F671EAC}"/>
               </a:ext>
             </a:extLst>
           </p:cNvPr>
@@ -20110,7 +20149,7 @@
           <p:cNvPr id="3" name="投影片編號版面配置區 2">
             <a:extLst>
               <a:ext uri="{FF2B5EF4-FFF2-40B4-BE49-F238E27FC236}">
-                <a16:creationId xmlns:a16="http://schemas.microsoft.com/office/drawing/2014/main" id="{0FC8AE10-1CB5-28CF-3510-0335B7A1C26F}"/>
+                <a16:creationId xmlns:a16="http://schemas.microsoft.com/office/drawing/2014/main" xmlns="" id="{0FC8AE10-1CB5-28CF-3510-0335B7A1C26F}"/>
               </a:ext>
             </a:extLst>
           </p:cNvPr>
@@ -20140,7 +20179,7 @@
           <p:cNvPr id="4" name="內容版面配置區 3">
             <a:extLst>
               <a:ext uri="{FF2B5EF4-FFF2-40B4-BE49-F238E27FC236}">
-                <a16:creationId xmlns:a16="http://schemas.microsoft.com/office/drawing/2014/main" id="{5C3FDBEE-8772-6956-1A3E-7645816905F5}"/>
+                <a16:creationId xmlns:a16="http://schemas.microsoft.com/office/drawing/2014/main" xmlns="" id="{5C3FDBEE-8772-6956-1A3E-7645816905F5}"/>
               </a:ext>
             </a:extLst>
           </p:cNvPr>
@@ -20323,8 +20362,8 @@
         </p:nvSpPr>
         <p:spPr>
           <a:xfrm>
-            <a:off x="0" y="332656"/>
-            <a:ext cx="9144000" cy="758952"/>
+            <a:off x="0" y="956921"/>
+            <a:ext cx="9144000" cy="1103927"/>
           </a:xfrm>
         </p:spPr>
         <p:txBody>
@@ -20393,10 +20432,91 @@
               <a:t>注意匯入的順序</a:t>
             </a:r>
             <a:r>
-              <a:rPr lang="en-US" altLang="zh-TW" dirty="0"/>
+              <a:rPr lang="en-US" altLang="zh-TW" dirty="0" smtClean="0"/>
               <a:t>maker&gt;model&gt;product&gt;photo</a:t>
             </a:r>
-            <a:endParaRPr lang="zh-TW" altLang="en-US" dirty="0"/>
+            <a:br>
+              <a:rPr lang="en-US" altLang="zh-TW" dirty="0" smtClean="0"/>
+            </a:br>
+            <a:r>
+              <a:rPr lang="en-US" altLang="zh-TW" dirty="0" smtClean="0">
+                <a:solidFill>
+                  <a:srgbClr val="FF0000"/>
+                </a:solidFill>
+              </a:rPr>
+              <a:t>CSV</a:t>
+            </a:r>
+            <a:r>
+              <a:rPr lang="zh-TW" altLang="en-US" dirty="0" smtClean="0">
+                <a:solidFill>
+                  <a:srgbClr val="FF0000"/>
+                </a:solidFill>
+              </a:rPr>
+              <a:t>的</a:t>
+            </a:r>
+            <a:r>
+              <a:rPr lang="zh-TW" altLang="en-US" dirty="0" smtClean="0">
+                <a:solidFill>
+                  <a:srgbClr val="FF0000"/>
+                </a:solidFill>
+              </a:rPr>
+              <a:t>欄位順序</a:t>
+            </a:r>
+            <a:r>
+              <a:rPr lang="zh-TW" altLang="en-US" dirty="0" smtClean="0"/>
+              <a:t>也要注意：</a:t>
+            </a:r>
+            <a:r>
+              <a:rPr lang="en-US" altLang="zh-TW" dirty="0" err="1" smtClean="0"/>
+              <a:t>foreignKey</a:t>
+            </a:r>
+            <a:r>
+              <a:rPr lang="zh-TW" altLang="en-US" dirty="0" smtClean="0"/>
+              <a:t>要放最後</a:t>
+            </a:r>
+            <a:r>
+              <a:rPr lang="en-US" altLang="zh-TW" dirty="0" smtClean="0"/>
+              <a:t/>
+            </a:r>
+            <a:br>
+              <a:rPr lang="en-US" altLang="zh-TW" dirty="0" smtClean="0"/>
+            </a:br>
+            <a:r>
+              <a:rPr lang="zh-TW" altLang="en-US" dirty="0" smtClean="0"/>
+              <a:t>例</a:t>
+            </a:r>
+            <a:r>
+              <a:rPr lang="en-US" altLang="zh-TW" dirty="0" smtClean="0"/>
+              <a:t>photo.csv</a:t>
+            </a:r>
+            <a:r>
+              <a:rPr lang="zh-TW" altLang="en-US" dirty="0" smtClean="0"/>
+              <a:t>的</a:t>
+            </a:r>
+            <a:r>
+              <a:rPr lang="en-US" altLang="zh-TW" dirty="0" err="1" smtClean="0"/>
+              <a:t>product_id</a:t>
+            </a:r>
+            <a:r>
+              <a:rPr lang="zh-TW" altLang="en-US" dirty="0" smtClean="0"/>
+              <a:t>沒放最後會有</a:t>
+            </a:r>
+            <a:r>
+              <a:rPr lang="en-US" altLang="zh-TW" dirty="0" smtClean="0"/>
+              <a:t>error</a:t>
+            </a:r>
+            <a:br>
+              <a:rPr lang="en-US" altLang="zh-TW" dirty="0" smtClean="0"/>
+            </a:br>
+            <a:r>
+              <a:rPr lang="en-US" altLang="zh-TW" sz="1800" dirty="0" smtClean="0"/>
+              <a:t>Could </a:t>
+            </a:r>
+            <a:r>
+              <a:rPr lang="en-US" altLang="zh-TW" sz="1800" dirty="0"/>
+              <a:t>not commit transaction for imported data: FOREIGN KEY constraint failed</a:t>
+            </a:r>
+            <a:endParaRPr lang="zh-TW" altLang="en-US" sz="1800" dirty="0"/>
           </a:p>
         </p:txBody>
       </p:sp>
@@ -20434,7 +20554,12 @@
             <p:ph sz="quarter" idx="1"/>
           </p:nvPr>
         </p:nvSpPr>
-        <p:spPr/>
+        <p:spPr>
+          <a:xfrm>
+            <a:off x="301752" y="2097360"/>
+            <a:ext cx="8503920" cy="4572000"/>
+          </a:xfrm>
+        </p:spPr>
         <p:txBody>
           <a:bodyPr/>
           <a:lstStyle/>
@@ -20531,7 +20656,7 @@
           <p:cNvPr id="6" name="文字方塊 5">
             <a:extLst>
               <a:ext uri="{FF2B5EF4-FFF2-40B4-BE49-F238E27FC236}">
-                <a16:creationId xmlns:a16="http://schemas.microsoft.com/office/drawing/2014/main" id="{202C0BD4-4798-1671-DBA5-3E77994D47BB}"/>
+                <a16:creationId xmlns:a16="http://schemas.microsoft.com/office/drawing/2014/main" xmlns="" id="{202C0BD4-4798-1671-DBA5-3E77994D47BB}"/>
               </a:ext>
             </a:extLst>
           </p:cNvPr>
@@ -20540,7 +20665,7 @@
         </p:nvSpPr>
         <p:spPr>
           <a:xfrm>
-            <a:off x="539552" y="4005064"/>
+            <a:off x="539552" y="4355812"/>
             <a:ext cx="4572000" cy="369332"/>
           </a:xfrm>
           <a:prstGeom prst="rect">
@@ -20567,7 +20692,7 @@
           <p:cNvPr id="8" name="圖片 7">
             <a:extLst>
               <a:ext uri="{FF2B5EF4-FFF2-40B4-BE49-F238E27FC236}">
-                <a16:creationId xmlns:a16="http://schemas.microsoft.com/office/drawing/2014/main" id="{B6D266A2-C221-8893-9A63-E03AA58F7754}"/>
+                <a16:creationId xmlns:a16="http://schemas.microsoft.com/office/drawing/2014/main" xmlns="" id="{B6D266A2-C221-8893-9A63-E03AA58F7754}"/>
               </a:ext>
             </a:extLst>
           </p:cNvPr>
@@ -20584,7 +20709,7 @@
         </p:blipFill>
         <p:spPr>
           <a:xfrm>
-            <a:off x="3974607" y="3933056"/>
+            <a:off x="3974607" y="4310043"/>
             <a:ext cx="4861545" cy="2503333"/>
           </a:xfrm>
           <a:prstGeom prst="rect">
@@ -20597,7 +20722,7 @@
           <p:cNvPr id="5" name="文字方塊 4">
             <a:extLst>
               <a:ext uri="{FF2B5EF4-FFF2-40B4-BE49-F238E27FC236}">
-                <a16:creationId xmlns:a16="http://schemas.microsoft.com/office/drawing/2014/main" id="{DBB40161-E9E0-21DD-9837-847D25B11453}"/>
+                <a16:creationId xmlns:a16="http://schemas.microsoft.com/office/drawing/2014/main" xmlns="" id="{DBB40161-E9E0-21DD-9837-847D25B11453}"/>
               </a:ext>
             </a:extLst>
           </p:cNvPr>
@@ -20606,7 +20731,7 @@
         </p:nvSpPr>
         <p:spPr>
           <a:xfrm>
-            <a:off x="6444208" y="1026372"/>
+            <a:off x="6444208" y="2204864"/>
             <a:ext cx="2880320" cy="1200329"/>
           </a:xfrm>
           <a:prstGeom prst="rect">
@@ -20730,7 +20855,7 @@
           <p:cNvPr id="2" name="投影片編號版面配置區 1">
             <a:extLst>
               <a:ext uri="{FF2B5EF4-FFF2-40B4-BE49-F238E27FC236}">
-                <a16:creationId xmlns:a16="http://schemas.microsoft.com/office/drawing/2014/main" id="{C0E5E57A-696F-C8B8-D155-D089770B4AD9}"/>
+                <a16:creationId xmlns:a16="http://schemas.microsoft.com/office/drawing/2014/main" xmlns="" id="{C0E5E57A-696F-C8B8-D155-D089770B4AD9}"/>
               </a:ext>
             </a:extLst>
           </p:cNvPr>
@@ -20760,7 +20885,7 @@
           <p:cNvPr id="4" name="圖片 3">
             <a:extLst>
               <a:ext uri="{FF2B5EF4-FFF2-40B4-BE49-F238E27FC236}">
-                <a16:creationId xmlns:a16="http://schemas.microsoft.com/office/drawing/2014/main" id="{C611F64F-799C-E14B-79A8-DC570B2B94D2}"/>
+                <a16:creationId xmlns:a16="http://schemas.microsoft.com/office/drawing/2014/main" xmlns="" id="{C611F64F-799C-E14B-79A8-DC570B2B94D2}"/>
               </a:ext>
             </a:extLst>
           </p:cNvPr>
@@ -20790,7 +20915,7 @@
           <p:cNvPr id="6" name="圖片 5">
             <a:extLst>
               <a:ext uri="{FF2B5EF4-FFF2-40B4-BE49-F238E27FC236}">
-                <a16:creationId xmlns:a16="http://schemas.microsoft.com/office/drawing/2014/main" id="{86FF6110-41E7-5591-9147-DBD395117B5B}"/>
+                <a16:creationId xmlns:a16="http://schemas.microsoft.com/office/drawing/2014/main" xmlns="" id="{86FF6110-41E7-5591-9147-DBD395117B5B}"/>
               </a:ext>
             </a:extLst>
           </p:cNvPr>
@@ -20820,7 +20945,7 @@
           <p:cNvPr id="8" name="圖片 7">
             <a:extLst>
               <a:ext uri="{FF2B5EF4-FFF2-40B4-BE49-F238E27FC236}">
-                <a16:creationId xmlns:a16="http://schemas.microsoft.com/office/drawing/2014/main" id="{056EE0CD-2816-655B-E77B-B7BF779C3874}"/>
+                <a16:creationId xmlns:a16="http://schemas.microsoft.com/office/drawing/2014/main" xmlns="" id="{056EE0CD-2816-655B-E77B-B7BF779C3874}"/>
               </a:ext>
             </a:extLst>
           </p:cNvPr>
@@ -20850,7 +20975,7 @@
           <p:cNvPr id="10" name="圖片 9">
             <a:extLst>
               <a:ext uri="{FF2B5EF4-FFF2-40B4-BE49-F238E27FC236}">
-                <a16:creationId xmlns:a16="http://schemas.microsoft.com/office/drawing/2014/main" id="{960F3725-85AD-D4FC-B656-D7ADBC19EFF1}"/>
+                <a16:creationId xmlns:a16="http://schemas.microsoft.com/office/drawing/2014/main" xmlns="" id="{960F3725-85AD-D4FC-B656-D7ADBC19EFF1}"/>
               </a:ext>
             </a:extLst>
           </p:cNvPr>
@@ -20880,7 +21005,7 @@
           <p:cNvPr id="11" name="文字方塊 10">
             <a:extLst>
               <a:ext uri="{FF2B5EF4-FFF2-40B4-BE49-F238E27FC236}">
-                <a16:creationId xmlns:a16="http://schemas.microsoft.com/office/drawing/2014/main" id="{0CF7DA04-4B16-9E19-CB83-0DF370207C5F}"/>
+                <a16:creationId xmlns:a16="http://schemas.microsoft.com/office/drawing/2014/main" xmlns="" id="{0CF7DA04-4B16-9E19-CB83-0DF370207C5F}"/>
               </a:ext>
             </a:extLst>
           </p:cNvPr>
@@ -20981,7 +21106,7 @@
           <p:cNvPr id="2" name="標題 1">
             <a:extLst>
               <a:ext uri="{FF2B5EF4-FFF2-40B4-BE49-F238E27FC236}">
-                <a16:creationId xmlns:a16="http://schemas.microsoft.com/office/drawing/2014/main" id="{05D11A38-A507-3E03-9474-847CC0B659F7}"/>
+                <a16:creationId xmlns:a16="http://schemas.microsoft.com/office/drawing/2014/main" xmlns="" id="{05D11A38-A507-3E03-9474-847CC0B659F7}"/>
               </a:ext>
             </a:extLst>
           </p:cNvPr>
@@ -21013,7 +21138,7 @@
           <p:cNvPr id="3" name="投影片編號版面配置區 2">
             <a:extLst>
               <a:ext uri="{FF2B5EF4-FFF2-40B4-BE49-F238E27FC236}">
-                <a16:creationId xmlns:a16="http://schemas.microsoft.com/office/drawing/2014/main" id="{F39FE64D-9942-9219-5891-CAB0F3B8601E}"/>
+                <a16:creationId xmlns:a16="http://schemas.microsoft.com/office/drawing/2014/main" xmlns="" id="{F39FE64D-9942-9219-5891-CAB0F3B8601E}"/>
               </a:ext>
             </a:extLst>
           </p:cNvPr>
@@ -21043,7 +21168,7 @@
           <p:cNvPr id="4" name="內容版面配置區 3">
             <a:extLst>
               <a:ext uri="{FF2B5EF4-FFF2-40B4-BE49-F238E27FC236}">
-                <a16:creationId xmlns:a16="http://schemas.microsoft.com/office/drawing/2014/main" id="{C24F9C69-FB11-47BA-4AE8-8A311E1C9210}"/>
+                <a16:creationId xmlns:a16="http://schemas.microsoft.com/office/drawing/2014/main" xmlns="" id="{C24F9C69-FB11-47BA-4AE8-8A311E1C9210}"/>
               </a:ext>
             </a:extLst>
           </p:cNvPr>
@@ -21244,7 +21369,7 @@
           <p:cNvPr id="2" name="標題 1">
             <a:extLst>
               <a:ext uri="{FF2B5EF4-FFF2-40B4-BE49-F238E27FC236}">
-                <a16:creationId xmlns:a16="http://schemas.microsoft.com/office/drawing/2014/main" id="{1C967F69-729B-6DE5-C5D3-C34DAFC7CD2B}"/>
+                <a16:creationId xmlns:a16="http://schemas.microsoft.com/office/drawing/2014/main" xmlns="" id="{1C967F69-729B-6DE5-C5D3-C34DAFC7CD2B}"/>
               </a:ext>
             </a:extLst>
           </p:cNvPr>
@@ -21276,7 +21401,7 @@
           <p:cNvPr id="3" name="投影片編號版面配置區 2">
             <a:extLst>
               <a:ext uri="{FF2B5EF4-FFF2-40B4-BE49-F238E27FC236}">
-                <a16:creationId xmlns:a16="http://schemas.microsoft.com/office/drawing/2014/main" id="{E3AF38FB-4CB8-BB9B-F87B-616B9A80252A}"/>
+                <a16:creationId xmlns:a16="http://schemas.microsoft.com/office/drawing/2014/main" xmlns="" id="{E3AF38FB-4CB8-BB9B-F87B-616B9A80252A}"/>
               </a:ext>
             </a:extLst>
           </p:cNvPr>
@@ -21306,7 +21431,7 @@
           <p:cNvPr id="4" name="內容版面配置區 3">
             <a:extLst>
               <a:ext uri="{FF2B5EF4-FFF2-40B4-BE49-F238E27FC236}">
-                <a16:creationId xmlns:a16="http://schemas.microsoft.com/office/drawing/2014/main" id="{D9F5FF1C-39C8-3405-F94D-2152FD7EE6B8}"/>
+                <a16:creationId xmlns:a16="http://schemas.microsoft.com/office/drawing/2014/main" xmlns="" id="{D9F5FF1C-39C8-3405-F94D-2152FD7EE6B8}"/>
               </a:ext>
             </a:extLst>
           </p:cNvPr>
@@ -21855,7 +21980,7 @@
           <p:cNvPr id="6" name="圖片 5">
             <a:extLst>
               <a:ext uri="{FF2B5EF4-FFF2-40B4-BE49-F238E27FC236}">
-                <a16:creationId xmlns:a16="http://schemas.microsoft.com/office/drawing/2014/main" id="{32179C2D-0BA1-8AD4-9174-32D3A5483CBF}"/>
+                <a16:creationId xmlns:a16="http://schemas.microsoft.com/office/drawing/2014/main" xmlns="" id="{32179C2D-0BA1-8AD4-9174-32D3A5483CBF}"/>
               </a:ext>
             </a:extLst>
           </p:cNvPr>
@@ -22023,7 +22148,7 @@
           <p:cNvPr id="6" name="圖片 5" descr="一張含有 文字 的圖片&#10;&#10;自動產生的描述">
             <a:extLst>
               <a:ext uri="{FF2B5EF4-FFF2-40B4-BE49-F238E27FC236}">
-                <a16:creationId xmlns:a16="http://schemas.microsoft.com/office/drawing/2014/main" id="{78CF4CCA-B8F0-EC72-F6EC-2C7CE776DE98}"/>
+                <a16:creationId xmlns:a16="http://schemas.microsoft.com/office/drawing/2014/main" xmlns="" id="{78CF4CCA-B8F0-EC72-F6EC-2C7CE776DE98}"/>
               </a:ext>
             </a:extLst>
           </p:cNvPr>
@@ -22207,7 +22332,7 @@
           <p:cNvPr id="6" name="圖片 5" descr="一張含有 文字 的圖片&#10;&#10;自動產生的描述">
             <a:extLst>
               <a:ext uri="{FF2B5EF4-FFF2-40B4-BE49-F238E27FC236}">
-                <a16:creationId xmlns:a16="http://schemas.microsoft.com/office/drawing/2014/main" id="{0198CF61-A6D5-5FB9-C855-C9A8F8767D64}"/>
+                <a16:creationId xmlns:a16="http://schemas.microsoft.com/office/drawing/2014/main" xmlns="" id="{0198CF61-A6D5-5FB9-C855-C9A8F8767D64}"/>
               </a:ext>
             </a:extLst>
           </p:cNvPr>
@@ -22253,7 +22378,7 @@
         <p:cNvPr id="1" name="">
           <a:extLst>
             <a:ext uri="{FF2B5EF4-FFF2-40B4-BE49-F238E27FC236}">
-              <a16:creationId xmlns:a16="http://schemas.microsoft.com/office/drawing/2014/main" id="{F7A47D33-27AD-F7CD-5AB0-C27353135A38}"/>
+              <a16:creationId xmlns:a16="http://schemas.microsoft.com/office/drawing/2014/main" xmlns="" id="{F7A47D33-27AD-F7CD-5AB0-C27353135A38}"/>
             </a:ext>
           </a:extLst>
         </p:cNvPr>
@@ -22273,7 +22398,7 @@
           <p:cNvPr id="2" name="標題 1">
             <a:extLst>
               <a:ext uri="{FF2B5EF4-FFF2-40B4-BE49-F238E27FC236}">
-                <a16:creationId xmlns:a16="http://schemas.microsoft.com/office/drawing/2014/main" id="{68DD2C9F-BDEF-3809-3998-544488C6C44D}"/>
+                <a16:creationId xmlns:a16="http://schemas.microsoft.com/office/drawing/2014/main" xmlns="" id="{68DD2C9F-BDEF-3809-3998-544488C6C44D}"/>
               </a:ext>
             </a:extLst>
           </p:cNvPr>
@@ -22350,7 +22475,7 @@
           <p:cNvPr id="3" name="投影片編號版面配置區 2">
             <a:extLst>
               <a:ext uri="{FF2B5EF4-FFF2-40B4-BE49-F238E27FC236}">
-                <a16:creationId xmlns:a16="http://schemas.microsoft.com/office/drawing/2014/main" id="{8BEDDF80-7292-D937-00A5-CA0111F6B34B}"/>
+                <a16:creationId xmlns:a16="http://schemas.microsoft.com/office/drawing/2014/main" xmlns="" id="{8BEDDF80-7292-D937-00A5-CA0111F6B34B}"/>
               </a:ext>
             </a:extLst>
           </p:cNvPr>
@@ -22380,7 +22505,7 @@
           <p:cNvPr id="4" name="內容版面配置區 3">
             <a:extLst>
               <a:ext uri="{FF2B5EF4-FFF2-40B4-BE49-F238E27FC236}">
-                <a16:creationId xmlns:a16="http://schemas.microsoft.com/office/drawing/2014/main" id="{9C32B136-351F-0F39-7692-A37A10F04496}"/>
+                <a16:creationId xmlns:a16="http://schemas.microsoft.com/office/drawing/2014/main" xmlns="" id="{9C32B136-351F-0F39-7692-A37A10F04496}"/>
               </a:ext>
             </a:extLst>
           </p:cNvPr>
@@ -23208,6 +23333,13 @@
   <p:clrMapOvr>
     <a:masterClrMapping/>
   </p:clrMapOvr>
+  <p:timing>
+    <p:tnLst>
+      <p:par>
+        <p:cTn id="1" dur="indefinite" restart="never" nodeType="tmRoot"/>
+      </p:par>
+    </p:tnLst>
+  </p:timing>
 </p:sld>
 </file>
 
@@ -23942,7 +24074,7 @@
           <p:cNvPr id="5" name="圖片 4">
             <a:extLst>
               <a:ext uri="{FF2B5EF4-FFF2-40B4-BE49-F238E27FC236}">
-                <a16:creationId xmlns:a16="http://schemas.microsoft.com/office/drawing/2014/main" id="{6E0A87C0-AD66-C2FE-F521-BCC46EF8C143}"/>
+                <a16:creationId xmlns:a16="http://schemas.microsoft.com/office/drawing/2014/main" xmlns="" id="{6E0A87C0-AD66-C2FE-F521-BCC46EF8C143}"/>
               </a:ext>
             </a:extLst>
           </p:cNvPr>
@@ -24383,6 +24515,14 @@
               <a:rPr lang="en-US" altLang="zh-TW" dirty="0" err="1"/>
               <a:t>.maker</a:t>
             </a:r>
+            <a:r>
+              <a:rPr lang="en-US" altLang="zh-TW" dirty="0">
+                <a:solidFill>
+                  <a:schemeClr val="accent1"/>
+                </a:solidFill>
+              </a:rPr>
+              <a:t/>
+            </a:r>
             <a:br>
               <a:rPr lang="en-US" altLang="zh-TW" dirty="0">
                 <a:solidFill>
@@ -24747,7 +24887,7 @@
           <p:cNvPr id="5" name="文字方塊 4">
             <a:extLst>
               <a:ext uri="{FF2B5EF4-FFF2-40B4-BE49-F238E27FC236}">
-                <a16:creationId xmlns:a16="http://schemas.microsoft.com/office/drawing/2014/main" id="{C88CA5E7-BF1F-BCAB-6159-B9981A488A3B}"/>
+                <a16:creationId xmlns:a16="http://schemas.microsoft.com/office/drawing/2014/main" xmlns="" id="{C88CA5E7-BF1F-BCAB-6159-B9981A488A3B}"/>
               </a:ext>
             </a:extLst>
           </p:cNvPr>
@@ -25533,7 +25673,7 @@
           <p:cNvPr id="2" name="標題 1">
             <a:extLst>
               <a:ext uri="{FF2B5EF4-FFF2-40B4-BE49-F238E27FC236}">
-                <a16:creationId xmlns:a16="http://schemas.microsoft.com/office/drawing/2014/main" id="{A78F0540-1BC2-078D-9118-7E84C7144502}"/>
+                <a16:creationId xmlns:a16="http://schemas.microsoft.com/office/drawing/2014/main" xmlns="" id="{A78F0540-1BC2-078D-9118-7E84C7144502}"/>
               </a:ext>
             </a:extLst>
           </p:cNvPr>
@@ -25577,7 +25717,7 @@
           <p:cNvPr id="3" name="投影片編號版面配置區 2">
             <a:extLst>
               <a:ext uri="{FF2B5EF4-FFF2-40B4-BE49-F238E27FC236}">
-                <a16:creationId xmlns:a16="http://schemas.microsoft.com/office/drawing/2014/main" id="{35D728C5-EE00-39AA-2830-B4D017C8AFD8}"/>
+                <a16:creationId xmlns:a16="http://schemas.microsoft.com/office/drawing/2014/main" xmlns="" id="{35D728C5-EE00-39AA-2830-B4D017C8AFD8}"/>
               </a:ext>
             </a:extLst>
           </p:cNvPr>
@@ -25607,7 +25747,7 @@
           <p:cNvPr id="4" name="內容版面配置區 3">
             <a:extLst>
               <a:ext uri="{FF2B5EF4-FFF2-40B4-BE49-F238E27FC236}">
-                <a16:creationId xmlns:a16="http://schemas.microsoft.com/office/drawing/2014/main" id="{EFD3CF28-79C1-987B-F44A-0CB1DF3920EC}"/>
+                <a16:creationId xmlns:a16="http://schemas.microsoft.com/office/drawing/2014/main" xmlns="" id="{EFD3CF28-79C1-987B-F44A-0CB1DF3920EC}"/>
               </a:ext>
             </a:extLst>
           </p:cNvPr>
@@ -26331,7 +26471,7 @@
           <p:cNvPr id="6" name="圖片 5">
             <a:extLst>
               <a:ext uri="{FF2B5EF4-FFF2-40B4-BE49-F238E27FC236}">
-                <a16:creationId xmlns:a16="http://schemas.microsoft.com/office/drawing/2014/main" id="{A27F44EF-CD05-9C34-09A1-015E968A999E}"/>
+                <a16:creationId xmlns:a16="http://schemas.microsoft.com/office/drawing/2014/main" xmlns="" id="{A27F44EF-CD05-9C34-09A1-015E968A999E}"/>
               </a:ext>
             </a:extLst>
           </p:cNvPr>
@@ -26958,7 +27098,7 @@
           <p:cNvPr id="5" name="文字方塊 4">
             <a:extLst>
               <a:ext uri="{FF2B5EF4-FFF2-40B4-BE49-F238E27FC236}">
-                <a16:creationId xmlns:a16="http://schemas.microsoft.com/office/drawing/2014/main" id="{FB14DEDE-0F17-B8BD-B3EA-774A97706681}"/>
+                <a16:creationId xmlns:a16="http://schemas.microsoft.com/office/drawing/2014/main" xmlns="" id="{FB14DEDE-0F17-B8BD-B3EA-774A97706681}"/>
               </a:ext>
             </a:extLst>
           </p:cNvPr>
@@ -27183,6 +27323,13 @@
   <p:clrMapOvr>
     <a:masterClrMapping/>
   </p:clrMapOvr>
+  <p:timing>
+    <p:tnLst>
+      <p:par>
+        <p:cTn id="1" dur="indefinite" restart="never" nodeType="tmRoot"/>
+      </p:par>
+    </p:tnLst>
+  </p:timing>
 </p:sld>
 </file>
 
@@ -28451,7 +28598,7 @@
         <p:cNvPr id="1" name="">
           <a:extLst>
             <a:ext uri="{FF2B5EF4-FFF2-40B4-BE49-F238E27FC236}">
-              <a16:creationId xmlns:a16="http://schemas.microsoft.com/office/drawing/2014/main" id="{5729D664-68C8-2811-EDAD-1DF73BC10000}"/>
+              <a16:creationId xmlns:a16="http://schemas.microsoft.com/office/drawing/2014/main" xmlns="" id="{5729D664-68C8-2811-EDAD-1DF73BC10000}"/>
             </a:ext>
           </a:extLst>
         </p:cNvPr>
@@ -28471,7 +28618,7 @@
           <p:cNvPr id="2" name="標題 1">
             <a:extLst>
               <a:ext uri="{FF2B5EF4-FFF2-40B4-BE49-F238E27FC236}">
-                <a16:creationId xmlns:a16="http://schemas.microsoft.com/office/drawing/2014/main" id="{488939AA-3A82-8965-1277-AE9B2B64E5AA}"/>
+                <a16:creationId xmlns:a16="http://schemas.microsoft.com/office/drawing/2014/main" xmlns="" id="{488939AA-3A82-8965-1277-AE9B2B64E5AA}"/>
               </a:ext>
             </a:extLst>
           </p:cNvPr>
@@ -28538,7 +28685,7 @@
           <p:cNvPr id="3" name="投影片編號版面配置區 2">
             <a:extLst>
               <a:ext uri="{FF2B5EF4-FFF2-40B4-BE49-F238E27FC236}">
-                <a16:creationId xmlns:a16="http://schemas.microsoft.com/office/drawing/2014/main" id="{BD6705ED-9B99-85A2-F7AB-EA1BB42423CE}"/>
+                <a16:creationId xmlns:a16="http://schemas.microsoft.com/office/drawing/2014/main" xmlns="" id="{BD6705ED-9B99-85A2-F7AB-EA1BB42423CE}"/>
               </a:ext>
             </a:extLst>
           </p:cNvPr>
@@ -28568,7 +28715,7 @@
           <p:cNvPr id="4" name="內容版面配置區 3">
             <a:extLst>
               <a:ext uri="{FF2B5EF4-FFF2-40B4-BE49-F238E27FC236}">
-                <a16:creationId xmlns:a16="http://schemas.microsoft.com/office/drawing/2014/main" id="{4A41F358-CE01-1B94-60C7-23D80336AD05}"/>
+                <a16:creationId xmlns:a16="http://schemas.microsoft.com/office/drawing/2014/main" xmlns="" id="{4A41F358-CE01-1B94-60C7-23D80336AD05}"/>
               </a:ext>
             </a:extLst>
           </p:cNvPr>
@@ -28676,7 +28823,7 @@
           <p:cNvPr id="5" name="文字方塊 4">
             <a:extLst>
               <a:ext uri="{FF2B5EF4-FFF2-40B4-BE49-F238E27FC236}">
-                <a16:creationId xmlns:a16="http://schemas.microsoft.com/office/drawing/2014/main" id="{57FF48B1-AE23-FDD0-E7AE-6F103F527D82}"/>
+                <a16:creationId xmlns:a16="http://schemas.microsoft.com/office/drawing/2014/main" xmlns="" id="{57FF48B1-AE23-FDD0-E7AE-6F103F527D82}"/>
               </a:ext>
             </a:extLst>
           </p:cNvPr>
@@ -29198,7 +29345,7 @@
           <p:cNvPr id="6" name="圖片 5">
             <a:extLst>
               <a:ext uri="{FF2B5EF4-FFF2-40B4-BE49-F238E27FC236}">
-                <a16:creationId xmlns:a16="http://schemas.microsoft.com/office/drawing/2014/main" id="{00E8E5D8-0B78-A36E-039A-AE0F323E8E0F}"/>
+                <a16:creationId xmlns:a16="http://schemas.microsoft.com/office/drawing/2014/main" xmlns="" id="{00E8E5D8-0B78-A36E-039A-AE0F323E8E0F}"/>
               </a:ext>
             </a:extLst>
           </p:cNvPr>
@@ -29328,7 +29475,7 @@
           <p:cNvPr id="6" name="圖片 5" descr="一張含有 文字 的圖片&#10;&#10;自動產生的描述">
             <a:extLst>
               <a:ext uri="{FF2B5EF4-FFF2-40B4-BE49-F238E27FC236}">
-                <a16:creationId xmlns:a16="http://schemas.microsoft.com/office/drawing/2014/main" id="{C94C3084-2672-A33A-0647-67BD83116990}"/>
+                <a16:creationId xmlns:a16="http://schemas.microsoft.com/office/drawing/2014/main" xmlns="" id="{C94C3084-2672-A33A-0647-67BD83116990}"/>
               </a:ext>
             </a:extLst>
           </p:cNvPr>
@@ -29470,7 +29617,7 @@
           <p:cNvPr id="6" name="圖片 5">
             <a:extLst>
               <a:ext uri="{FF2B5EF4-FFF2-40B4-BE49-F238E27FC236}">
-                <a16:creationId xmlns:a16="http://schemas.microsoft.com/office/drawing/2014/main" id="{74815F5D-6A49-033D-9A60-48535CEB3AEB}"/>
+                <a16:creationId xmlns:a16="http://schemas.microsoft.com/office/drawing/2014/main" xmlns="" id="{74815F5D-6A49-033D-9A60-48535CEB3AEB}"/>
               </a:ext>
             </a:extLst>
           </p:cNvPr>
@@ -29917,7 +30064,7 @@
           <p:cNvPr id="6" name="圖片 5">
             <a:extLst>
               <a:ext uri="{FF2B5EF4-FFF2-40B4-BE49-F238E27FC236}">
-                <a16:creationId xmlns:a16="http://schemas.microsoft.com/office/drawing/2014/main" id="{54148BB9-81E8-00F3-80C8-0988A1865813}"/>
+                <a16:creationId xmlns:a16="http://schemas.microsoft.com/office/drawing/2014/main" xmlns="" id="{54148BB9-81E8-00F3-80C8-0988A1865813}"/>
               </a:ext>
             </a:extLst>
           </p:cNvPr>
@@ -30073,49 +30220,49 @@
                 <a:gridCol w="1165705">
                   <a:extLst>
                     <a:ext uri="{9D8B030D-6E8A-4147-A177-3AD203B41FA5}">
-                      <a16:colId xmlns:a16="http://schemas.microsoft.com/office/drawing/2014/main" val="20000"/>
+                      <a16:colId xmlns:a16="http://schemas.microsoft.com/office/drawing/2014/main" xmlns="" val="20000"/>
                     </a:ext>
                   </a:extLst>
                 </a:gridCol>
                 <a:gridCol w="1202421">
                   <a:extLst>
                     <a:ext uri="{9D8B030D-6E8A-4147-A177-3AD203B41FA5}">
-                      <a16:colId xmlns:a16="http://schemas.microsoft.com/office/drawing/2014/main" val="20001"/>
+                      <a16:colId xmlns:a16="http://schemas.microsoft.com/office/drawing/2014/main" xmlns="" val="20001"/>
                     </a:ext>
                   </a:extLst>
                 </a:gridCol>
                 <a:gridCol w="944143">
                   <a:extLst>
                     <a:ext uri="{9D8B030D-6E8A-4147-A177-3AD203B41FA5}">
-                      <a16:colId xmlns:a16="http://schemas.microsoft.com/office/drawing/2014/main" val="20002"/>
+                      <a16:colId xmlns:a16="http://schemas.microsoft.com/office/drawing/2014/main" xmlns="" val="20002"/>
                     </a:ext>
                   </a:extLst>
                 </a:gridCol>
                 <a:gridCol w="995925">
                   <a:extLst>
                     <a:ext uri="{9D8B030D-6E8A-4147-A177-3AD203B41FA5}">
-                      <a16:colId xmlns:a16="http://schemas.microsoft.com/office/drawing/2014/main" val="20003"/>
+                      <a16:colId xmlns:a16="http://schemas.microsoft.com/office/drawing/2014/main" xmlns="" val="20003"/>
                     </a:ext>
                   </a:extLst>
                 </a:gridCol>
                 <a:gridCol w="1354941">
                   <a:extLst>
                     <a:ext uri="{9D8B030D-6E8A-4147-A177-3AD203B41FA5}">
-                      <a16:colId xmlns:a16="http://schemas.microsoft.com/office/drawing/2014/main" val="20004"/>
+                      <a16:colId xmlns:a16="http://schemas.microsoft.com/office/drawing/2014/main" xmlns="" val="20004"/>
                     </a:ext>
                   </a:extLst>
                 </a:gridCol>
                 <a:gridCol w="913938">
                   <a:extLst>
                     <a:ext uri="{9D8B030D-6E8A-4147-A177-3AD203B41FA5}">
-                      <a16:colId xmlns:a16="http://schemas.microsoft.com/office/drawing/2014/main" val="20005"/>
+                      <a16:colId xmlns:a16="http://schemas.microsoft.com/office/drawing/2014/main" xmlns="" val="20005"/>
                     </a:ext>
                   </a:extLst>
                 </a:gridCol>
                 <a:gridCol w="1957328">
                   <a:extLst>
                     <a:ext uri="{9D8B030D-6E8A-4147-A177-3AD203B41FA5}">
-                      <a16:colId xmlns:a16="http://schemas.microsoft.com/office/drawing/2014/main" val="20006"/>
+                      <a16:colId xmlns:a16="http://schemas.microsoft.com/office/drawing/2014/main" xmlns="" val="20006"/>
                     </a:ext>
                   </a:extLst>
                 </a:gridCol>
@@ -30326,7 +30473,7 @@
                 </a:tc>
                 <a:extLst>
                   <a:ext uri="{0D108BD9-81ED-4DB2-BD59-A6C34878D82A}">
-                    <a16:rowId xmlns:a16="http://schemas.microsoft.com/office/drawing/2014/main" val="10000"/>
+                    <a16:rowId xmlns:a16="http://schemas.microsoft.com/office/drawing/2014/main" xmlns="" val="10000"/>
                   </a:ext>
                 </a:extLst>
               </a:tr>
@@ -30548,7 +30695,7 @@
                 </a:tc>
                 <a:extLst>
                   <a:ext uri="{0D108BD9-81ED-4DB2-BD59-A6C34878D82A}">
-                    <a16:rowId xmlns:a16="http://schemas.microsoft.com/office/drawing/2014/main" val="10001"/>
+                    <a16:rowId xmlns:a16="http://schemas.microsoft.com/office/drawing/2014/main" xmlns="" val="10001"/>
                   </a:ext>
                 </a:extLst>
               </a:tr>
@@ -30764,7 +30911,7 @@
                 </a:tc>
                 <a:extLst>
                   <a:ext uri="{0D108BD9-81ED-4DB2-BD59-A6C34878D82A}">
-                    <a16:rowId xmlns:a16="http://schemas.microsoft.com/office/drawing/2014/main" val="10002"/>
+                    <a16:rowId xmlns:a16="http://schemas.microsoft.com/office/drawing/2014/main" xmlns="" val="10002"/>
                   </a:ext>
                 </a:extLst>
               </a:tr>
@@ -30818,7 +30965,7 @@
           <p:cNvPr id="1027" name="圖片 2">
             <a:extLst>
               <a:ext uri="{FF2B5EF4-FFF2-40B4-BE49-F238E27FC236}">
-                <a16:creationId xmlns:a16="http://schemas.microsoft.com/office/drawing/2014/main" id="{DBA02237-3D49-11E7-6503-222A8878FA47}"/>
+                <a16:creationId xmlns:a16="http://schemas.microsoft.com/office/drawing/2014/main" xmlns="" id="{DBA02237-3D49-11E7-6503-222A8878FA47}"/>
               </a:ext>
             </a:extLst>
           </p:cNvPr>
@@ -30865,7 +31012,7 @@
           <p:cNvPr id="1026" name="圖片 3">
             <a:extLst>
               <a:ext uri="{FF2B5EF4-FFF2-40B4-BE49-F238E27FC236}">
-                <a16:creationId xmlns:a16="http://schemas.microsoft.com/office/drawing/2014/main" id="{DC0A7036-94C4-A958-F053-97A77D56C082}"/>
+                <a16:creationId xmlns:a16="http://schemas.microsoft.com/office/drawing/2014/main" xmlns="" id="{DC0A7036-94C4-A958-F053-97A77D56C082}"/>
               </a:ext>
             </a:extLst>
           </p:cNvPr>
@@ -30912,7 +31059,7 @@
           <p:cNvPr id="1025" name="圖片 4">
             <a:extLst>
               <a:ext uri="{FF2B5EF4-FFF2-40B4-BE49-F238E27FC236}">
-                <a16:creationId xmlns:a16="http://schemas.microsoft.com/office/drawing/2014/main" id="{C4F1F6CE-8B31-4CCC-AF72-E96E3DCA2765}"/>
+                <a16:creationId xmlns:a16="http://schemas.microsoft.com/office/drawing/2014/main" xmlns="" id="{C4F1F6CE-8B31-4CCC-AF72-E96E3DCA2765}"/>
               </a:ext>
             </a:extLst>
           </p:cNvPr>
@@ -30964,6 +31111,13 @@
   <p:clrMapOvr>
     <a:masterClrMapping/>
   </p:clrMapOvr>
+  <p:timing>
+    <p:tnLst>
+      <p:par>
+        <p:cTn id="1" dur="indefinite" restart="never" nodeType="tmRoot"/>
+      </p:par>
+    </p:tnLst>
+  </p:timing>
 </p:sld>
 </file>
 
@@ -31289,7 +31443,7 @@
           <p:cNvPr id="6" name="圖片 5">
             <a:extLst>
               <a:ext uri="{FF2B5EF4-FFF2-40B4-BE49-F238E27FC236}">
-                <a16:creationId xmlns:a16="http://schemas.microsoft.com/office/drawing/2014/main" id="{DAD52F9F-4A65-424D-9A5B-1AFE509FF6C4}"/>
+                <a16:creationId xmlns:a16="http://schemas.microsoft.com/office/drawing/2014/main" xmlns="" id="{DAD52F9F-4A65-424D-9A5B-1AFE509FF6C4}"/>
               </a:ext>
             </a:extLst>
           </p:cNvPr>
@@ -31319,7 +31473,7 @@
           <p:cNvPr id="5" name="矩形 4">
             <a:extLst>
               <a:ext uri="{FF2B5EF4-FFF2-40B4-BE49-F238E27FC236}">
-                <a16:creationId xmlns:a16="http://schemas.microsoft.com/office/drawing/2014/main" id="{B86AB853-D4FB-8A89-18E8-4EC78EF016E5}"/>
+                <a16:creationId xmlns:a16="http://schemas.microsoft.com/office/drawing/2014/main" xmlns="" id="{B86AB853-D4FB-8A89-18E8-4EC78EF016E5}"/>
               </a:ext>
             </a:extLst>
           </p:cNvPr>
@@ -31369,7 +31523,7 @@
           <p:cNvPr id="7" name="矩形 6">
             <a:extLst>
               <a:ext uri="{FF2B5EF4-FFF2-40B4-BE49-F238E27FC236}">
-                <a16:creationId xmlns:a16="http://schemas.microsoft.com/office/drawing/2014/main" id="{FE3F41DA-CF78-69FC-A6CE-68E02F97A870}"/>
+                <a16:creationId xmlns:a16="http://schemas.microsoft.com/office/drawing/2014/main" xmlns="" id="{FE3F41DA-CF78-69FC-A6CE-68E02F97A870}"/>
               </a:ext>
             </a:extLst>
           </p:cNvPr>
@@ -31973,7 +32127,7 @@
           <p:cNvPr id="6" name="圖片 5">
             <a:extLst>
               <a:ext uri="{FF2B5EF4-FFF2-40B4-BE49-F238E27FC236}">
-                <a16:creationId xmlns:a16="http://schemas.microsoft.com/office/drawing/2014/main" id="{6F4E2B52-7A8D-C188-E5D8-A7F5F2DF12A0}"/>
+                <a16:creationId xmlns:a16="http://schemas.microsoft.com/office/drawing/2014/main" xmlns="" id="{6F4E2B52-7A8D-C188-E5D8-A7F5F2DF12A0}"/>
               </a:ext>
             </a:extLst>
           </p:cNvPr>
@@ -32003,7 +32157,7 @@
           <p:cNvPr id="8" name="矩形 7">
             <a:extLst>
               <a:ext uri="{FF2B5EF4-FFF2-40B4-BE49-F238E27FC236}">
-                <a16:creationId xmlns:a16="http://schemas.microsoft.com/office/drawing/2014/main" id="{37724FD5-B4E4-C8B2-1A46-0ABFE5548A08}"/>
+                <a16:creationId xmlns:a16="http://schemas.microsoft.com/office/drawing/2014/main" xmlns="" id="{37724FD5-B4E4-C8B2-1A46-0ABFE5548A08}"/>
               </a:ext>
             </a:extLst>
           </p:cNvPr>
@@ -32228,7 +32382,7 @@
         <p:cNvPr id="1" name="">
           <a:extLst>
             <a:ext uri="{FF2B5EF4-FFF2-40B4-BE49-F238E27FC236}">
-              <a16:creationId xmlns:a16="http://schemas.microsoft.com/office/drawing/2014/main" id="{5C878DD2-1051-94D0-1520-B012A14B974A}"/>
+              <a16:creationId xmlns:a16="http://schemas.microsoft.com/office/drawing/2014/main" xmlns="" id="{5C878DD2-1051-94D0-1520-B012A14B974A}"/>
             </a:ext>
           </a:extLst>
         </p:cNvPr>
@@ -32248,7 +32402,7 @@
           <p:cNvPr id="2" name="標題 1">
             <a:extLst>
               <a:ext uri="{FF2B5EF4-FFF2-40B4-BE49-F238E27FC236}">
-                <a16:creationId xmlns:a16="http://schemas.microsoft.com/office/drawing/2014/main" id="{8EC1744A-EB19-B3EA-9480-0683B537AE51}"/>
+                <a16:creationId xmlns:a16="http://schemas.microsoft.com/office/drawing/2014/main" xmlns="" id="{8EC1744A-EB19-B3EA-9480-0683B537AE51}"/>
               </a:ext>
             </a:extLst>
           </p:cNvPr>
@@ -32293,7 +32447,7 @@
           <p:cNvPr id="3" name="投影片編號版面配置區 2">
             <a:extLst>
               <a:ext uri="{FF2B5EF4-FFF2-40B4-BE49-F238E27FC236}">
-                <a16:creationId xmlns:a16="http://schemas.microsoft.com/office/drawing/2014/main" id="{1A0384DA-8146-4E85-F200-349E29E15EAF}"/>
+                <a16:creationId xmlns:a16="http://schemas.microsoft.com/office/drawing/2014/main" xmlns="" id="{1A0384DA-8146-4E85-F200-349E29E15EAF}"/>
               </a:ext>
             </a:extLst>
           </p:cNvPr>
@@ -32323,7 +32477,7 @@
           <p:cNvPr id="4" name="內容版面配置區 3">
             <a:extLst>
               <a:ext uri="{FF2B5EF4-FFF2-40B4-BE49-F238E27FC236}">
-                <a16:creationId xmlns:a16="http://schemas.microsoft.com/office/drawing/2014/main" id="{525E266E-C094-C63C-CBCD-B7EC86140C48}"/>
+                <a16:creationId xmlns:a16="http://schemas.microsoft.com/office/drawing/2014/main" xmlns="" id="{525E266E-C094-C63C-CBCD-B7EC86140C48}"/>
               </a:ext>
             </a:extLst>
           </p:cNvPr>
@@ -32352,7 +32506,7 @@
           <p:cNvPr id="6" name="圖片 5">
             <a:extLst>
               <a:ext uri="{FF2B5EF4-FFF2-40B4-BE49-F238E27FC236}">
-                <a16:creationId xmlns:a16="http://schemas.microsoft.com/office/drawing/2014/main" id="{505E569D-9516-6D26-0ECF-A4A6091FCC50}"/>
+                <a16:creationId xmlns:a16="http://schemas.microsoft.com/office/drawing/2014/main" xmlns="" id="{505E569D-9516-6D26-0ECF-A4A6091FCC50}"/>
               </a:ext>
             </a:extLst>
           </p:cNvPr>
@@ -32382,7 +32536,7 @@
           <p:cNvPr id="7" name="矩形 6">
             <a:extLst>
               <a:ext uri="{FF2B5EF4-FFF2-40B4-BE49-F238E27FC236}">
-                <a16:creationId xmlns:a16="http://schemas.microsoft.com/office/drawing/2014/main" id="{4B6FA882-9922-F811-BAEF-BEE07FF978ED}"/>
+                <a16:creationId xmlns:a16="http://schemas.microsoft.com/office/drawing/2014/main" xmlns="" id="{4B6FA882-9922-F811-BAEF-BEE07FF978ED}"/>
               </a:ext>
             </a:extLst>
           </p:cNvPr>
@@ -32613,6 +32767,14 @@
   <p:clrMapOvr>
     <a:masterClrMapping/>
   </p:clrMapOvr>
+  <mc:AlternateContent xmlns:mc="http://schemas.openxmlformats.org/markup-compatibility/2006">
+    <mc:Choice xmlns:p14="http://schemas.microsoft.com/office/powerpoint/2010/main" Requires="p14">
+      <p:transition spd="slow" p14:dur="2000"/>
+    </mc:Choice>
+    <mc:Fallback>
+      <p:transition spd="slow"/>
+    </mc:Fallback>
+  </mc:AlternateContent>
 </p:sld>
 </file>
 
@@ -32902,6 +33064,14 @@
   <p:clrMapOvr>
     <a:masterClrMapping/>
   </p:clrMapOvr>
+  <mc:AlternateContent xmlns:mc="http://schemas.openxmlformats.org/markup-compatibility/2006">
+    <mc:Choice xmlns:p14="http://schemas.microsoft.com/office/powerpoint/2010/main" Requires="p14">
+      <p:transition spd="slow" p14:dur="2000"/>
+    </mc:Choice>
+    <mc:Fallback>
+      <p:transition spd="slow"/>
+    </mc:Fallback>
+  </mc:AlternateContent>
 </p:sld>
 </file>
 
@@ -33122,6 +33292,14 @@
   <p:clrMapOvr>
     <a:masterClrMapping/>
   </p:clrMapOvr>
+  <mc:AlternateContent xmlns:mc="http://schemas.openxmlformats.org/markup-compatibility/2006">
+    <mc:Choice xmlns:p14="http://schemas.microsoft.com/office/powerpoint/2010/main" Requires="p14">
+      <p:transition spd="slow" p14:dur="2000"/>
+    </mc:Choice>
+    <mc:Fallback>
+      <p:transition spd="slow"/>
+    </mc:Fallback>
+  </mc:AlternateContent>
 </p:sld>
 </file>
 
@@ -33457,6 +33635,14 @@
   <p:clrMapOvr>
     <a:masterClrMapping/>
   </p:clrMapOvr>
+  <mc:AlternateContent xmlns:mc="http://schemas.openxmlformats.org/markup-compatibility/2006">
+    <mc:Choice xmlns:p14="http://schemas.microsoft.com/office/powerpoint/2010/main" Requires="p14">
+      <p:transition spd="slow" p14:dur="2000"/>
+    </mc:Choice>
+    <mc:Fallback>
+      <p:transition spd="slow"/>
+    </mc:Fallback>
+  </mc:AlternateContent>
 </p:sld>
 </file>
 
@@ -33553,49 +33739,49 @@
                 <a:gridCol w="1554335">
                   <a:extLst>
                     <a:ext uri="{9D8B030D-6E8A-4147-A177-3AD203B41FA5}">
-                      <a16:colId xmlns:a16="http://schemas.microsoft.com/office/drawing/2014/main" val="20000"/>
+                      <a16:colId xmlns:a16="http://schemas.microsoft.com/office/drawing/2014/main" xmlns="" val="20000"/>
                     </a:ext>
                   </a:extLst>
                 </a:gridCol>
                 <a:gridCol w="823087">
                   <a:extLst>
                     <a:ext uri="{9D8B030D-6E8A-4147-A177-3AD203B41FA5}">
-                      <a16:colId xmlns:a16="http://schemas.microsoft.com/office/drawing/2014/main" val="20001"/>
+                      <a16:colId xmlns:a16="http://schemas.microsoft.com/office/drawing/2014/main" xmlns="" val="20001"/>
                     </a:ext>
                   </a:extLst>
                 </a:gridCol>
                 <a:gridCol w="947850">
                   <a:extLst>
                     <a:ext uri="{9D8B030D-6E8A-4147-A177-3AD203B41FA5}">
-                      <a16:colId xmlns:a16="http://schemas.microsoft.com/office/drawing/2014/main" val="20002"/>
+                      <a16:colId xmlns:a16="http://schemas.microsoft.com/office/drawing/2014/main" xmlns="" val="20002"/>
                     </a:ext>
                   </a:extLst>
                 </a:gridCol>
                 <a:gridCol w="999834">
                   <a:extLst>
                     <a:ext uri="{9D8B030D-6E8A-4147-A177-3AD203B41FA5}">
-                      <a16:colId xmlns:a16="http://schemas.microsoft.com/office/drawing/2014/main" val="20003"/>
+                      <a16:colId xmlns:a16="http://schemas.microsoft.com/office/drawing/2014/main" xmlns="" val="20003"/>
                     </a:ext>
                   </a:extLst>
                 </a:gridCol>
                 <a:gridCol w="1360260">
                   <a:extLst>
                     <a:ext uri="{9D8B030D-6E8A-4147-A177-3AD203B41FA5}">
-                      <a16:colId xmlns:a16="http://schemas.microsoft.com/office/drawing/2014/main" val="20004"/>
+                      <a16:colId xmlns:a16="http://schemas.microsoft.com/office/drawing/2014/main" xmlns="" val="20004"/>
                     </a:ext>
                   </a:extLst>
                 </a:gridCol>
                 <a:gridCol w="917526">
                   <a:extLst>
                     <a:ext uri="{9D8B030D-6E8A-4147-A177-3AD203B41FA5}">
-                      <a16:colId xmlns:a16="http://schemas.microsoft.com/office/drawing/2014/main" val="20005"/>
+                      <a16:colId xmlns:a16="http://schemas.microsoft.com/office/drawing/2014/main" xmlns="" val="20005"/>
                     </a:ext>
                   </a:extLst>
                 </a:gridCol>
                 <a:gridCol w="1965012">
                   <a:extLst>
                     <a:ext uri="{9D8B030D-6E8A-4147-A177-3AD203B41FA5}">
-                      <a16:colId xmlns:a16="http://schemas.microsoft.com/office/drawing/2014/main" val="20006"/>
+                      <a16:colId xmlns:a16="http://schemas.microsoft.com/office/drawing/2014/main" xmlns="" val="20006"/>
                     </a:ext>
                   </a:extLst>
                 </a:gridCol>
@@ -33896,7 +34082,7 @@
                 </a:tc>
                 <a:extLst>
                   <a:ext uri="{0D108BD9-81ED-4DB2-BD59-A6C34878D82A}">
-                    <a16:rowId xmlns:a16="http://schemas.microsoft.com/office/drawing/2014/main" val="10000"/>
+                    <a16:rowId xmlns:a16="http://schemas.microsoft.com/office/drawing/2014/main" xmlns="" val="10000"/>
                   </a:ext>
                 </a:extLst>
               </a:tr>
@@ -34118,7 +34304,7 @@
                 </a:tc>
                 <a:extLst>
                   <a:ext uri="{0D108BD9-81ED-4DB2-BD59-A6C34878D82A}">
-                    <a16:rowId xmlns:a16="http://schemas.microsoft.com/office/drawing/2014/main" val="10001"/>
+                    <a16:rowId xmlns:a16="http://schemas.microsoft.com/office/drawing/2014/main" xmlns="" val="10001"/>
                   </a:ext>
                 </a:extLst>
               </a:tr>
@@ -34259,6 +34445,13 @@
   <p:clrMapOvr>
     <a:masterClrMapping/>
   </p:clrMapOvr>
+  <p:timing>
+    <p:tnLst>
+      <p:par>
+        <p:cTn id="1" dur="indefinite" restart="never" nodeType="tmRoot"/>
+      </p:par>
+    </p:tnLst>
+  </p:timing>
 </p:sld>
 </file>
 
@@ -34421,6 +34614,14 @@
   <p:clrMapOvr>
     <a:masterClrMapping/>
   </p:clrMapOvr>
+  <mc:AlternateContent xmlns:mc="http://schemas.openxmlformats.org/markup-compatibility/2006">
+    <mc:Choice xmlns:p14="http://schemas.microsoft.com/office/powerpoint/2010/main" Requires="p14">
+      <p:transition spd="slow" p14:dur="2000"/>
+    </mc:Choice>
+    <mc:Fallback>
+      <p:transition spd="slow"/>
+    </mc:Fallback>
+  </mc:AlternateContent>
 </p:sld>
 </file>
 
@@ -34576,7 +34777,7 @@
           <p:cNvPr id="6" name="圖片 5">
             <a:extLst>
               <a:ext uri="{FF2B5EF4-FFF2-40B4-BE49-F238E27FC236}">
-                <a16:creationId xmlns:a16="http://schemas.microsoft.com/office/drawing/2014/main" id="{68BA4531-7FFC-F303-F0C3-CB4D209C4660}"/>
+                <a16:creationId xmlns:a16="http://schemas.microsoft.com/office/drawing/2014/main" xmlns="" id="{68BA4531-7FFC-F303-F0C3-CB4D209C4660}"/>
               </a:ext>
             </a:extLst>
           </p:cNvPr>
@@ -34611,6 +34812,14 @@
   <p:clrMapOvr>
     <a:masterClrMapping/>
   </p:clrMapOvr>
+  <mc:AlternateContent xmlns:mc="http://schemas.openxmlformats.org/markup-compatibility/2006">
+    <mc:Choice xmlns:p14="http://schemas.microsoft.com/office/powerpoint/2010/main" Requires="p14">
+      <p:transition spd="slow" p14:dur="2000"/>
+    </mc:Choice>
+    <mc:Fallback>
+      <p:transition spd="slow"/>
+    </mc:Fallback>
+  </mc:AlternateContent>
 </p:sld>
 </file>
 
@@ -34728,7 +34937,7 @@
           <p:cNvPr id="6" name="圖片 5" descr="一張含有 文字 的圖片&#10;&#10;自動產生的描述">
             <a:extLst>
               <a:ext uri="{FF2B5EF4-FFF2-40B4-BE49-F238E27FC236}">
-                <a16:creationId xmlns:a16="http://schemas.microsoft.com/office/drawing/2014/main" id="{E1CE4656-8FBC-21AE-B61A-22AD580B9D53}"/>
+                <a16:creationId xmlns:a16="http://schemas.microsoft.com/office/drawing/2014/main" xmlns="" id="{E1CE4656-8FBC-21AE-B61A-22AD580B9D53}"/>
               </a:ext>
             </a:extLst>
           </p:cNvPr>
@@ -34763,6 +34972,14 @@
   <p:clrMapOvr>
     <a:masterClrMapping/>
   </p:clrMapOvr>
+  <mc:AlternateContent xmlns:mc="http://schemas.openxmlformats.org/markup-compatibility/2006">
+    <mc:Choice xmlns:p14="http://schemas.microsoft.com/office/powerpoint/2010/main" Requires="p14">
+      <p:transition spd="slow" p14:dur="2000"/>
+    </mc:Choice>
+    <mc:Fallback>
+      <p:transition spd="slow"/>
+    </mc:Fallback>
+  </mc:AlternateContent>
 </p:sld>
 </file>
 
@@ -34872,7 +35089,7 @@
           <p:cNvPr id="6" name="圖片 5">
             <a:extLst>
               <a:ext uri="{FF2B5EF4-FFF2-40B4-BE49-F238E27FC236}">
-                <a16:creationId xmlns:a16="http://schemas.microsoft.com/office/drawing/2014/main" id="{C1035EDA-DED9-D12B-21F8-13F6EAA1F135}"/>
+                <a16:creationId xmlns:a16="http://schemas.microsoft.com/office/drawing/2014/main" xmlns="" id="{C1035EDA-DED9-D12B-21F8-13F6EAA1F135}"/>
               </a:ext>
             </a:extLst>
           </p:cNvPr>
@@ -34907,6 +35124,14 @@
   <p:clrMapOvr>
     <a:masterClrMapping/>
   </p:clrMapOvr>
+  <mc:AlternateContent xmlns:mc="http://schemas.openxmlformats.org/markup-compatibility/2006">
+    <mc:Choice xmlns:p14="http://schemas.microsoft.com/office/powerpoint/2010/main" Requires="p14">
+      <p:transition spd="slow" p14:dur="2000"/>
+    </mc:Choice>
+    <mc:Fallback>
+      <p:transition spd="slow"/>
+    </mc:Fallback>
+  </mc:AlternateContent>
 </p:sld>
 </file>
 
@@ -35020,7 +35245,7 @@
           <p:cNvPr id="6" name="圖片 5" descr="一張含有 文字 的圖片&#10;&#10;自動產生的描述">
             <a:extLst>
               <a:ext uri="{FF2B5EF4-FFF2-40B4-BE49-F238E27FC236}">
-                <a16:creationId xmlns:a16="http://schemas.microsoft.com/office/drawing/2014/main" id="{9444F309-55B5-4723-7ABF-7AA1E734A0B6}"/>
+                <a16:creationId xmlns:a16="http://schemas.microsoft.com/office/drawing/2014/main" xmlns="" id="{9444F309-55B5-4723-7ABF-7AA1E734A0B6}"/>
               </a:ext>
             </a:extLst>
           </p:cNvPr>
@@ -35055,6 +35280,14 @@
   <p:clrMapOvr>
     <a:masterClrMapping/>
   </p:clrMapOvr>
+  <mc:AlternateContent xmlns:mc="http://schemas.openxmlformats.org/markup-compatibility/2006">
+    <mc:Choice xmlns:p14="http://schemas.microsoft.com/office/powerpoint/2010/main" Requires="p14">
+      <p:transition spd="slow" p14:dur="2000"/>
+    </mc:Choice>
+    <mc:Fallback>
+      <p:transition spd="slow"/>
+    </mc:Fallback>
+  </mc:AlternateContent>
 </p:sld>
 </file>
 
@@ -35193,7 +35426,7 @@
           <p:cNvPr id="6" name="圖片 5" descr="一張含有 文字 的圖片&#10;&#10;自動產生的描述">
             <a:extLst>
               <a:ext uri="{FF2B5EF4-FFF2-40B4-BE49-F238E27FC236}">
-                <a16:creationId xmlns:a16="http://schemas.microsoft.com/office/drawing/2014/main" id="{FD17E760-DADE-CA07-96FF-08C7FE3E5F7E}"/>
+                <a16:creationId xmlns:a16="http://schemas.microsoft.com/office/drawing/2014/main" xmlns="" id="{FD17E760-DADE-CA07-96FF-08C7FE3E5F7E}"/>
               </a:ext>
             </a:extLst>
           </p:cNvPr>
@@ -35223,7 +35456,7 @@
           <p:cNvPr id="7" name="圖片 6" descr="一張含有 文字 的圖片&#10;&#10;自動產生的描述">
             <a:extLst>
               <a:ext uri="{FF2B5EF4-FFF2-40B4-BE49-F238E27FC236}">
-                <a16:creationId xmlns:a16="http://schemas.microsoft.com/office/drawing/2014/main" id="{83BDCF3F-F936-8A62-0CF4-2B3EE14E5E5C}"/>
+                <a16:creationId xmlns:a16="http://schemas.microsoft.com/office/drawing/2014/main" xmlns="" id="{83BDCF3F-F936-8A62-0CF4-2B3EE14E5E5C}"/>
               </a:ext>
             </a:extLst>
           </p:cNvPr>
@@ -35258,6 +35491,14 @@
   <p:clrMapOvr>
     <a:masterClrMapping/>
   </p:clrMapOvr>
+  <mc:AlternateContent xmlns:mc="http://schemas.openxmlformats.org/markup-compatibility/2006">
+    <mc:Choice xmlns:p14="http://schemas.microsoft.com/office/powerpoint/2010/main" Requires="p14">
+      <p:transition spd="slow" p14:dur="2000"/>
+    </mc:Choice>
+    <mc:Fallback>
+      <p:transition spd="slow"/>
+    </mc:Fallback>
+  </mc:AlternateContent>
 </p:sld>
 </file>
 
@@ -35887,7 +36128,7 @@
           <p:cNvPr id="6" name="圖片 5" descr="一張含有 桌 的圖片&#10;&#10;自動產生的描述">
             <a:extLst>
               <a:ext uri="{FF2B5EF4-FFF2-40B4-BE49-F238E27FC236}">
-                <a16:creationId xmlns:a16="http://schemas.microsoft.com/office/drawing/2014/main" id="{2E87A1E7-E953-ABB8-090B-1FA6B95A444E}"/>
+                <a16:creationId xmlns:a16="http://schemas.microsoft.com/office/drawing/2014/main" xmlns="" id="{2E87A1E7-E953-ABB8-090B-1FA6B95A444E}"/>
               </a:ext>
             </a:extLst>
           </p:cNvPr>
@@ -35922,6 +36163,14 @@
   <p:clrMapOvr>
     <a:masterClrMapping/>
   </p:clrMapOvr>
+  <mc:AlternateContent xmlns:mc="http://schemas.openxmlformats.org/markup-compatibility/2006">
+    <mc:Choice xmlns:p14="http://schemas.microsoft.com/office/powerpoint/2010/main" Requires="p14">
+      <p:transition spd="slow" p14:dur="2000"/>
+    </mc:Choice>
+    <mc:Fallback>
+      <p:transition spd="slow"/>
+    </mc:Fallback>
+  </mc:AlternateContent>
 </p:sld>
 </file>
 
@@ -35947,7 +36196,7 @@
           <p:cNvPr id="2" name="標題 1">
             <a:extLst>
               <a:ext uri="{FF2B5EF4-FFF2-40B4-BE49-F238E27FC236}">
-                <a16:creationId xmlns:a16="http://schemas.microsoft.com/office/drawing/2014/main" id="{251CA8F7-1061-6AC2-BEB4-BBDB9C8718AE}"/>
+                <a16:creationId xmlns:a16="http://schemas.microsoft.com/office/drawing/2014/main" xmlns="" id="{251CA8F7-1061-6AC2-BEB4-BBDB9C8718AE}"/>
               </a:ext>
             </a:extLst>
           </p:cNvPr>
@@ -35983,7 +36232,7 @@
           <p:cNvPr id="3" name="投影片編號版面配置區 2">
             <a:extLst>
               <a:ext uri="{FF2B5EF4-FFF2-40B4-BE49-F238E27FC236}">
-                <a16:creationId xmlns:a16="http://schemas.microsoft.com/office/drawing/2014/main" id="{B7031A96-CF5D-EC36-B616-B8D6EF162020}"/>
+                <a16:creationId xmlns:a16="http://schemas.microsoft.com/office/drawing/2014/main" xmlns="" id="{B7031A96-CF5D-EC36-B616-B8D6EF162020}"/>
               </a:ext>
             </a:extLst>
           </p:cNvPr>
@@ -36013,7 +36262,7 @@
           <p:cNvPr id="5" name="內容版面配置區 4">
             <a:extLst>
               <a:ext uri="{FF2B5EF4-FFF2-40B4-BE49-F238E27FC236}">
-                <a16:creationId xmlns:a16="http://schemas.microsoft.com/office/drawing/2014/main" id="{C688FCEC-F4EE-5F07-291F-51C8D82F2718}"/>
+                <a16:creationId xmlns:a16="http://schemas.microsoft.com/office/drawing/2014/main" xmlns="" id="{C688FCEC-F4EE-5F07-291F-51C8D82F2718}"/>
               </a:ext>
             </a:extLst>
           </p:cNvPr>
@@ -36051,7 +36300,7 @@
           <p:cNvPr id="6" name="圖片 5">
             <a:extLst>
               <a:ext uri="{FF2B5EF4-FFF2-40B4-BE49-F238E27FC236}">
-                <a16:creationId xmlns:a16="http://schemas.microsoft.com/office/drawing/2014/main" id="{A50A1F3C-3473-89D3-23FD-A08030EA6174}"/>
+                <a16:creationId xmlns:a16="http://schemas.microsoft.com/office/drawing/2014/main" xmlns="" id="{A50A1F3C-3473-89D3-23FD-A08030EA6174}"/>
               </a:ext>
             </a:extLst>
           </p:cNvPr>
@@ -36092,6 +36341,14 @@
   <p:clrMapOvr>
     <a:masterClrMapping/>
   </p:clrMapOvr>
+  <mc:AlternateContent xmlns:mc="http://schemas.openxmlformats.org/markup-compatibility/2006">
+    <mc:Choice xmlns:p14="http://schemas.microsoft.com/office/powerpoint/2010/main" Requires="p14">
+      <p:transition spd="slow" p14:dur="2000"/>
+    </mc:Choice>
+    <mc:Fallback>
+      <p:transition spd="slow"/>
+    </mc:Fallback>
+  </mc:AlternateContent>
 </p:sld>
 </file>
 
@@ -36188,49 +36445,49 @@
                 <a:gridCol w="1593715">
                   <a:extLst>
                     <a:ext uri="{9D8B030D-6E8A-4147-A177-3AD203B41FA5}">
-                      <a16:colId xmlns:a16="http://schemas.microsoft.com/office/drawing/2014/main" val="20000"/>
+                      <a16:colId xmlns:a16="http://schemas.microsoft.com/office/drawing/2014/main" xmlns="" val="20000"/>
                     </a:ext>
                   </a:extLst>
                 </a:gridCol>
                 <a:gridCol w="843940">
                   <a:extLst>
                     <a:ext uri="{9D8B030D-6E8A-4147-A177-3AD203B41FA5}">
-                      <a16:colId xmlns:a16="http://schemas.microsoft.com/office/drawing/2014/main" val="20001"/>
+                      <a16:colId xmlns:a16="http://schemas.microsoft.com/office/drawing/2014/main" xmlns="" val="20001"/>
                     </a:ext>
                   </a:extLst>
                 </a:gridCol>
                 <a:gridCol w="971864">
                   <a:extLst>
                     <a:ext uri="{9D8B030D-6E8A-4147-A177-3AD203B41FA5}">
-                      <a16:colId xmlns:a16="http://schemas.microsoft.com/office/drawing/2014/main" val="20002"/>
+                      <a16:colId xmlns:a16="http://schemas.microsoft.com/office/drawing/2014/main" xmlns="" val="20002"/>
                     </a:ext>
                   </a:extLst>
                 </a:gridCol>
                 <a:gridCol w="1025166">
                   <a:extLst>
                     <a:ext uri="{9D8B030D-6E8A-4147-A177-3AD203B41FA5}">
-                      <a16:colId xmlns:a16="http://schemas.microsoft.com/office/drawing/2014/main" val="20003"/>
+                      <a16:colId xmlns:a16="http://schemas.microsoft.com/office/drawing/2014/main" xmlns="" val="20003"/>
                     </a:ext>
                   </a:extLst>
                 </a:gridCol>
                 <a:gridCol w="1394723">
                   <a:extLst>
                     <a:ext uri="{9D8B030D-6E8A-4147-A177-3AD203B41FA5}">
-                      <a16:colId xmlns:a16="http://schemas.microsoft.com/office/drawing/2014/main" val="20004"/>
+                      <a16:colId xmlns:a16="http://schemas.microsoft.com/office/drawing/2014/main" xmlns="" val="20004"/>
                     </a:ext>
                   </a:extLst>
                 </a:gridCol>
                 <a:gridCol w="940772">
                   <a:extLst>
                     <a:ext uri="{9D8B030D-6E8A-4147-A177-3AD203B41FA5}">
-                      <a16:colId xmlns:a16="http://schemas.microsoft.com/office/drawing/2014/main" val="20005"/>
+                      <a16:colId xmlns:a16="http://schemas.microsoft.com/office/drawing/2014/main" xmlns="" val="20005"/>
                     </a:ext>
                   </a:extLst>
                 </a:gridCol>
                 <a:gridCol w="2014797">
                   <a:extLst>
                     <a:ext uri="{9D8B030D-6E8A-4147-A177-3AD203B41FA5}">
-                      <a16:colId xmlns:a16="http://schemas.microsoft.com/office/drawing/2014/main" val="20006"/>
+                      <a16:colId xmlns:a16="http://schemas.microsoft.com/office/drawing/2014/main" xmlns="" val="20006"/>
                     </a:ext>
                   </a:extLst>
                 </a:gridCol>
@@ -36552,7 +36809,7 @@
                 </a:tc>
                 <a:extLst>
                   <a:ext uri="{0D108BD9-81ED-4DB2-BD59-A6C34878D82A}">
-                    <a16:rowId xmlns:a16="http://schemas.microsoft.com/office/drawing/2014/main" val="10000"/>
+                    <a16:rowId xmlns:a16="http://schemas.microsoft.com/office/drawing/2014/main" xmlns="" val="10000"/>
                   </a:ext>
                 </a:extLst>
               </a:tr>
@@ -36762,7 +37019,7 @@
                 </a:tc>
                 <a:extLst>
                   <a:ext uri="{0D108BD9-81ED-4DB2-BD59-A6C34878D82A}">
-                    <a16:rowId xmlns:a16="http://schemas.microsoft.com/office/drawing/2014/main" val="10001"/>
+                    <a16:rowId xmlns:a16="http://schemas.microsoft.com/office/drawing/2014/main" xmlns="" val="10001"/>
                   </a:ext>
                 </a:extLst>
               </a:tr>
@@ -36821,6 +37078,13 @@
   <p:clrMapOvr>
     <a:masterClrMapping/>
   </p:clrMapOvr>
+  <p:timing>
+    <p:tnLst>
+      <p:par>
+        <p:cTn id="1" dur="indefinite" restart="never" nodeType="tmRoot"/>
+      </p:par>
+    </p:tnLst>
+  </p:timing>
 </p:sld>
 </file>
 
@@ -36846,7 +37110,7 @@
           <p:cNvPr id="2" name="標題 1">
             <a:extLst>
               <a:ext uri="{FF2B5EF4-FFF2-40B4-BE49-F238E27FC236}">
-                <a16:creationId xmlns:a16="http://schemas.microsoft.com/office/drawing/2014/main" id="{686E4A1B-D137-C3A9-99AE-7DEC3B36D3EB}"/>
+                <a16:creationId xmlns:a16="http://schemas.microsoft.com/office/drawing/2014/main" xmlns="" id="{686E4A1B-D137-C3A9-99AE-7DEC3B36D3EB}"/>
               </a:ext>
             </a:extLst>
           </p:cNvPr>
@@ -36878,7 +37142,7 @@
           <p:cNvPr id="3" name="投影片編號版面配置區 2">
             <a:extLst>
               <a:ext uri="{FF2B5EF4-FFF2-40B4-BE49-F238E27FC236}">
-                <a16:creationId xmlns:a16="http://schemas.microsoft.com/office/drawing/2014/main" id="{218AF755-12E0-3EEC-7EB6-250B6117CE38}"/>
+                <a16:creationId xmlns:a16="http://schemas.microsoft.com/office/drawing/2014/main" xmlns="" id="{218AF755-12E0-3EEC-7EB6-250B6117CE38}"/>
               </a:ext>
             </a:extLst>
           </p:cNvPr>
@@ -36908,7 +37172,7 @@
           <p:cNvPr id="5" name="內容版面配置區 4">
             <a:extLst>
               <a:ext uri="{FF2B5EF4-FFF2-40B4-BE49-F238E27FC236}">
-                <a16:creationId xmlns:a16="http://schemas.microsoft.com/office/drawing/2014/main" id="{1B717794-2B2A-8EA0-612D-C01667D5E5EC}"/>
+                <a16:creationId xmlns:a16="http://schemas.microsoft.com/office/drawing/2014/main" xmlns="" id="{1B717794-2B2A-8EA0-612D-C01667D5E5EC}"/>
               </a:ext>
             </a:extLst>
           </p:cNvPr>
@@ -36946,7 +37210,7 @@
           <p:cNvPr id="6" name="圖片 5">
             <a:extLst>
               <a:ext uri="{FF2B5EF4-FFF2-40B4-BE49-F238E27FC236}">
-                <a16:creationId xmlns:a16="http://schemas.microsoft.com/office/drawing/2014/main" id="{E34F1170-35E6-8C36-43EA-7477DC2B3984}"/>
+                <a16:creationId xmlns:a16="http://schemas.microsoft.com/office/drawing/2014/main" xmlns="" id="{E34F1170-35E6-8C36-43EA-7477DC2B3984}"/>
               </a:ext>
             </a:extLst>
           </p:cNvPr>
@@ -36987,6 +37251,14 @@
   <p:clrMapOvr>
     <a:masterClrMapping/>
   </p:clrMapOvr>
+  <mc:AlternateContent xmlns:mc="http://schemas.openxmlformats.org/markup-compatibility/2006">
+    <mc:Choice xmlns:p14="http://schemas.microsoft.com/office/powerpoint/2010/main" Requires="p14">
+      <p:transition spd="slow" p14:dur="2000"/>
+    </mc:Choice>
+    <mc:Fallback>
+      <p:transition spd="slow"/>
+    </mc:Fallback>
+  </mc:AlternateContent>
 </p:sld>
 </file>
 
@@ -37012,7 +37284,7 @@
           <p:cNvPr id="2" name="標題 1">
             <a:extLst>
               <a:ext uri="{FF2B5EF4-FFF2-40B4-BE49-F238E27FC236}">
-                <a16:creationId xmlns:a16="http://schemas.microsoft.com/office/drawing/2014/main" id="{686E4A1B-D137-C3A9-99AE-7DEC3B36D3EB}"/>
+                <a16:creationId xmlns:a16="http://schemas.microsoft.com/office/drawing/2014/main" xmlns="" id="{686E4A1B-D137-C3A9-99AE-7DEC3B36D3EB}"/>
               </a:ext>
             </a:extLst>
           </p:cNvPr>
@@ -37044,7 +37316,7 @@
           <p:cNvPr id="3" name="投影片編號版面配置區 2">
             <a:extLst>
               <a:ext uri="{FF2B5EF4-FFF2-40B4-BE49-F238E27FC236}">
-                <a16:creationId xmlns:a16="http://schemas.microsoft.com/office/drawing/2014/main" id="{218AF755-12E0-3EEC-7EB6-250B6117CE38}"/>
+                <a16:creationId xmlns:a16="http://schemas.microsoft.com/office/drawing/2014/main" xmlns="" id="{218AF755-12E0-3EEC-7EB6-250B6117CE38}"/>
               </a:ext>
             </a:extLst>
           </p:cNvPr>
@@ -37074,7 +37346,7 @@
           <p:cNvPr id="8" name="內容版面配置區 7">
             <a:extLst>
               <a:ext uri="{FF2B5EF4-FFF2-40B4-BE49-F238E27FC236}">
-                <a16:creationId xmlns:a16="http://schemas.microsoft.com/office/drawing/2014/main" id="{5B3D6FDE-6DAD-903E-DD6D-B127EB8741B5}"/>
+                <a16:creationId xmlns:a16="http://schemas.microsoft.com/office/drawing/2014/main" xmlns="" id="{5B3D6FDE-6DAD-903E-DD6D-B127EB8741B5}"/>
               </a:ext>
             </a:extLst>
           </p:cNvPr>
@@ -37112,7 +37384,7 @@
           <p:cNvPr id="9" name="圖片 8">
             <a:extLst>
               <a:ext uri="{FF2B5EF4-FFF2-40B4-BE49-F238E27FC236}">
-                <a16:creationId xmlns:a16="http://schemas.microsoft.com/office/drawing/2014/main" id="{0DD9C506-325D-5D4E-865E-B3DBE5AA07BA}"/>
+                <a16:creationId xmlns:a16="http://schemas.microsoft.com/office/drawing/2014/main" xmlns="" id="{0DD9C506-325D-5D4E-865E-B3DBE5AA07BA}"/>
               </a:ext>
             </a:extLst>
           </p:cNvPr>
@@ -37148,7 +37420,7 @@
           <p:cNvPr id="10" name="圖片 9">
             <a:extLst>
               <a:ext uri="{FF2B5EF4-FFF2-40B4-BE49-F238E27FC236}">
-                <a16:creationId xmlns:a16="http://schemas.microsoft.com/office/drawing/2014/main" id="{434BB1DF-DC72-0FAF-E679-40C17F56E2D8}"/>
+                <a16:creationId xmlns:a16="http://schemas.microsoft.com/office/drawing/2014/main" xmlns="" id="{434BB1DF-DC72-0FAF-E679-40C17F56E2D8}"/>
               </a:ext>
             </a:extLst>
           </p:cNvPr>
@@ -37189,6 +37461,14 @@
   <p:clrMapOvr>
     <a:masterClrMapping/>
   </p:clrMapOvr>
+  <mc:AlternateContent xmlns:mc="http://schemas.openxmlformats.org/markup-compatibility/2006">
+    <mc:Choice xmlns:p14="http://schemas.microsoft.com/office/powerpoint/2010/main" Requires="p14">
+      <p:transition spd="slow" p14:dur="2000"/>
+    </mc:Choice>
+    <mc:Fallback>
+      <p:transition spd="slow"/>
+    </mc:Fallback>
+  </mc:AlternateContent>
 </p:sld>
 </file>
 
@@ -37214,7 +37494,7 @@
           <p:cNvPr id="2" name="標題 1">
             <a:extLst>
               <a:ext uri="{FF2B5EF4-FFF2-40B4-BE49-F238E27FC236}">
-                <a16:creationId xmlns:a16="http://schemas.microsoft.com/office/drawing/2014/main" id="{CA36970A-CCCD-9743-9ADE-0A65B14B2EEA}"/>
+                <a16:creationId xmlns:a16="http://schemas.microsoft.com/office/drawing/2014/main" xmlns="" id="{CA36970A-CCCD-9743-9ADE-0A65B14B2EEA}"/>
               </a:ext>
             </a:extLst>
           </p:cNvPr>
@@ -37246,7 +37526,7 @@
           <p:cNvPr id="3" name="投影片編號版面配置區 2">
             <a:extLst>
               <a:ext uri="{FF2B5EF4-FFF2-40B4-BE49-F238E27FC236}">
-                <a16:creationId xmlns:a16="http://schemas.microsoft.com/office/drawing/2014/main" id="{38C202F4-A0E7-5DC6-C93F-3114F7231D45}"/>
+                <a16:creationId xmlns:a16="http://schemas.microsoft.com/office/drawing/2014/main" xmlns="" id="{38C202F4-A0E7-5DC6-C93F-3114F7231D45}"/>
               </a:ext>
             </a:extLst>
           </p:cNvPr>
@@ -37276,7 +37556,7 @@
           <p:cNvPr id="5" name="內容版面配置區 4" descr="一張含有 文字 的圖片&#10;&#10;自動產生的描述">
             <a:extLst>
               <a:ext uri="{FF2B5EF4-FFF2-40B4-BE49-F238E27FC236}">
-                <a16:creationId xmlns:a16="http://schemas.microsoft.com/office/drawing/2014/main" id="{F71516B3-CBDA-92A5-5C6B-A61ED9B4A5F3}"/>
+                <a16:creationId xmlns:a16="http://schemas.microsoft.com/office/drawing/2014/main" xmlns="" id="{F71516B3-CBDA-92A5-5C6B-A61ED9B4A5F3}"/>
               </a:ext>
             </a:extLst>
           </p:cNvPr>
@@ -37313,6 +37593,14 @@
   <p:clrMapOvr>
     <a:masterClrMapping/>
   </p:clrMapOvr>
+  <mc:AlternateContent xmlns:mc="http://schemas.openxmlformats.org/markup-compatibility/2006">
+    <mc:Choice xmlns:p14="http://schemas.microsoft.com/office/powerpoint/2010/main" Requires="p14">
+      <p:transition spd="slow" p14:dur="2000"/>
+    </mc:Choice>
+    <mc:Fallback>
+      <p:transition spd="slow"/>
+    </mc:Fallback>
+  </mc:AlternateContent>
 </p:sld>
 </file>
 
@@ -37338,7 +37626,7 @@
           <p:cNvPr id="2" name="標題 1">
             <a:extLst>
               <a:ext uri="{FF2B5EF4-FFF2-40B4-BE49-F238E27FC236}">
-                <a16:creationId xmlns:a16="http://schemas.microsoft.com/office/drawing/2014/main" id="{EBA5FDBD-A1DC-AD88-B51D-F5810167AF3E}"/>
+                <a16:creationId xmlns:a16="http://schemas.microsoft.com/office/drawing/2014/main" xmlns="" id="{EBA5FDBD-A1DC-AD88-B51D-F5810167AF3E}"/>
               </a:ext>
             </a:extLst>
           </p:cNvPr>
@@ -37367,7 +37655,7 @@
           <p:cNvPr id="3" name="投影片編號版面配置區 2">
             <a:extLst>
               <a:ext uri="{FF2B5EF4-FFF2-40B4-BE49-F238E27FC236}">
-                <a16:creationId xmlns:a16="http://schemas.microsoft.com/office/drawing/2014/main" id="{F7EAE09C-53B7-6427-BA81-FA717275BD77}"/>
+                <a16:creationId xmlns:a16="http://schemas.microsoft.com/office/drawing/2014/main" xmlns="" id="{F7EAE09C-53B7-6427-BA81-FA717275BD77}"/>
               </a:ext>
             </a:extLst>
           </p:cNvPr>
@@ -37397,7 +37685,7 @@
           <p:cNvPr id="4" name="內容版面配置區 3">
             <a:extLst>
               <a:ext uri="{FF2B5EF4-FFF2-40B4-BE49-F238E27FC236}">
-                <a16:creationId xmlns:a16="http://schemas.microsoft.com/office/drawing/2014/main" id="{10D34B33-CB1C-B5AE-27AE-134045BD91F5}"/>
+                <a16:creationId xmlns:a16="http://schemas.microsoft.com/office/drawing/2014/main" xmlns="" id="{10D34B33-CB1C-B5AE-27AE-134045BD91F5}"/>
               </a:ext>
             </a:extLst>
           </p:cNvPr>
@@ -37426,7 +37714,7 @@
           <p:cNvPr id="5" name="圖片 4">
             <a:extLst>
               <a:ext uri="{FF2B5EF4-FFF2-40B4-BE49-F238E27FC236}">
-                <a16:creationId xmlns:a16="http://schemas.microsoft.com/office/drawing/2014/main" id="{9E27A75E-7E4A-FDD8-2E97-82FE28C62C21}"/>
+                <a16:creationId xmlns:a16="http://schemas.microsoft.com/office/drawing/2014/main" xmlns="" id="{9E27A75E-7E4A-FDD8-2E97-82FE28C62C21}"/>
               </a:ext>
             </a:extLst>
           </p:cNvPr>
@@ -37486,7 +37774,7 @@
           <p:cNvPr id="2" name="標題 1">
             <a:extLst>
               <a:ext uri="{FF2B5EF4-FFF2-40B4-BE49-F238E27FC236}">
-                <a16:creationId xmlns:a16="http://schemas.microsoft.com/office/drawing/2014/main" id="{3548E094-6E23-833C-4A70-992CCC950AB0}"/>
+                <a16:creationId xmlns:a16="http://schemas.microsoft.com/office/drawing/2014/main" xmlns="" id="{3548E094-6E23-833C-4A70-992CCC950AB0}"/>
               </a:ext>
             </a:extLst>
           </p:cNvPr>
@@ -37515,7 +37803,7 @@
           <p:cNvPr id="3" name="投影片編號版面配置區 2">
             <a:extLst>
               <a:ext uri="{FF2B5EF4-FFF2-40B4-BE49-F238E27FC236}">
-                <a16:creationId xmlns:a16="http://schemas.microsoft.com/office/drawing/2014/main" id="{492993CA-3D86-C007-7864-F2736EF5F14B}"/>
+                <a16:creationId xmlns:a16="http://schemas.microsoft.com/office/drawing/2014/main" xmlns="" id="{492993CA-3D86-C007-7864-F2736EF5F14B}"/>
               </a:ext>
             </a:extLst>
           </p:cNvPr>
@@ -37545,7 +37833,7 @@
           <p:cNvPr id="4" name="內容版面配置區 3">
             <a:extLst>
               <a:ext uri="{FF2B5EF4-FFF2-40B4-BE49-F238E27FC236}">
-                <a16:creationId xmlns:a16="http://schemas.microsoft.com/office/drawing/2014/main" id="{CFFE446E-0A9C-4DB5-0761-888DF5A5B80E}"/>
+                <a16:creationId xmlns:a16="http://schemas.microsoft.com/office/drawing/2014/main" xmlns="" id="{CFFE446E-0A9C-4DB5-0761-888DF5A5B80E}"/>
               </a:ext>
             </a:extLst>
           </p:cNvPr>
@@ -37608,7 +37896,7 @@
           <p:cNvPr id="5" name="圖片 4">
             <a:extLst>
               <a:ext uri="{FF2B5EF4-FFF2-40B4-BE49-F238E27FC236}">
-                <a16:creationId xmlns:a16="http://schemas.microsoft.com/office/drawing/2014/main" id="{573AF959-337C-C408-5009-48D4F696954A}"/>
+                <a16:creationId xmlns:a16="http://schemas.microsoft.com/office/drawing/2014/main" xmlns="" id="{573AF959-337C-C408-5009-48D4F696954A}"/>
               </a:ext>
             </a:extLst>
           </p:cNvPr>
@@ -37643,6 +37931,14 @@
   <p:clrMapOvr>
     <a:masterClrMapping/>
   </p:clrMapOvr>
+  <mc:AlternateContent xmlns:mc="http://schemas.openxmlformats.org/markup-compatibility/2006">
+    <mc:Choice xmlns:p14="http://schemas.microsoft.com/office/powerpoint/2010/main" Requires="p14">
+      <p:transition spd="slow" p14:dur="2000"/>
+    </mc:Choice>
+    <mc:Fallback>
+      <p:transition spd="slow"/>
+    </mc:Fallback>
+  </mc:AlternateContent>
 </p:sld>
 </file>
 
@@ -37668,7 +37964,7 @@
           <p:cNvPr id="2" name="標題 1">
             <a:extLst>
               <a:ext uri="{FF2B5EF4-FFF2-40B4-BE49-F238E27FC236}">
-                <a16:creationId xmlns:a16="http://schemas.microsoft.com/office/drawing/2014/main" id="{D96B1E27-CA82-F03C-5ABF-463DF02C9FBB}"/>
+                <a16:creationId xmlns:a16="http://schemas.microsoft.com/office/drawing/2014/main" xmlns="" id="{D96B1E27-CA82-F03C-5ABF-463DF02C9FBB}"/>
               </a:ext>
             </a:extLst>
           </p:cNvPr>
@@ -37697,7 +37993,7 @@
           <p:cNvPr id="3" name="投影片編號版面配置區 2">
             <a:extLst>
               <a:ext uri="{FF2B5EF4-FFF2-40B4-BE49-F238E27FC236}">
-                <a16:creationId xmlns:a16="http://schemas.microsoft.com/office/drawing/2014/main" id="{560CB3DA-CBFB-E3DF-DFA4-2F3D5927CE0F}"/>
+                <a16:creationId xmlns:a16="http://schemas.microsoft.com/office/drawing/2014/main" xmlns="" id="{560CB3DA-CBFB-E3DF-DFA4-2F3D5927CE0F}"/>
               </a:ext>
             </a:extLst>
           </p:cNvPr>
@@ -37727,7 +38023,7 @@
           <p:cNvPr id="5" name="內容版面配置區 4">
             <a:extLst>
               <a:ext uri="{FF2B5EF4-FFF2-40B4-BE49-F238E27FC236}">
-                <a16:creationId xmlns:a16="http://schemas.microsoft.com/office/drawing/2014/main" id="{720B5298-6D59-5AFD-433F-1F851C73B04C}"/>
+                <a16:creationId xmlns:a16="http://schemas.microsoft.com/office/drawing/2014/main" xmlns="" id="{720B5298-6D59-5AFD-433F-1F851C73B04C}"/>
               </a:ext>
             </a:extLst>
           </p:cNvPr>
@@ -37764,6 +38060,14 @@
   <p:clrMapOvr>
     <a:masterClrMapping/>
   </p:clrMapOvr>
+  <mc:AlternateContent xmlns:mc="http://schemas.openxmlformats.org/markup-compatibility/2006">
+    <mc:Choice xmlns:p14="http://schemas.microsoft.com/office/powerpoint/2010/main" Requires="p14">
+      <p:transition spd="slow" p14:dur="2000"/>
+    </mc:Choice>
+    <mc:Fallback>
+      <p:transition spd="slow"/>
+    </mc:Fallback>
+  </mc:AlternateContent>
 </p:sld>
 </file>
 
@@ -37789,7 +38093,7 @@
           <p:cNvPr id="2" name="標題 1">
             <a:extLst>
               <a:ext uri="{FF2B5EF4-FFF2-40B4-BE49-F238E27FC236}">
-                <a16:creationId xmlns:a16="http://schemas.microsoft.com/office/drawing/2014/main" id="{A672736E-6720-BE44-3592-2F1E68EBEA30}"/>
+                <a16:creationId xmlns:a16="http://schemas.microsoft.com/office/drawing/2014/main" xmlns="" id="{A672736E-6720-BE44-3592-2F1E68EBEA30}"/>
               </a:ext>
             </a:extLst>
           </p:cNvPr>
@@ -37818,7 +38122,7 @@
           <p:cNvPr id="3" name="投影片編號版面配置區 2">
             <a:extLst>
               <a:ext uri="{FF2B5EF4-FFF2-40B4-BE49-F238E27FC236}">
-                <a16:creationId xmlns:a16="http://schemas.microsoft.com/office/drawing/2014/main" id="{EBF2EEB3-5F6E-82E7-C3B8-A4945D6F1F05}"/>
+                <a16:creationId xmlns:a16="http://schemas.microsoft.com/office/drawing/2014/main" xmlns="" id="{EBF2EEB3-5F6E-82E7-C3B8-A4945D6F1F05}"/>
               </a:ext>
             </a:extLst>
           </p:cNvPr>
@@ -37848,7 +38152,7 @@
           <p:cNvPr id="4" name="內容版面配置區 3">
             <a:extLst>
               <a:ext uri="{FF2B5EF4-FFF2-40B4-BE49-F238E27FC236}">
-                <a16:creationId xmlns:a16="http://schemas.microsoft.com/office/drawing/2014/main" id="{A8DAE699-1B27-08DF-9111-454015D4D6E2}"/>
+                <a16:creationId xmlns:a16="http://schemas.microsoft.com/office/drawing/2014/main" xmlns="" id="{A8DAE699-1B27-08DF-9111-454015D4D6E2}"/>
               </a:ext>
             </a:extLst>
           </p:cNvPr>
@@ -37885,7 +38189,7 @@
           <p:cNvPr id="5" name="圖片 4">
             <a:extLst>
               <a:ext uri="{FF2B5EF4-FFF2-40B4-BE49-F238E27FC236}">
-                <a16:creationId xmlns:a16="http://schemas.microsoft.com/office/drawing/2014/main" id="{FDFA09BA-C19D-C458-DFC1-4158D957BC52}"/>
+                <a16:creationId xmlns:a16="http://schemas.microsoft.com/office/drawing/2014/main" xmlns="" id="{FDFA09BA-C19D-C458-DFC1-4158D957BC52}"/>
               </a:ext>
             </a:extLst>
           </p:cNvPr>
@@ -37920,6 +38224,14 @@
   <p:clrMapOvr>
     <a:masterClrMapping/>
   </p:clrMapOvr>
+  <mc:AlternateContent xmlns:mc="http://schemas.openxmlformats.org/markup-compatibility/2006">
+    <mc:Choice xmlns:p14="http://schemas.microsoft.com/office/powerpoint/2010/main" Requires="p14">
+      <p:transition spd="slow" p14:dur="2000"/>
+    </mc:Choice>
+    <mc:Fallback>
+      <p:transition spd="slow"/>
+    </mc:Fallback>
+  </mc:AlternateContent>
 </p:sld>
 </file>
 
@@ -37945,7 +38257,7 @@
           <p:cNvPr id="2" name="標題 1">
             <a:extLst>
               <a:ext uri="{FF2B5EF4-FFF2-40B4-BE49-F238E27FC236}">
-                <a16:creationId xmlns:a16="http://schemas.microsoft.com/office/drawing/2014/main" id="{418DA5E6-367F-2540-5BF5-667F96638769}"/>
+                <a16:creationId xmlns:a16="http://schemas.microsoft.com/office/drawing/2014/main" xmlns="" id="{418DA5E6-367F-2540-5BF5-667F96638769}"/>
               </a:ext>
             </a:extLst>
           </p:cNvPr>
@@ -37977,7 +38289,7 @@
           <p:cNvPr id="3" name="投影片編號版面配置區 2">
             <a:extLst>
               <a:ext uri="{FF2B5EF4-FFF2-40B4-BE49-F238E27FC236}">
-                <a16:creationId xmlns:a16="http://schemas.microsoft.com/office/drawing/2014/main" id="{DE759FA6-8C53-FD80-D4D0-95B98D9F39EE}"/>
+                <a16:creationId xmlns:a16="http://schemas.microsoft.com/office/drawing/2014/main" xmlns="" id="{DE759FA6-8C53-FD80-D4D0-95B98D9F39EE}"/>
               </a:ext>
             </a:extLst>
           </p:cNvPr>
@@ -38007,7 +38319,7 @@
           <p:cNvPr id="4" name="內容版面配置區 3">
             <a:extLst>
               <a:ext uri="{FF2B5EF4-FFF2-40B4-BE49-F238E27FC236}">
-                <a16:creationId xmlns:a16="http://schemas.microsoft.com/office/drawing/2014/main" id="{93139690-6F31-016F-6801-9136F6EC3ECB}"/>
+                <a16:creationId xmlns:a16="http://schemas.microsoft.com/office/drawing/2014/main" xmlns="" id="{93139690-6F31-016F-6801-9136F6EC3ECB}"/>
               </a:ext>
             </a:extLst>
           </p:cNvPr>
@@ -38347,6 +38659,14 @@
   <p:clrMapOvr>
     <a:masterClrMapping/>
   </p:clrMapOvr>
+  <mc:AlternateContent xmlns:mc="http://schemas.openxmlformats.org/markup-compatibility/2006">
+    <mc:Choice xmlns:p14="http://schemas.microsoft.com/office/powerpoint/2010/main" Requires="p14">
+      <p:transition spd="slow" p14:dur="2000"/>
+    </mc:Choice>
+    <mc:Fallback>
+      <p:transition spd="slow"/>
+    </mc:Fallback>
+  </mc:AlternateContent>
 </p:sld>
 </file>
 
@@ -38372,7 +38692,7 @@
           <p:cNvPr id="2" name="標題 1">
             <a:extLst>
               <a:ext uri="{FF2B5EF4-FFF2-40B4-BE49-F238E27FC236}">
-                <a16:creationId xmlns:a16="http://schemas.microsoft.com/office/drawing/2014/main" id="{3107F563-926B-55A2-536C-A0BF8ABE9518}"/>
+                <a16:creationId xmlns:a16="http://schemas.microsoft.com/office/drawing/2014/main" xmlns="" id="{3107F563-926B-55A2-536C-A0BF8ABE9518}"/>
               </a:ext>
             </a:extLst>
           </p:cNvPr>
@@ -38419,7 +38739,7 @@
           <p:cNvPr id="3" name="投影片編號版面配置區 2">
             <a:extLst>
               <a:ext uri="{FF2B5EF4-FFF2-40B4-BE49-F238E27FC236}">
-                <a16:creationId xmlns:a16="http://schemas.microsoft.com/office/drawing/2014/main" id="{683EADF1-C74C-A256-A1E9-CBE1D5A77BA1}"/>
+                <a16:creationId xmlns:a16="http://schemas.microsoft.com/office/drawing/2014/main" xmlns="" id="{683EADF1-C74C-A256-A1E9-CBE1D5A77BA1}"/>
               </a:ext>
             </a:extLst>
           </p:cNvPr>
@@ -38449,7 +38769,7 @@
           <p:cNvPr id="5" name="內容版面配置區 4">
             <a:extLst>
               <a:ext uri="{FF2B5EF4-FFF2-40B4-BE49-F238E27FC236}">
-                <a16:creationId xmlns:a16="http://schemas.microsoft.com/office/drawing/2014/main" id="{BB5A10C5-9B94-6349-43E8-2491B13A75DB}"/>
+                <a16:creationId xmlns:a16="http://schemas.microsoft.com/office/drawing/2014/main" xmlns="" id="{BB5A10C5-9B94-6349-43E8-2491B13A75DB}"/>
               </a:ext>
             </a:extLst>
           </p:cNvPr>
@@ -38486,6 +38806,14 @@
   <p:clrMapOvr>
     <a:masterClrMapping/>
   </p:clrMapOvr>
+  <mc:AlternateContent xmlns:mc="http://schemas.openxmlformats.org/markup-compatibility/2006">
+    <mc:Choice xmlns:p14="http://schemas.microsoft.com/office/powerpoint/2010/main" Requires="p14">
+      <p:transition spd="slow" p14:dur="2000"/>
+    </mc:Choice>
+    <mc:Fallback>
+      <p:transition spd="slow"/>
+    </mc:Fallback>
+  </mc:AlternateContent>
 </p:sld>
 </file>
 
@@ -38511,7 +38839,7 @@
           <p:cNvPr id="2" name="標題 1">
             <a:extLst>
               <a:ext uri="{FF2B5EF4-FFF2-40B4-BE49-F238E27FC236}">
-                <a16:creationId xmlns:a16="http://schemas.microsoft.com/office/drawing/2014/main" id="{F2E55848-6447-E98E-FE20-EF2ADE409A52}"/>
+                <a16:creationId xmlns:a16="http://schemas.microsoft.com/office/drawing/2014/main" xmlns="" id="{F2E55848-6447-E98E-FE20-EF2ADE409A52}"/>
               </a:ext>
             </a:extLst>
           </p:cNvPr>
@@ -38557,7 +38885,7 @@
           <p:cNvPr id="3" name="投影片編號版面配置區 2">
             <a:extLst>
               <a:ext uri="{FF2B5EF4-FFF2-40B4-BE49-F238E27FC236}">
-                <a16:creationId xmlns:a16="http://schemas.microsoft.com/office/drawing/2014/main" id="{90E96E4E-26C7-A24A-92F0-46FC8B1EACE6}"/>
+                <a16:creationId xmlns:a16="http://schemas.microsoft.com/office/drawing/2014/main" xmlns="" id="{90E96E4E-26C7-A24A-92F0-46FC8B1EACE6}"/>
               </a:ext>
             </a:extLst>
           </p:cNvPr>
@@ -38587,7 +38915,7 @@
           <p:cNvPr id="4" name="內容版面配置區 3">
             <a:extLst>
               <a:ext uri="{FF2B5EF4-FFF2-40B4-BE49-F238E27FC236}">
-                <a16:creationId xmlns:a16="http://schemas.microsoft.com/office/drawing/2014/main" id="{B1694446-5EE1-93EE-D497-5E011B4C015D}"/>
+                <a16:creationId xmlns:a16="http://schemas.microsoft.com/office/drawing/2014/main" xmlns="" id="{B1694446-5EE1-93EE-D497-5E011B4C015D}"/>
               </a:ext>
             </a:extLst>
           </p:cNvPr>
@@ -38925,6 +39253,14 @@
   <p:clrMapOvr>
     <a:masterClrMapping/>
   </p:clrMapOvr>
+  <mc:AlternateContent xmlns:mc="http://schemas.openxmlformats.org/markup-compatibility/2006">
+    <mc:Choice xmlns:p14="http://schemas.microsoft.com/office/powerpoint/2010/main" Requires="p14">
+      <p:transition spd="slow" p14:dur="2000"/>
+    </mc:Choice>
+    <mc:Fallback>
+      <p:transition spd="slow"/>
+    </mc:Fallback>
+  </mc:AlternateContent>
 </p:sld>
 </file>
 
@@ -39060,7 +39396,7 @@
           <p:cNvPr id="6" name="矩形 5">
             <a:extLst>
               <a:ext uri="{FF2B5EF4-FFF2-40B4-BE49-F238E27FC236}">
-                <a16:creationId xmlns:a16="http://schemas.microsoft.com/office/drawing/2014/main" id="{D9BBB12C-D489-B70A-7915-BE5D93EB2CB0}"/>
+                <a16:creationId xmlns:a16="http://schemas.microsoft.com/office/drawing/2014/main" xmlns="" id="{D9BBB12C-D489-B70A-7915-BE5D93EB2CB0}"/>
               </a:ext>
             </a:extLst>
           </p:cNvPr>
@@ -39110,7 +39446,7 @@
           <p:cNvPr id="7" name="矩形 6">
             <a:extLst>
               <a:ext uri="{FF2B5EF4-FFF2-40B4-BE49-F238E27FC236}">
-                <a16:creationId xmlns:a16="http://schemas.microsoft.com/office/drawing/2014/main" id="{879397ED-AAFF-93EC-AE82-45E3A4AF0BB3}"/>
+                <a16:creationId xmlns:a16="http://schemas.microsoft.com/office/drawing/2014/main" xmlns="" id="{879397ED-AAFF-93EC-AE82-45E3A4AF0BB3}"/>
               </a:ext>
             </a:extLst>
           </p:cNvPr>
@@ -39160,7 +39496,7 @@
           <p:cNvPr id="8" name="矩形 7">
             <a:extLst>
               <a:ext uri="{FF2B5EF4-FFF2-40B4-BE49-F238E27FC236}">
-                <a16:creationId xmlns:a16="http://schemas.microsoft.com/office/drawing/2014/main" id="{969918D7-09C0-F37E-8886-7ABB7875725D}"/>
+                <a16:creationId xmlns:a16="http://schemas.microsoft.com/office/drawing/2014/main" xmlns="" id="{969918D7-09C0-F37E-8886-7ABB7875725D}"/>
               </a:ext>
             </a:extLst>
           </p:cNvPr>
@@ -39215,6 +39551,13 @@
   <p:clrMapOvr>
     <a:masterClrMapping/>
   </p:clrMapOvr>
+  <p:timing>
+    <p:tnLst>
+      <p:par>
+        <p:cTn id="1" dur="indefinite" restart="never" nodeType="tmRoot"/>
+      </p:par>
+    </p:tnLst>
+  </p:timing>
 </p:sld>
 </file>
 
@@ -39240,7 +39583,7 @@
           <p:cNvPr id="2" name="標題 1">
             <a:extLst>
               <a:ext uri="{FF2B5EF4-FFF2-40B4-BE49-F238E27FC236}">
-                <a16:creationId xmlns:a16="http://schemas.microsoft.com/office/drawing/2014/main" id="{128A2035-0DCB-7EDB-E6B2-77E7311FFFA7}"/>
+                <a16:creationId xmlns:a16="http://schemas.microsoft.com/office/drawing/2014/main" xmlns="" id="{128A2035-0DCB-7EDB-E6B2-77E7311FFFA7}"/>
               </a:ext>
             </a:extLst>
           </p:cNvPr>
@@ -39302,7 +39645,7 @@
           <p:cNvPr id="3" name="投影片編號版面配置區 2">
             <a:extLst>
               <a:ext uri="{FF2B5EF4-FFF2-40B4-BE49-F238E27FC236}">
-                <a16:creationId xmlns:a16="http://schemas.microsoft.com/office/drawing/2014/main" id="{CBBB20C0-B459-DB01-7437-CF81EF44A2A7}"/>
+                <a16:creationId xmlns:a16="http://schemas.microsoft.com/office/drawing/2014/main" xmlns="" id="{CBBB20C0-B459-DB01-7437-CF81EF44A2A7}"/>
               </a:ext>
             </a:extLst>
           </p:cNvPr>
@@ -39332,7 +39675,7 @@
           <p:cNvPr id="4" name="內容版面配置區 3">
             <a:extLst>
               <a:ext uri="{FF2B5EF4-FFF2-40B4-BE49-F238E27FC236}">
-                <a16:creationId xmlns:a16="http://schemas.microsoft.com/office/drawing/2014/main" id="{91E6FC6C-CD98-9ECD-3D22-0D5E6D669981}"/>
+                <a16:creationId xmlns:a16="http://schemas.microsoft.com/office/drawing/2014/main" xmlns="" id="{91E6FC6C-CD98-9ECD-3D22-0D5E6D669981}"/>
               </a:ext>
             </a:extLst>
           </p:cNvPr>
@@ -39766,6 +40109,14 @@
   <p:clrMapOvr>
     <a:masterClrMapping/>
   </p:clrMapOvr>
+  <mc:AlternateContent xmlns:mc="http://schemas.openxmlformats.org/markup-compatibility/2006">
+    <mc:Choice xmlns:p14="http://schemas.microsoft.com/office/powerpoint/2010/main" Requires="p14">
+      <p:transition spd="slow" p14:dur="2000"/>
+    </mc:Choice>
+    <mc:Fallback>
+      <p:transition spd="slow"/>
+    </mc:Fallback>
+  </mc:AlternateContent>
 </p:sld>
 </file>
 
@@ -39791,7 +40142,7 @@
           <p:cNvPr id="2" name="標題 1">
             <a:extLst>
               <a:ext uri="{FF2B5EF4-FFF2-40B4-BE49-F238E27FC236}">
-                <a16:creationId xmlns:a16="http://schemas.microsoft.com/office/drawing/2014/main" id="{3F6350A3-06E5-B951-8188-DDF92B963739}"/>
+                <a16:creationId xmlns:a16="http://schemas.microsoft.com/office/drawing/2014/main" xmlns="" id="{3F6350A3-06E5-B951-8188-DDF92B963739}"/>
               </a:ext>
             </a:extLst>
           </p:cNvPr>
@@ -39819,7 +40170,7 @@
           <p:cNvPr id="3" name="投影片編號版面配置區 2">
             <a:extLst>
               <a:ext uri="{FF2B5EF4-FFF2-40B4-BE49-F238E27FC236}">
-                <a16:creationId xmlns:a16="http://schemas.microsoft.com/office/drawing/2014/main" id="{A8EA23F0-6D7D-717C-0FB5-4EC587D8DD89}"/>
+                <a16:creationId xmlns:a16="http://schemas.microsoft.com/office/drawing/2014/main" xmlns="" id="{A8EA23F0-6D7D-717C-0FB5-4EC587D8DD89}"/>
               </a:ext>
             </a:extLst>
           </p:cNvPr>
@@ -39849,7 +40200,7 @@
           <p:cNvPr id="5" name="內容版面配置區 4">
             <a:extLst>
               <a:ext uri="{FF2B5EF4-FFF2-40B4-BE49-F238E27FC236}">
-                <a16:creationId xmlns:a16="http://schemas.microsoft.com/office/drawing/2014/main" id="{E605F1F7-1731-B893-31C3-DBB112A91E27}"/>
+                <a16:creationId xmlns:a16="http://schemas.microsoft.com/office/drawing/2014/main" xmlns="" id="{E605F1F7-1731-B893-31C3-DBB112A91E27}"/>
               </a:ext>
             </a:extLst>
           </p:cNvPr>
@@ -39886,6 +40237,14 @@
   <p:clrMapOvr>
     <a:masterClrMapping/>
   </p:clrMapOvr>
+  <mc:AlternateContent xmlns:mc="http://schemas.openxmlformats.org/markup-compatibility/2006">
+    <mc:Choice xmlns:p14="http://schemas.microsoft.com/office/powerpoint/2010/main" Requires="p14">
+      <p:transition spd="slow" p14:dur="2000"/>
+    </mc:Choice>
+    <mc:Fallback>
+      <p:transition spd="slow"/>
+    </mc:Fallback>
+  </mc:AlternateContent>
 </p:sld>
 </file>
 
@@ -40004,14 +40363,14 @@
                 <a:gridCol w="2883706">
                   <a:extLst>
                     <a:ext uri="{9D8B030D-6E8A-4147-A177-3AD203B41FA5}">
-                      <a16:colId xmlns:a16="http://schemas.microsoft.com/office/drawing/2014/main" val="20000"/>
+                      <a16:colId xmlns:a16="http://schemas.microsoft.com/office/drawing/2014/main" xmlns="" val="20000"/>
                     </a:ext>
                   </a:extLst>
                 </a:gridCol>
                 <a:gridCol w="5779030">
                   <a:extLst>
                     <a:ext uri="{9D8B030D-6E8A-4147-A177-3AD203B41FA5}">
-                      <a16:colId xmlns:a16="http://schemas.microsoft.com/office/drawing/2014/main" val="20001"/>
+                      <a16:colId xmlns:a16="http://schemas.microsoft.com/office/drawing/2014/main" xmlns="" val="20001"/>
                     </a:ext>
                   </a:extLst>
                 </a:gridCol>
@@ -40077,7 +40436,7 @@
                 </a:tc>
                 <a:extLst>
                   <a:ext uri="{0D108BD9-81ED-4DB2-BD59-A6C34878D82A}">
-                    <a16:rowId xmlns:a16="http://schemas.microsoft.com/office/drawing/2014/main" val="10000"/>
+                    <a16:rowId xmlns:a16="http://schemas.microsoft.com/office/drawing/2014/main" xmlns="" val="10000"/>
                   </a:ext>
                 </a:extLst>
               </a:tr>
@@ -40142,7 +40501,7 @@
                 </a:tc>
                 <a:extLst>
                   <a:ext uri="{0D108BD9-81ED-4DB2-BD59-A6C34878D82A}">
-                    <a16:rowId xmlns:a16="http://schemas.microsoft.com/office/drawing/2014/main" val="10001"/>
+                    <a16:rowId xmlns:a16="http://schemas.microsoft.com/office/drawing/2014/main" xmlns="" val="10001"/>
                   </a:ext>
                 </a:extLst>
               </a:tr>
@@ -40207,7 +40566,7 @@
                 </a:tc>
                 <a:extLst>
                   <a:ext uri="{0D108BD9-81ED-4DB2-BD59-A6C34878D82A}">
-                    <a16:rowId xmlns:a16="http://schemas.microsoft.com/office/drawing/2014/main" val="10002"/>
+                    <a16:rowId xmlns:a16="http://schemas.microsoft.com/office/drawing/2014/main" xmlns="" val="10002"/>
                   </a:ext>
                 </a:extLst>
               </a:tr>
@@ -40272,7 +40631,7 @@
                 </a:tc>
                 <a:extLst>
                   <a:ext uri="{0D108BD9-81ED-4DB2-BD59-A6C34878D82A}">
-                    <a16:rowId xmlns:a16="http://schemas.microsoft.com/office/drawing/2014/main" val="10003"/>
+                    <a16:rowId xmlns:a16="http://schemas.microsoft.com/office/drawing/2014/main" xmlns="" val="10003"/>
                   </a:ext>
                 </a:extLst>
               </a:tr>
@@ -40337,7 +40696,7 @@
                 </a:tc>
                 <a:extLst>
                   <a:ext uri="{0D108BD9-81ED-4DB2-BD59-A6C34878D82A}">
-                    <a16:rowId xmlns:a16="http://schemas.microsoft.com/office/drawing/2014/main" val="10004"/>
+                    <a16:rowId xmlns:a16="http://schemas.microsoft.com/office/drawing/2014/main" xmlns="" val="10004"/>
                   </a:ext>
                 </a:extLst>
               </a:tr>
@@ -40355,6 +40714,13 @@
   <p:clrMapOvr>
     <a:masterClrMapping/>
   </p:clrMapOvr>
+  <p:timing>
+    <p:tnLst>
+      <p:par>
+        <p:cTn id="1" dur="indefinite" restart="never" nodeType="tmRoot"/>
+      </p:par>
+    </p:tnLst>
+  </p:timing>
 </p:sld>
 </file>
 
@@ -40860,7 +41226,7 @@
   <a:extraClrSchemeLst/>
   <a:extLst>
     <a:ext uri="{05A4C25C-085E-4340-85A3-A5531E510DB2}">
-      <thm15:themeFamily xmlns:thm15="http://schemas.microsoft.com/office/thememl/2012/main" name="Office Theme" id="{62F939B6-93AF-4DB8-9C6B-D6C7DFDC589F}" vid="{4A3C46E8-61CC-4603-A589-7422A47A8E4A}"/>
+      <thm15:themeFamily xmlns:thm15="http://schemas.microsoft.com/office/thememl/2012/main" xmlns="" name="Office Theme" id="{62F939B6-93AF-4DB8-9C6B-D6C7DFDC589F}" vid="{4A3C46E8-61CC-4603-A589-7422A47A8E4A}"/>
     </a:ext>
   </a:extLst>
 </a:theme>

--- a/ch07/Django4-ch07.pptx
+++ b/ch07/Django4-ch07.pptx
@@ -189,7 +189,7 @@
   </p:defaultTextStyle>
   <p:extLst>
     <p:ext uri="{EFAFB233-063F-42B5-8137-9DF3F51BA10A}">
-      <p15:sldGuideLst xmlns:p15="http://schemas.microsoft.com/office/powerpoint/2012/main" xmlns="">
+      <p15:sldGuideLst xmlns="" xmlns:p15="http://schemas.microsoft.com/office/powerpoint/2012/main">
         <p15:guide id="1" orient="horz" pos="2160">
           <p15:clr>
             <a:srgbClr val="A4A3A4"/>
@@ -5989,7 +5989,7 @@
         <p:cNvPr id="1" name="">
           <a:extLst>
             <a:ext uri="{FF2B5EF4-FFF2-40B4-BE49-F238E27FC236}">
-              <a16:creationId xmlns:a16="http://schemas.microsoft.com/office/drawing/2014/main" xmlns="" id="{1BF7B01F-313F-69EE-5B3A-1E42440358EB}"/>
+              <a16:creationId xmlns="" xmlns:a16="http://schemas.microsoft.com/office/drawing/2014/main" id="{1BF7B01F-313F-69EE-5B3A-1E42440358EB}"/>
             </a:ext>
           </a:extLst>
         </p:cNvPr>
@@ -6009,7 +6009,7 @@
           <p:cNvPr id="2" name="投影片影像版面配置區 1">
             <a:extLst>
               <a:ext uri="{FF2B5EF4-FFF2-40B4-BE49-F238E27FC236}">
-                <a16:creationId xmlns:a16="http://schemas.microsoft.com/office/drawing/2014/main" xmlns="" id="{E3CDEB4F-24E4-7C25-3735-F476494B43EC}"/>
+                <a16:creationId xmlns="" xmlns:a16="http://schemas.microsoft.com/office/drawing/2014/main" id="{E3CDEB4F-24E4-7C25-3735-F476494B43EC}"/>
               </a:ext>
             </a:extLst>
           </p:cNvPr>
@@ -6027,7 +6027,7 @@
           <p:cNvPr id="3" name="備忘稿版面配置區 2">
             <a:extLst>
               <a:ext uri="{FF2B5EF4-FFF2-40B4-BE49-F238E27FC236}">
-                <a16:creationId xmlns:a16="http://schemas.microsoft.com/office/drawing/2014/main" xmlns="" id="{E30A5D5E-843F-BB44-23FA-1AC00B21505E}"/>
+                <a16:creationId xmlns="" xmlns:a16="http://schemas.microsoft.com/office/drawing/2014/main" id="{E30A5D5E-843F-BB44-23FA-1AC00B21505E}"/>
               </a:ext>
             </a:extLst>
           </p:cNvPr>
@@ -6439,7 +6439,7 @@
           <p:cNvPr id="4" name="投影片編號版面配置區 3">
             <a:extLst>
               <a:ext uri="{FF2B5EF4-FFF2-40B4-BE49-F238E27FC236}">
-                <a16:creationId xmlns:a16="http://schemas.microsoft.com/office/drawing/2014/main" xmlns="" id="{200C0695-1346-8CA7-F449-5D24D58BE32D}"/>
+                <a16:creationId xmlns="" xmlns:a16="http://schemas.microsoft.com/office/drawing/2014/main" id="{200C0695-1346-8CA7-F449-5D24D58BE32D}"/>
               </a:ext>
             </a:extLst>
           </p:cNvPr>
@@ -14332,21 +14332,21 @@
                 <a:gridCol w="2765248">
                   <a:extLst>
                     <a:ext uri="{9D8B030D-6E8A-4147-A177-3AD203B41FA5}">
-                      <a16:colId xmlns:a16="http://schemas.microsoft.com/office/drawing/2014/main" xmlns="" val="20000"/>
+                      <a16:colId xmlns="" xmlns:a16="http://schemas.microsoft.com/office/drawing/2014/main" val="20000"/>
                     </a:ext>
                   </a:extLst>
                 </a:gridCol>
                 <a:gridCol w="2765248">
                   <a:extLst>
                     <a:ext uri="{9D8B030D-6E8A-4147-A177-3AD203B41FA5}">
-                      <a16:colId xmlns:a16="http://schemas.microsoft.com/office/drawing/2014/main" xmlns="" val="20001"/>
+                      <a16:colId xmlns="" xmlns:a16="http://schemas.microsoft.com/office/drawing/2014/main" val="20001"/>
                     </a:ext>
                   </a:extLst>
                 </a:gridCol>
                 <a:gridCol w="2766104">
                   <a:extLst>
                     <a:ext uri="{9D8B030D-6E8A-4147-A177-3AD203B41FA5}">
-                      <a16:colId xmlns:a16="http://schemas.microsoft.com/office/drawing/2014/main" xmlns="" val="20002"/>
+                      <a16:colId xmlns="" xmlns:a16="http://schemas.microsoft.com/office/drawing/2014/main" val="20002"/>
                     </a:ext>
                   </a:extLst>
                 </a:gridCol>
@@ -14447,7 +14447,7 @@
                 </a:tc>
                 <a:extLst>
                   <a:ext uri="{0D108BD9-81ED-4DB2-BD59-A6C34878D82A}">
-                    <a16:rowId xmlns:a16="http://schemas.microsoft.com/office/drawing/2014/main" xmlns="" val="10000"/>
+                    <a16:rowId xmlns="" xmlns:a16="http://schemas.microsoft.com/office/drawing/2014/main" val="10000"/>
                   </a:ext>
                 </a:extLst>
               </a:tr>
@@ -14553,7 +14553,7 @@
                 </a:tc>
                 <a:extLst>
                   <a:ext uri="{0D108BD9-81ED-4DB2-BD59-A6C34878D82A}">
-                    <a16:rowId xmlns:a16="http://schemas.microsoft.com/office/drawing/2014/main" xmlns="" val="10001"/>
+                    <a16:rowId xmlns="" xmlns:a16="http://schemas.microsoft.com/office/drawing/2014/main" val="10001"/>
                   </a:ext>
                 </a:extLst>
               </a:tr>
@@ -14659,7 +14659,7 @@
                 </a:tc>
                 <a:extLst>
                   <a:ext uri="{0D108BD9-81ED-4DB2-BD59-A6C34878D82A}">
-                    <a16:rowId xmlns:a16="http://schemas.microsoft.com/office/drawing/2014/main" xmlns="" val="10002"/>
+                    <a16:rowId xmlns="" xmlns:a16="http://schemas.microsoft.com/office/drawing/2014/main" val="10002"/>
                   </a:ext>
                 </a:extLst>
               </a:tr>
@@ -14695,21 +14695,21 @@
                 <a:gridCol w="2760022">
                   <a:extLst>
                     <a:ext uri="{9D8B030D-6E8A-4147-A177-3AD203B41FA5}">
-                      <a16:colId xmlns:a16="http://schemas.microsoft.com/office/drawing/2014/main" xmlns="" val="20000"/>
+                      <a16:colId xmlns="" xmlns:a16="http://schemas.microsoft.com/office/drawing/2014/main" val="20000"/>
                     </a:ext>
                   </a:extLst>
                 </a:gridCol>
                 <a:gridCol w="2760022">
                   <a:extLst>
                     <a:ext uri="{9D8B030D-6E8A-4147-A177-3AD203B41FA5}">
-                      <a16:colId xmlns:a16="http://schemas.microsoft.com/office/drawing/2014/main" xmlns="" val="20001"/>
+                      <a16:colId xmlns="" xmlns:a16="http://schemas.microsoft.com/office/drawing/2014/main" val="20001"/>
                     </a:ext>
                   </a:extLst>
                 </a:gridCol>
                 <a:gridCol w="2760876">
                   <a:extLst>
                     <a:ext uri="{9D8B030D-6E8A-4147-A177-3AD203B41FA5}">
-                      <a16:colId xmlns:a16="http://schemas.microsoft.com/office/drawing/2014/main" xmlns="" val="20002"/>
+                      <a16:colId xmlns="" xmlns:a16="http://schemas.microsoft.com/office/drawing/2014/main" val="20002"/>
                     </a:ext>
                   </a:extLst>
                 </a:gridCol>
@@ -14810,7 +14810,7 @@
                 </a:tc>
                 <a:extLst>
                   <a:ext uri="{0D108BD9-81ED-4DB2-BD59-A6C34878D82A}">
-                    <a16:rowId xmlns:a16="http://schemas.microsoft.com/office/drawing/2014/main" xmlns="" val="10000"/>
+                    <a16:rowId xmlns="" xmlns:a16="http://schemas.microsoft.com/office/drawing/2014/main" val="10000"/>
                   </a:ext>
                 </a:extLst>
               </a:tr>
@@ -14910,7 +14910,7 @@
                 </a:tc>
                 <a:extLst>
                   <a:ext uri="{0D108BD9-81ED-4DB2-BD59-A6C34878D82A}">
-                    <a16:rowId xmlns:a16="http://schemas.microsoft.com/office/drawing/2014/main" xmlns="" val="10001"/>
+                    <a16:rowId xmlns="" xmlns:a16="http://schemas.microsoft.com/office/drawing/2014/main" val="10001"/>
                   </a:ext>
                 </a:extLst>
               </a:tr>
@@ -15016,7 +15016,7 @@
                 </a:tc>
                 <a:extLst>
                   <a:ext uri="{0D108BD9-81ED-4DB2-BD59-A6C34878D82A}">
-                    <a16:rowId xmlns:a16="http://schemas.microsoft.com/office/drawing/2014/main" xmlns="" val="10002"/>
+                    <a16:rowId xmlns="" xmlns:a16="http://schemas.microsoft.com/office/drawing/2014/main" val="10002"/>
                   </a:ext>
                 </a:extLst>
               </a:tr>
@@ -15116,7 +15116,7 @@
                 </a:tc>
                 <a:extLst>
                   <a:ext uri="{0D108BD9-81ED-4DB2-BD59-A6C34878D82A}">
-                    <a16:rowId xmlns:a16="http://schemas.microsoft.com/office/drawing/2014/main" xmlns="" val="10003"/>
+                    <a16:rowId xmlns="" xmlns:a16="http://schemas.microsoft.com/office/drawing/2014/main" val="10003"/>
                   </a:ext>
                 </a:extLst>
               </a:tr>
@@ -15263,21 +15263,21 @@
                 <a:gridCol w="2765248">
                   <a:extLst>
                     <a:ext uri="{9D8B030D-6E8A-4147-A177-3AD203B41FA5}">
-                      <a16:colId xmlns:a16="http://schemas.microsoft.com/office/drawing/2014/main" xmlns="" val="20000"/>
+                      <a16:colId xmlns="" xmlns:a16="http://schemas.microsoft.com/office/drawing/2014/main" val="20000"/>
                     </a:ext>
                   </a:extLst>
                 </a:gridCol>
                 <a:gridCol w="2765248">
                   <a:extLst>
                     <a:ext uri="{9D8B030D-6E8A-4147-A177-3AD203B41FA5}">
-                      <a16:colId xmlns:a16="http://schemas.microsoft.com/office/drawing/2014/main" xmlns="" val="20001"/>
+                      <a16:colId xmlns="" xmlns:a16="http://schemas.microsoft.com/office/drawing/2014/main" val="20001"/>
                     </a:ext>
                   </a:extLst>
                 </a:gridCol>
                 <a:gridCol w="2766104">
                   <a:extLst>
                     <a:ext uri="{9D8B030D-6E8A-4147-A177-3AD203B41FA5}">
-                      <a16:colId xmlns:a16="http://schemas.microsoft.com/office/drawing/2014/main" xmlns="" val="20002"/>
+                      <a16:colId xmlns="" xmlns:a16="http://schemas.microsoft.com/office/drawing/2014/main" val="20002"/>
                     </a:ext>
                   </a:extLst>
                 </a:gridCol>
@@ -15378,7 +15378,7 @@
                 </a:tc>
                 <a:extLst>
                   <a:ext uri="{0D108BD9-81ED-4DB2-BD59-A6C34878D82A}">
-                    <a16:rowId xmlns:a16="http://schemas.microsoft.com/office/drawing/2014/main" xmlns="" val="10000"/>
+                    <a16:rowId xmlns="" xmlns:a16="http://schemas.microsoft.com/office/drawing/2014/main" val="10000"/>
                   </a:ext>
                 </a:extLst>
               </a:tr>
@@ -15478,7 +15478,7 @@
                 </a:tc>
                 <a:extLst>
                   <a:ext uri="{0D108BD9-81ED-4DB2-BD59-A6C34878D82A}">
-                    <a16:rowId xmlns:a16="http://schemas.microsoft.com/office/drawing/2014/main" xmlns="" val="10001"/>
+                    <a16:rowId xmlns="" xmlns:a16="http://schemas.microsoft.com/office/drawing/2014/main" val="10001"/>
                   </a:ext>
                 </a:extLst>
               </a:tr>
@@ -15584,7 +15584,7 @@
                 </a:tc>
                 <a:extLst>
                   <a:ext uri="{0D108BD9-81ED-4DB2-BD59-A6C34878D82A}">
-                    <a16:rowId xmlns:a16="http://schemas.microsoft.com/office/drawing/2014/main" xmlns="" val="10002"/>
+                    <a16:rowId xmlns="" xmlns:a16="http://schemas.microsoft.com/office/drawing/2014/main" val="10002"/>
                   </a:ext>
                 </a:extLst>
               </a:tr>
@@ -15684,7 +15684,7 @@
                 </a:tc>
                 <a:extLst>
                   <a:ext uri="{0D108BD9-81ED-4DB2-BD59-A6C34878D82A}">
-                    <a16:rowId xmlns:a16="http://schemas.microsoft.com/office/drawing/2014/main" xmlns="" val="10003"/>
+                    <a16:rowId xmlns="" xmlns:a16="http://schemas.microsoft.com/office/drawing/2014/main" val="10003"/>
                   </a:ext>
                 </a:extLst>
               </a:tr>
@@ -15843,21 +15843,21 @@
                 <a:gridCol w="2844507">
                   <a:extLst>
                     <a:ext uri="{9D8B030D-6E8A-4147-A177-3AD203B41FA5}">
-                      <a16:colId xmlns:a16="http://schemas.microsoft.com/office/drawing/2014/main" xmlns="" val="20000"/>
+                      <a16:colId xmlns="" xmlns:a16="http://schemas.microsoft.com/office/drawing/2014/main" val="20000"/>
                     </a:ext>
                   </a:extLst>
                 </a:gridCol>
                 <a:gridCol w="2844507">
                   <a:extLst>
                     <a:ext uri="{9D8B030D-6E8A-4147-A177-3AD203B41FA5}">
-                      <a16:colId xmlns:a16="http://schemas.microsoft.com/office/drawing/2014/main" xmlns="" val="20001"/>
+                      <a16:colId xmlns="" xmlns:a16="http://schemas.microsoft.com/office/drawing/2014/main" val="20001"/>
                     </a:ext>
                   </a:extLst>
                 </a:gridCol>
                 <a:gridCol w="2845387">
                   <a:extLst>
                     <a:ext uri="{9D8B030D-6E8A-4147-A177-3AD203B41FA5}">
-                      <a16:colId xmlns:a16="http://schemas.microsoft.com/office/drawing/2014/main" xmlns="" val="20002"/>
+                      <a16:colId xmlns="" xmlns:a16="http://schemas.microsoft.com/office/drawing/2014/main" val="20002"/>
                     </a:ext>
                   </a:extLst>
                 </a:gridCol>
@@ -15958,7 +15958,7 @@
                 </a:tc>
                 <a:extLst>
                   <a:ext uri="{0D108BD9-81ED-4DB2-BD59-A6C34878D82A}">
-                    <a16:rowId xmlns:a16="http://schemas.microsoft.com/office/drawing/2014/main" xmlns="" val="10000"/>
+                    <a16:rowId xmlns="" xmlns:a16="http://schemas.microsoft.com/office/drawing/2014/main" val="10000"/>
                   </a:ext>
                 </a:extLst>
               </a:tr>
@@ -16058,7 +16058,7 @@
                 </a:tc>
                 <a:extLst>
                   <a:ext uri="{0D108BD9-81ED-4DB2-BD59-A6C34878D82A}">
-                    <a16:rowId xmlns:a16="http://schemas.microsoft.com/office/drawing/2014/main" xmlns="" val="10001"/>
+                    <a16:rowId xmlns="" xmlns:a16="http://schemas.microsoft.com/office/drawing/2014/main" val="10001"/>
                   </a:ext>
                 </a:extLst>
               </a:tr>
@@ -16164,7 +16164,7 @@
                 </a:tc>
                 <a:extLst>
                   <a:ext uri="{0D108BD9-81ED-4DB2-BD59-A6C34878D82A}">
-                    <a16:rowId xmlns:a16="http://schemas.microsoft.com/office/drawing/2014/main" xmlns="" val="10002"/>
+                    <a16:rowId xmlns="" xmlns:a16="http://schemas.microsoft.com/office/drawing/2014/main" val="10002"/>
                   </a:ext>
                 </a:extLst>
               </a:tr>
@@ -16258,7 +16258,7 @@
                 </a:tc>
                 <a:extLst>
                   <a:ext uri="{0D108BD9-81ED-4DB2-BD59-A6C34878D82A}">
-                    <a16:rowId xmlns:a16="http://schemas.microsoft.com/office/drawing/2014/main" xmlns="" val="10003"/>
+                    <a16:rowId xmlns="" xmlns:a16="http://schemas.microsoft.com/office/drawing/2014/main" val="10003"/>
                   </a:ext>
                 </a:extLst>
               </a:tr>
@@ -16352,7 +16352,7 @@
                 </a:tc>
                 <a:extLst>
                   <a:ext uri="{0D108BD9-81ED-4DB2-BD59-A6C34878D82A}">
-                    <a16:rowId xmlns:a16="http://schemas.microsoft.com/office/drawing/2014/main" xmlns="" val="10004"/>
+                    <a16:rowId xmlns="" xmlns:a16="http://schemas.microsoft.com/office/drawing/2014/main" val="10004"/>
                   </a:ext>
                 </a:extLst>
               </a:tr>
@@ -16446,7 +16446,7 @@
                 </a:tc>
                 <a:extLst>
                   <a:ext uri="{0D108BD9-81ED-4DB2-BD59-A6C34878D82A}">
-                    <a16:rowId xmlns:a16="http://schemas.microsoft.com/office/drawing/2014/main" xmlns="" val="10005"/>
+                    <a16:rowId xmlns="" xmlns:a16="http://schemas.microsoft.com/office/drawing/2014/main" val="10005"/>
                   </a:ext>
                 </a:extLst>
               </a:tr>
@@ -19239,7 +19239,7 @@
           <p:cNvPr id="2" name="標題 1">
             <a:extLst>
               <a:ext uri="{FF2B5EF4-FFF2-40B4-BE49-F238E27FC236}">
-                <a16:creationId xmlns:a16="http://schemas.microsoft.com/office/drawing/2014/main" xmlns="" id="{403F2721-E46E-5C05-3E9C-9EA4D6687533}"/>
+                <a16:creationId xmlns="" xmlns:a16="http://schemas.microsoft.com/office/drawing/2014/main" id="{403F2721-E46E-5C05-3E9C-9EA4D6687533}"/>
               </a:ext>
             </a:extLst>
           </p:cNvPr>
@@ -19268,7 +19268,7 @@
           <p:cNvPr id="3" name="投影片編號版面配置區 2">
             <a:extLst>
               <a:ext uri="{FF2B5EF4-FFF2-40B4-BE49-F238E27FC236}">
-                <a16:creationId xmlns:a16="http://schemas.microsoft.com/office/drawing/2014/main" xmlns="" id="{B020AEA6-02AD-9824-DC47-95F954221135}"/>
+                <a16:creationId xmlns="" xmlns:a16="http://schemas.microsoft.com/office/drawing/2014/main" id="{B020AEA6-02AD-9824-DC47-95F954221135}"/>
               </a:ext>
             </a:extLst>
           </p:cNvPr>
@@ -19298,7 +19298,7 @@
           <p:cNvPr id="4" name="內容版面配置區 3">
             <a:extLst>
               <a:ext uri="{FF2B5EF4-FFF2-40B4-BE49-F238E27FC236}">
-                <a16:creationId xmlns:a16="http://schemas.microsoft.com/office/drawing/2014/main" xmlns="" id="{626D35BE-0E4B-7C61-FA2A-FED586A49AA6}"/>
+                <a16:creationId xmlns="" xmlns:a16="http://schemas.microsoft.com/office/drawing/2014/main" id="{626D35BE-0E4B-7C61-FA2A-FED586A49AA6}"/>
               </a:ext>
             </a:extLst>
           </p:cNvPr>
@@ -20112,7 +20112,7 @@
           <p:cNvPr id="2" name="標題 1">
             <a:extLst>
               <a:ext uri="{FF2B5EF4-FFF2-40B4-BE49-F238E27FC236}">
-                <a16:creationId xmlns:a16="http://schemas.microsoft.com/office/drawing/2014/main" xmlns="" id="{314FA47A-912B-FF88-B9E3-AE6D9F671EAC}"/>
+                <a16:creationId xmlns="" xmlns:a16="http://schemas.microsoft.com/office/drawing/2014/main" id="{314FA47A-912B-FF88-B9E3-AE6D9F671EAC}"/>
               </a:ext>
             </a:extLst>
           </p:cNvPr>
@@ -20149,7 +20149,7 @@
           <p:cNvPr id="3" name="投影片編號版面配置區 2">
             <a:extLst>
               <a:ext uri="{FF2B5EF4-FFF2-40B4-BE49-F238E27FC236}">
-                <a16:creationId xmlns:a16="http://schemas.microsoft.com/office/drawing/2014/main" xmlns="" id="{0FC8AE10-1CB5-28CF-3510-0335B7A1C26F}"/>
+                <a16:creationId xmlns="" xmlns:a16="http://schemas.microsoft.com/office/drawing/2014/main" id="{0FC8AE10-1CB5-28CF-3510-0335B7A1C26F}"/>
               </a:ext>
             </a:extLst>
           </p:cNvPr>
@@ -20179,7 +20179,7 @@
           <p:cNvPr id="4" name="內容版面配置區 3">
             <a:extLst>
               <a:ext uri="{FF2B5EF4-FFF2-40B4-BE49-F238E27FC236}">
-                <a16:creationId xmlns:a16="http://schemas.microsoft.com/office/drawing/2014/main" xmlns="" id="{5C3FDBEE-8772-6956-1A3E-7645816905F5}"/>
+                <a16:creationId xmlns="" xmlns:a16="http://schemas.microsoft.com/office/drawing/2014/main" id="{5C3FDBEE-8772-6956-1A3E-7645816905F5}"/>
               </a:ext>
             </a:extLst>
           </p:cNvPr>
@@ -20452,15 +20452,7 @@
                   <a:srgbClr val="FF0000"/>
                 </a:solidFill>
               </a:rPr>
-              <a:t>的</a:t>
-            </a:r>
-            <a:r>
-              <a:rPr lang="zh-TW" altLang="en-US" dirty="0" smtClean="0">
-                <a:solidFill>
-                  <a:srgbClr val="FF0000"/>
-                </a:solidFill>
-              </a:rPr>
-              <a:t>欄位順序</a:t>
+              <a:t>的欄位順序</a:t>
             </a:r>
             <a:r>
               <a:rPr lang="zh-TW" altLang="en-US" dirty="0" smtClean="0"/>
@@ -20656,7 +20648,7 @@
           <p:cNvPr id="6" name="文字方塊 5">
             <a:extLst>
               <a:ext uri="{FF2B5EF4-FFF2-40B4-BE49-F238E27FC236}">
-                <a16:creationId xmlns:a16="http://schemas.microsoft.com/office/drawing/2014/main" xmlns="" id="{202C0BD4-4798-1671-DBA5-3E77994D47BB}"/>
+                <a16:creationId xmlns="" xmlns:a16="http://schemas.microsoft.com/office/drawing/2014/main" id="{202C0BD4-4798-1671-DBA5-3E77994D47BB}"/>
               </a:ext>
             </a:extLst>
           </p:cNvPr>
@@ -20692,7 +20684,7 @@
           <p:cNvPr id="8" name="圖片 7">
             <a:extLst>
               <a:ext uri="{FF2B5EF4-FFF2-40B4-BE49-F238E27FC236}">
-                <a16:creationId xmlns:a16="http://schemas.microsoft.com/office/drawing/2014/main" xmlns="" id="{B6D266A2-C221-8893-9A63-E03AA58F7754}"/>
+                <a16:creationId xmlns="" xmlns:a16="http://schemas.microsoft.com/office/drawing/2014/main" id="{B6D266A2-C221-8893-9A63-E03AA58F7754}"/>
               </a:ext>
             </a:extLst>
           </p:cNvPr>
@@ -20722,7 +20714,7 @@
           <p:cNvPr id="5" name="文字方塊 4">
             <a:extLst>
               <a:ext uri="{FF2B5EF4-FFF2-40B4-BE49-F238E27FC236}">
-                <a16:creationId xmlns:a16="http://schemas.microsoft.com/office/drawing/2014/main" xmlns="" id="{DBB40161-E9E0-21DD-9837-847D25B11453}"/>
+                <a16:creationId xmlns="" xmlns:a16="http://schemas.microsoft.com/office/drawing/2014/main" id="{DBB40161-E9E0-21DD-9837-847D25B11453}"/>
               </a:ext>
             </a:extLst>
           </p:cNvPr>
@@ -20855,7 +20847,7 @@
           <p:cNvPr id="2" name="投影片編號版面配置區 1">
             <a:extLst>
               <a:ext uri="{FF2B5EF4-FFF2-40B4-BE49-F238E27FC236}">
-                <a16:creationId xmlns:a16="http://schemas.microsoft.com/office/drawing/2014/main" xmlns="" id="{C0E5E57A-696F-C8B8-D155-D089770B4AD9}"/>
+                <a16:creationId xmlns="" xmlns:a16="http://schemas.microsoft.com/office/drawing/2014/main" id="{C0E5E57A-696F-C8B8-D155-D089770B4AD9}"/>
               </a:ext>
             </a:extLst>
           </p:cNvPr>
@@ -20885,7 +20877,7 @@
           <p:cNvPr id="4" name="圖片 3">
             <a:extLst>
               <a:ext uri="{FF2B5EF4-FFF2-40B4-BE49-F238E27FC236}">
-                <a16:creationId xmlns:a16="http://schemas.microsoft.com/office/drawing/2014/main" xmlns="" id="{C611F64F-799C-E14B-79A8-DC570B2B94D2}"/>
+                <a16:creationId xmlns="" xmlns:a16="http://schemas.microsoft.com/office/drawing/2014/main" id="{C611F64F-799C-E14B-79A8-DC570B2B94D2}"/>
               </a:ext>
             </a:extLst>
           </p:cNvPr>
@@ -20915,7 +20907,7 @@
           <p:cNvPr id="6" name="圖片 5">
             <a:extLst>
               <a:ext uri="{FF2B5EF4-FFF2-40B4-BE49-F238E27FC236}">
-                <a16:creationId xmlns:a16="http://schemas.microsoft.com/office/drawing/2014/main" xmlns="" id="{86FF6110-41E7-5591-9147-DBD395117B5B}"/>
+                <a16:creationId xmlns="" xmlns:a16="http://schemas.microsoft.com/office/drawing/2014/main" id="{86FF6110-41E7-5591-9147-DBD395117B5B}"/>
               </a:ext>
             </a:extLst>
           </p:cNvPr>
@@ -20945,7 +20937,7 @@
           <p:cNvPr id="8" name="圖片 7">
             <a:extLst>
               <a:ext uri="{FF2B5EF4-FFF2-40B4-BE49-F238E27FC236}">
-                <a16:creationId xmlns:a16="http://schemas.microsoft.com/office/drawing/2014/main" xmlns="" id="{056EE0CD-2816-655B-E77B-B7BF779C3874}"/>
+                <a16:creationId xmlns="" xmlns:a16="http://schemas.microsoft.com/office/drawing/2014/main" id="{056EE0CD-2816-655B-E77B-B7BF779C3874}"/>
               </a:ext>
             </a:extLst>
           </p:cNvPr>
@@ -20975,7 +20967,7 @@
           <p:cNvPr id="10" name="圖片 9">
             <a:extLst>
               <a:ext uri="{FF2B5EF4-FFF2-40B4-BE49-F238E27FC236}">
-                <a16:creationId xmlns:a16="http://schemas.microsoft.com/office/drawing/2014/main" xmlns="" id="{960F3725-85AD-D4FC-B656-D7ADBC19EFF1}"/>
+                <a16:creationId xmlns="" xmlns:a16="http://schemas.microsoft.com/office/drawing/2014/main" id="{960F3725-85AD-D4FC-B656-D7ADBC19EFF1}"/>
               </a:ext>
             </a:extLst>
           </p:cNvPr>
@@ -21005,7 +20997,7 @@
           <p:cNvPr id="11" name="文字方塊 10">
             <a:extLst>
               <a:ext uri="{FF2B5EF4-FFF2-40B4-BE49-F238E27FC236}">
-                <a16:creationId xmlns:a16="http://schemas.microsoft.com/office/drawing/2014/main" xmlns="" id="{0CF7DA04-4B16-9E19-CB83-0DF370207C5F}"/>
+                <a16:creationId xmlns="" xmlns:a16="http://schemas.microsoft.com/office/drawing/2014/main" id="{0CF7DA04-4B16-9E19-CB83-0DF370207C5F}"/>
               </a:ext>
             </a:extLst>
           </p:cNvPr>
@@ -21106,7 +21098,7 @@
           <p:cNvPr id="2" name="標題 1">
             <a:extLst>
               <a:ext uri="{FF2B5EF4-FFF2-40B4-BE49-F238E27FC236}">
-                <a16:creationId xmlns:a16="http://schemas.microsoft.com/office/drawing/2014/main" xmlns="" id="{05D11A38-A507-3E03-9474-847CC0B659F7}"/>
+                <a16:creationId xmlns="" xmlns:a16="http://schemas.microsoft.com/office/drawing/2014/main" id="{05D11A38-A507-3E03-9474-847CC0B659F7}"/>
               </a:ext>
             </a:extLst>
           </p:cNvPr>
@@ -21138,7 +21130,7 @@
           <p:cNvPr id="3" name="投影片編號版面配置區 2">
             <a:extLst>
               <a:ext uri="{FF2B5EF4-FFF2-40B4-BE49-F238E27FC236}">
-                <a16:creationId xmlns:a16="http://schemas.microsoft.com/office/drawing/2014/main" xmlns="" id="{F39FE64D-9942-9219-5891-CAB0F3B8601E}"/>
+                <a16:creationId xmlns="" xmlns:a16="http://schemas.microsoft.com/office/drawing/2014/main" id="{F39FE64D-9942-9219-5891-CAB0F3B8601E}"/>
               </a:ext>
             </a:extLst>
           </p:cNvPr>
@@ -21168,7 +21160,7 @@
           <p:cNvPr id="4" name="內容版面配置區 3">
             <a:extLst>
               <a:ext uri="{FF2B5EF4-FFF2-40B4-BE49-F238E27FC236}">
-                <a16:creationId xmlns:a16="http://schemas.microsoft.com/office/drawing/2014/main" xmlns="" id="{C24F9C69-FB11-47BA-4AE8-8A311E1C9210}"/>
+                <a16:creationId xmlns="" xmlns:a16="http://schemas.microsoft.com/office/drawing/2014/main" id="{C24F9C69-FB11-47BA-4AE8-8A311E1C9210}"/>
               </a:ext>
             </a:extLst>
           </p:cNvPr>
@@ -21369,7 +21361,7 @@
           <p:cNvPr id="2" name="標題 1">
             <a:extLst>
               <a:ext uri="{FF2B5EF4-FFF2-40B4-BE49-F238E27FC236}">
-                <a16:creationId xmlns:a16="http://schemas.microsoft.com/office/drawing/2014/main" xmlns="" id="{1C967F69-729B-6DE5-C5D3-C34DAFC7CD2B}"/>
+                <a16:creationId xmlns="" xmlns:a16="http://schemas.microsoft.com/office/drawing/2014/main" id="{1C967F69-729B-6DE5-C5D3-C34DAFC7CD2B}"/>
               </a:ext>
             </a:extLst>
           </p:cNvPr>
@@ -21401,7 +21393,7 @@
           <p:cNvPr id="3" name="投影片編號版面配置區 2">
             <a:extLst>
               <a:ext uri="{FF2B5EF4-FFF2-40B4-BE49-F238E27FC236}">
-                <a16:creationId xmlns:a16="http://schemas.microsoft.com/office/drawing/2014/main" xmlns="" id="{E3AF38FB-4CB8-BB9B-F87B-616B9A80252A}"/>
+                <a16:creationId xmlns="" xmlns:a16="http://schemas.microsoft.com/office/drawing/2014/main" id="{E3AF38FB-4CB8-BB9B-F87B-616B9A80252A}"/>
               </a:ext>
             </a:extLst>
           </p:cNvPr>
@@ -21431,7 +21423,7 @@
           <p:cNvPr id="4" name="內容版面配置區 3">
             <a:extLst>
               <a:ext uri="{FF2B5EF4-FFF2-40B4-BE49-F238E27FC236}">
-                <a16:creationId xmlns:a16="http://schemas.microsoft.com/office/drawing/2014/main" xmlns="" id="{D9F5FF1C-39C8-3405-F94D-2152FD7EE6B8}"/>
+                <a16:creationId xmlns="" xmlns:a16="http://schemas.microsoft.com/office/drawing/2014/main" id="{D9F5FF1C-39C8-3405-F94D-2152FD7EE6B8}"/>
               </a:ext>
             </a:extLst>
           </p:cNvPr>
@@ -21980,7 +21972,7 @@
           <p:cNvPr id="6" name="圖片 5">
             <a:extLst>
               <a:ext uri="{FF2B5EF4-FFF2-40B4-BE49-F238E27FC236}">
-                <a16:creationId xmlns:a16="http://schemas.microsoft.com/office/drawing/2014/main" xmlns="" id="{32179C2D-0BA1-8AD4-9174-32D3A5483CBF}"/>
+                <a16:creationId xmlns="" xmlns:a16="http://schemas.microsoft.com/office/drawing/2014/main" id="{32179C2D-0BA1-8AD4-9174-32D3A5483CBF}"/>
               </a:ext>
             </a:extLst>
           </p:cNvPr>
@@ -22148,7 +22140,7 @@
           <p:cNvPr id="6" name="圖片 5" descr="一張含有 文字 的圖片&#10;&#10;自動產生的描述">
             <a:extLst>
               <a:ext uri="{FF2B5EF4-FFF2-40B4-BE49-F238E27FC236}">
-                <a16:creationId xmlns:a16="http://schemas.microsoft.com/office/drawing/2014/main" xmlns="" id="{78CF4CCA-B8F0-EC72-F6EC-2C7CE776DE98}"/>
+                <a16:creationId xmlns="" xmlns:a16="http://schemas.microsoft.com/office/drawing/2014/main" id="{78CF4CCA-B8F0-EC72-F6EC-2C7CE776DE98}"/>
               </a:ext>
             </a:extLst>
           </p:cNvPr>
@@ -22332,7 +22324,7 @@
           <p:cNvPr id="6" name="圖片 5" descr="一張含有 文字 的圖片&#10;&#10;自動產生的描述">
             <a:extLst>
               <a:ext uri="{FF2B5EF4-FFF2-40B4-BE49-F238E27FC236}">
-                <a16:creationId xmlns:a16="http://schemas.microsoft.com/office/drawing/2014/main" xmlns="" id="{0198CF61-A6D5-5FB9-C855-C9A8F8767D64}"/>
+                <a16:creationId xmlns="" xmlns:a16="http://schemas.microsoft.com/office/drawing/2014/main" id="{0198CF61-A6D5-5FB9-C855-C9A8F8767D64}"/>
               </a:ext>
             </a:extLst>
           </p:cNvPr>
@@ -22378,7 +22370,7 @@
         <p:cNvPr id="1" name="">
           <a:extLst>
             <a:ext uri="{FF2B5EF4-FFF2-40B4-BE49-F238E27FC236}">
-              <a16:creationId xmlns:a16="http://schemas.microsoft.com/office/drawing/2014/main" xmlns="" id="{F7A47D33-27AD-F7CD-5AB0-C27353135A38}"/>
+              <a16:creationId xmlns="" xmlns:a16="http://schemas.microsoft.com/office/drawing/2014/main" id="{F7A47D33-27AD-F7CD-5AB0-C27353135A38}"/>
             </a:ext>
           </a:extLst>
         </p:cNvPr>
@@ -22398,7 +22390,7 @@
           <p:cNvPr id="2" name="標題 1">
             <a:extLst>
               <a:ext uri="{FF2B5EF4-FFF2-40B4-BE49-F238E27FC236}">
-                <a16:creationId xmlns:a16="http://schemas.microsoft.com/office/drawing/2014/main" xmlns="" id="{68DD2C9F-BDEF-3809-3998-544488C6C44D}"/>
+                <a16:creationId xmlns="" xmlns:a16="http://schemas.microsoft.com/office/drawing/2014/main" id="{68DD2C9F-BDEF-3809-3998-544488C6C44D}"/>
               </a:ext>
             </a:extLst>
           </p:cNvPr>
@@ -22475,7 +22467,7 @@
           <p:cNvPr id="3" name="投影片編號版面配置區 2">
             <a:extLst>
               <a:ext uri="{FF2B5EF4-FFF2-40B4-BE49-F238E27FC236}">
-                <a16:creationId xmlns:a16="http://schemas.microsoft.com/office/drawing/2014/main" xmlns="" id="{8BEDDF80-7292-D937-00A5-CA0111F6B34B}"/>
+                <a16:creationId xmlns="" xmlns:a16="http://schemas.microsoft.com/office/drawing/2014/main" id="{8BEDDF80-7292-D937-00A5-CA0111F6B34B}"/>
               </a:ext>
             </a:extLst>
           </p:cNvPr>
@@ -22505,7 +22497,7 @@
           <p:cNvPr id="4" name="內容版面配置區 3">
             <a:extLst>
               <a:ext uri="{FF2B5EF4-FFF2-40B4-BE49-F238E27FC236}">
-                <a16:creationId xmlns:a16="http://schemas.microsoft.com/office/drawing/2014/main" xmlns="" id="{9C32B136-351F-0F39-7692-A37A10F04496}"/>
+                <a16:creationId xmlns="" xmlns:a16="http://schemas.microsoft.com/office/drawing/2014/main" id="{9C32B136-351F-0F39-7692-A37A10F04496}"/>
               </a:ext>
             </a:extLst>
           </p:cNvPr>
@@ -24074,7 +24066,7 @@
           <p:cNvPr id="5" name="圖片 4">
             <a:extLst>
               <a:ext uri="{FF2B5EF4-FFF2-40B4-BE49-F238E27FC236}">
-                <a16:creationId xmlns:a16="http://schemas.microsoft.com/office/drawing/2014/main" xmlns="" id="{6E0A87C0-AD66-C2FE-F521-BCC46EF8C143}"/>
+                <a16:creationId xmlns="" xmlns:a16="http://schemas.microsoft.com/office/drawing/2014/main" id="{6E0A87C0-AD66-C2FE-F521-BCC46EF8C143}"/>
               </a:ext>
             </a:extLst>
           </p:cNvPr>
@@ -24887,7 +24879,7 @@
           <p:cNvPr id="5" name="文字方塊 4">
             <a:extLst>
               <a:ext uri="{FF2B5EF4-FFF2-40B4-BE49-F238E27FC236}">
-                <a16:creationId xmlns:a16="http://schemas.microsoft.com/office/drawing/2014/main" xmlns="" id="{C88CA5E7-BF1F-BCAB-6159-B9981A488A3B}"/>
+                <a16:creationId xmlns="" xmlns:a16="http://schemas.microsoft.com/office/drawing/2014/main" id="{C88CA5E7-BF1F-BCAB-6159-B9981A488A3B}"/>
               </a:ext>
             </a:extLst>
           </p:cNvPr>
@@ -25673,7 +25665,7 @@
           <p:cNvPr id="2" name="標題 1">
             <a:extLst>
               <a:ext uri="{FF2B5EF4-FFF2-40B4-BE49-F238E27FC236}">
-                <a16:creationId xmlns:a16="http://schemas.microsoft.com/office/drawing/2014/main" xmlns="" id="{A78F0540-1BC2-078D-9118-7E84C7144502}"/>
+                <a16:creationId xmlns="" xmlns:a16="http://schemas.microsoft.com/office/drawing/2014/main" id="{A78F0540-1BC2-078D-9118-7E84C7144502}"/>
               </a:ext>
             </a:extLst>
           </p:cNvPr>
@@ -25717,7 +25709,7 @@
           <p:cNvPr id="3" name="投影片編號版面配置區 2">
             <a:extLst>
               <a:ext uri="{FF2B5EF4-FFF2-40B4-BE49-F238E27FC236}">
-                <a16:creationId xmlns:a16="http://schemas.microsoft.com/office/drawing/2014/main" xmlns="" id="{35D728C5-EE00-39AA-2830-B4D017C8AFD8}"/>
+                <a16:creationId xmlns="" xmlns:a16="http://schemas.microsoft.com/office/drawing/2014/main" id="{35D728C5-EE00-39AA-2830-B4D017C8AFD8}"/>
               </a:ext>
             </a:extLst>
           </p:cNvPr>
@@ -25747,7 +25739,7 @@
           <p:cNvPr id="4" name="內容版面配置區 3">
             <a:extLst>
               <a:ext uri="{FF2B5EF4-FFF2-40B4-BE49-F238E27FC236}">
-                <a16:creationId xmlns:a16="http://schemas.microsoft.com/office/drawing/2014/main" xmlns="" id="{EFD3CF28-79C1-987B-F44A-0CB1DF3920EC}"/>
+                <a16:creationId xmlns="" xmlns:a16="http://schemas.microsoft.com/office/drawing/2014/main" id="{EFD3CF28-79C1-987B-F44A-0CB1DF3920EC}"/>
               </a:ext>
             </a:extLst>
           </p:cNvPr>
@@ -26471,7 +26463,7 @@
           <p:cNvPr id="6" name="圖片 5">
             <a:extLst>
               <a:ext uri="{FF2B5EF4-FFF2-40B4-BE49-F238E27FC236}">
-                <a16:creationId xmlns:a16="http://schemas.microsoft.com/office/drawing/2014/main" xmlns="" id="{A27F44EF-CD05-9C34-09A1-015E968A999E}"/>
+                <a16:creationId xmlns="" xmlns:a16="http://schemas.microsoft.com/office/drawing/2014/main" id="{A27F44EF-CD05-9C34-09A1-015E968A999E}"/>
               </a:ext>
             </a:extLst>
           </p:cNvPr>
@@ -27098,7 +27090,7 @@
           <p:cNvPr id="5" name="文字方塊 4">
             <a:extLst>
               <a:ext uri="{FF2B5EF4-FFF2-40B4-BE49-F238E27FC236}">
-                <a16:creationId xmlns:a16="http://schemas.microsoft.com/office/drawing/2014/main" xmlns="" id="{FB14DEDE-0F17-B8BD-B3EA-774A97706681}"/>
+                <a16:creationId xmlns="" xmlns:a16="http://schemas.microsoft.com/office/drawing/2014/main" id="{FB14DEDE-0F17-B8BD-B3EA-774A97706681}"/>
               </a:ext>
             </a:extLst>
           </p:cNvPr>
@@ -28598,7 +28590,7 @@
         <p:cNvPr id="1" name="">
           <a:extLst>
             <a:ext uri="{FF2B5EF4-FFF2-40B4-BE49-F238E27FC236}">
-              <a16:creationId xmlns:a16="http://schemas.microsoft.com/office/drawing/2014/main" xmlns="" id="{5729D664-68C8-2811-EDAD-1DF73BC10000}"/>
+              <a16:creationId xmlns="" xmlns:a16="http://schemas.microsoft.com/office/drawing/2014/main" id="{5729D664-68C8-2811-EDAD-1DF73BC10000}"/>
             </a:ext>
           </a:extLst>
         </p:cNvPr>
@@ -28618,7 +28610,7 @@
           <p:cNvPr id="2" name="標題 1">
             <a:extLst>
               <a:ext uri="{FF2B5EF4-FFF2-40B4-BE49-F238E27FC236}">
-                <a16:creationId xmlns:a16="http://schemas.microsoft.com/office/drawing/2014/main" xmlns="" id="{488939AA-3A82-8965-1277-AE9B2B64E5AA}"/>
+                <a16:creationId xmlns="" xmlns:a16="http://schemas.microsoft.com/office/drawing/2014/main" id="{488939AA-3A82-8965-1277-AE9B2B64E5AA}"/>
               </a:ext>
             </a:extLst>
           </p:cNvPr>
@@ -28685,7 +28677,7 @@
           <p:cNvPr id="3" name="投影片編號版面配置區 2">
             <a:extLst>
               <a:ext uri="{FF2B5EF4-FFF2-40B4-BE49-F238E27FC236}">
-                <a16:creationId xmlns:a16="http://schemas.microsoft.com/office/drawing/2014/main" xmlns="" id="{BD6705ED-9B99-85A2-F7AB-EA1BB42423CE}"/>
+                <a16:creationId xmlns="" xmlns:a16="http://schemas.microsoft.com/office/drawing/2014/main" id="{BD6705ED-9B99-85A2-F7AB-EA1BB42423CE}"/>
               </a:ext>
             </a:extLst>
           </p:cNvPr>
@@ -28715,7 +28707,7 @@
           <p:cNvPr id="4" name="內容版面配置區 3">
             <a:extLst>
               <a:ext uri="{FF2B5EF4-FFF2-40B4-BE49-F238E27FC236}">
-                <a16:creationId xmlns:a16="http://schemas.microsoft.com/office/drawing/2014/main" xmlns="" id="{4A41F358-CE01-1B94-60C7-23D80336AD05}"/>
+                <a16:creationId xmlns="" xmlns:a16="http://schemas.microsoft.com/office/drawing/2014/main" id="{4A41F358-CE01-1B94-60C7-23D80336AD05}"/>
               </a:ext>
             </a:extLst>
           </p:cNvPr>
@@ -28823,7 +28815,7 @@
           <p:cNvPr id="5" name="文字方塊 4">
             <a:extLst>
               <a:ext uri="{FF2B5EF4-FFF2-40B4-BE49-F238E27FC236}">
-                <a16:creationId xmlns:a16="http://schemas.microsoft.com/office/drawing/2014/main" xmlns="" id="{57FF48B1-AE23-FDD0-E7AE-6F103F527D82}"/>
+                <a16:creationId xmlns="" xmlns:a16="http://schemas.microsoft.com/office/drawing/2014/main" id="{57FF48B1-AE23-FDD0-E7AE-6F103F527D82}"/>
               </a:ext>
             </a:extLst>
           </p:cNvPr>
@@ -29345,7 +29337,7 @@
           <p:cNvPr id="6" name="圖片 5">
             <a:extLst>
               <a:ext uri="{FF2B5EF4-FFF2-40B4-BE49-F238E27FC236}">
-                <a16:creationId xmlns:a16="http://schemas.microsoft.com/office/drawing/2014/main" xmlns="" id="{00E8E5D8-0B78-A36E-039A-AE0F323E8E0F}"/>
+                <a16:creationId xmlns="" xmlns:a16="http://schemas.microsoft.com/office/drawing/2014/main" id="{00E8E5D8-0B78-A36E-039A-AE0F323E8E0F}"/>
               </a:ext>
             </a:extLst>
           </p:cNvPr>
@@ -29475,7 +29467,7 @@
           <p:cNvPr id="6" name="圖片 5" descr="一張含有 文字 的圖片&#10;&#10;自動產生的描述">
             <a:extLst>
               <a:ext uri="{FF2B5EF4-FFF2-40B4-BE49-F238E27FC236}">
-                <a16:creationId xmlns:a16="http://schemas.microsoft.com/office/drawing/2014/main" xmlns="" id="{C94C3084-2672-A33A-0647-67BD83116990}"/>
+                <a16:creationId xmlns="" xmlns:a16="http://schemas.microsoft.com/office/drawing/2014/main" id="{C94C3084-2672-A33A-0647-67BD83116990}"/>
               </a:ext>
             </a:extLst>
           </p:cNvPr>
@@ -29617,7 +29609,7 @@
           <p:cNvPr id="6" name="圖片 5">
             <a:extLst>
               <a:ext uri="{FF2B5EF4-FFF2-40B4-BE49-F238E27FC236}">
-                <a16:creationId xmlns:a16="http://schemas.microsoft.com/office/drawing/2014/main" xmlns="" id="{74815F5D-6A49-033D-9A60-48535CEB3AEB}"/>
+                <a16:creationId xmlns="" xmlns:a16="http://schemas.microsoft.com/office/drawing/2014/main" id="{74815F5D-6A49-033D-9A60-48535CEB3AEB}"/>
               </a:ext>
             </a:extLst>
           </p:cNvPr>
@@ -30064,7 +30056,7 @@
           <p:cNvPr id="6" name="圖片 5">
             <a:extLst>
               <a:ext uri="{FF2B5EF4-FFF2-40B4-BE49-F238E27FC236}">
-                <a16:creationId xmlns:a16="http://schemas.microsoft.com/office/drawing/2014/main" xmlns="" id="{54148BB9-81E8-00F3-80C8-0988A1865813}"/>
+                <a16:creationId xmlns="" xmlns:a16="http://schemas.microsoft.com/office/drawing/2014/main" id="{54148BB9-81E8-00F3-80C8-0988A1865813}"/>
               </a:ext>
             </a:extLst>
           </p:cNvPr>
@@ -30220,49 +30212,49 @@
                 <a:gridCol w="1165705">
                   <a:extLst>
                     <a:ext uri="{9D8B030D-6E8A-4147-A177-3AD203B41FA5}">
-                      <a16:colId xmlns:a16="http://schemas.microsoft.com/office/drawing/2014/main" xmlns="" val="20000"/>
+                      <a16:colId xmlns="" xmlns:a16="http://schemas.microsoft.com/office/drawing/2014/main" val="20000"/>
                     </a:ext>
                   </a:extLst>
                 </a:gridCol>
                 <a:gridCol w="1202421">
                   <a:extLst>
                     <a:ext uri="{9D8B030D-6E8A-4147-A177-3AD203B41FA5}">
-                      <a16:colId xmlns:a16="http://schemas.microsoft.com/office/drawing/2014/main" xmlns="" val="20001"/>
+                      <a16:colId xmlns="" xmlns:a16="http://schemas.microsoft.com/office/drawing/2014/main" val="20001"/>
                     </a:ext>
                   </a:extLst>
                 </a:gridCol>
                 <a:gridCol w="944143">
                   <a:extLst>
                     <a:ext uri="{9D8B030D-6E8A-4147-A177-3AD203B41FA5}">
-                      <a16:colId xmlns:a16="http://schemas.microsoft.com/office/drawing/2014/main" xmlns="" val="20002"/>
+                      <a16:colId xmlns="" xmlns:a16="http://schemas.microsoft.com/office/drawing/2014/main" val="20002"/>
                     </a:ext>
                   </a:extLst>
                 </a:gridCol>
                 <a:gridCol w="995925">
                   <a:extLst>
                     <a:ext uri="{9D8B030D-6E8A-4147-A177-3AD203B41FA5}">
-                      <a16:colId xmlns:a16="http://schemas.microsoft.com/office/drawing/2014/main" xmlns="" val="20003"/>
+                      <a16:colId xmlns="" xmlns:a16="http://schemas.microsoft.com/office/drawing/2014/main" val="20003"/>
                     </a:ext>
                   </a:extLst>
                 </a:gridCol>
                 <a:gridCol w="1354941">
                   <a:extLst>
                     <a:ext uri="{9D8B030D-6E8A-4147-A177-3AD203B41FA5}">
-                      <a16:colId xmlns:a16="http://schemas.microsoft.com/office/drawing/2014/main" xmlns="" val="20004"/>
+                      <a16:colId xmlns="" xmlns:a16="http://schemas.microsoft.com/office/drawing/2014/main" val="20004"/>
                     </a:ext>
                   </a:extLst>
                 </a:gridCol>
                 <a:gridCol w="913938">
                   <a:extLst>
                     <a:ext uri="{9D8B030D-6E8A-4147-A177-3AD203B41FA5}">
-                      <a16:colId xmlns:a16="http://schemas.microsoft.com/office/drawing/2014/main" xmlns="" val="20005"/>
+                      <a16:colId xmlns="" xmlns:a16="http://schemas.microsoft.com/office/drawing/2014/main" val="20005"/>
                     </a:ext>
                   </a:extLst>
                 </a:gridCol>
                 <a:gridCol w="1957328">
                   <a:extLst>
                     <a:ext uri="{9D8B030D-6E8A-4147-A177-3AD203B41FA5}">
-                      <a16:colId xmlns:a16="http://schemas.microsoft.com/office/drawing/2014/main" xmlns="" val="20006"/>
+                      <a16:colId xmlns="" xmlns:a16="http://schemas.microsoft.com/office/drawing/2014/main" val="20006"/>
                     </a:ext>
                   </a:extLst>
                 </a:gridCol>
@@ -30473,7 +30465,7 @@
                 </a:tc>
                 <a:extLst>
                   <a:ext uri="{0D108BD9-81ED-4DB2-BD59-A6C34878D82A}">
-                    <a16:rowId xmlns:a16="http://schemas.microsoft.com/office/drawing/2014/main" xmlns="" val="10000"/>
+                    <a16:rowId xmlns="" xmlns:a16="http://schemas.microsoft.com/office/drawing/2014/main" val="10000"/>
                   </a:ext>
                 </a:extLst>
               </a:tr>
@@ -30695,7 +30687,7 @@
                 </a:tc>
                 <a:extLst>
                   <a:ext uri="{0D108BD9-81ED-4DB2-BD59-A6C34878D82A}">
-                    <a16:rowId xmlns:a16="http://schemas.microsoft.com/office/drawing/2014/main" xmlns="" val="10001"/>
+                    <a16:rowId xmlns="" xmlns:a16="http://schemas.microsoft.com/office/drawing/2014/main" val="10001"/>
                   </a:ext>
                 </a:extLst>
               </a:tr>
@@ -30911,7 +30903,7 @@
                 </a:tc>
                 <a:extLst>
                   <a:ext uri="{0D108BD9-81ED-4DB2-BD59-A6C34878D82A}">
-                    <a16:rowId xmlns:a16="http://schemas.microsoft.com/office/drawing/2014/main" xmlns="" val="10002"/>
+                    <a16:rowId xmlns="" xmlns:a16="http://schemas.microsoft.com/office/drawing/2014/main" val="10002"/>
                   </a:ext>
                 </a:extLst>
               </a:tr>
@@ -30965,7 +30957,7 @@
           <p:cNvPr id="1027" name="圖片 2">
             <a:extLst>
               <a:ext uri="{FF2B5EF4-FFF2-40B4-BE49-F238E27FC236}">
-                <a16:creationId xmlns:a16="http://schemas.microsoft.com/office/drawing/2014/main" xmlns="" id="{DBA02237-3D49-11E7-6503-222A8878FA47}"/>
+                <a16:creationId xmlns="" xmlns:a16="http://schemas.microsoft.com/office/drawing/2014/main" id="{DBA02237-3D49-11E7-6503-222A8878FA47}"/>
               </a:ext>
             </a:extLst>
           </p:cNvPr>
@@ -31012,7 +31004,7 @@
           <p:cNvPr id="1026" name="圖片 3">
             <a:extLst>
               <a:ext uri="{FF2B5EF4-FFF2-40B4-BE49-F238E27FC236}">
-                <a16:creationId xmlns:a16="http://schemas.microsoft.com/office/drawing/2014/main" xmlns="" id="{DC0A7036-94C4-A958-F053-97A77D56C082}"/>
+                <a16:creationId xmlns="" xmlns:a16="http://schemas.microsoft.com/office/drawing/2014/main" id="{DC0A7036-94C4-A958-F053-97A77D56C082}"/>
               </a:ext>
             </a:extLst>
           </p:cNvPr>
@@ -31059,7 +31051,7 @@
           <p:cNvPr id="1025" name="圖片 4">
             <a:extLst>
               <a:ext uri="{FF2B5EF4-FFF2-40B4-BE49-F238E27FC236}">
-                <a16:creationId xmlns:a16="http://schemas.microsoft.com/office/drawing/2014/main" xmlns="" id="{C4F1F6CE-8B31-4CCC-AF72-E96E3DCA2765}"/>
+                <a16:creationId xmlns="" xmlns:a16="http://schemas.microsoft.com/office/drawing/2014/main" id="{C4F1F6CE-8B31-4CCC-AF72-E96E3DCA2765}"/>
               </a:ext>
             </a:extLst>
           </p:cNvPr>
@@ -31317,8 +31309,65 @@
                   <a:srgbClr val="FF0000"/>
                 </a:solidFill>
               </a:rPr>
-              <a:t>ordering = ('-price', )</a:t>
-            </a:r>
+              <a:t>ordering = ('-price', </a:t>
+            </a:r>
+            <a:r>
+              <a:rPr lang="en-US" altLang="zh-TW" dirty="0" smtClean="0">
+                <a:solidFill>
+                  <a:srgbClr val="FF0000"/>
+                </a:solidFill>
+              </a:rPr>
+              <a:t>)</a:t>
+            </a:r>
+          </a:p>
+          <a:p>
+            <a:pPr marL="274320" lvl="1" indent="0">
+              <a:buNone/>
+            </a:pPr>
+            <a:endParaRPr lang="en-US" altLang="zh-TW" dirty="0">
+              <a:solidFill>
+                <a:srgbClr val="FF0000"/>
+              </a:solidFill>
+            </a:endParaRPr>
+          </a:p>
+          <a:p>
+            <a:pPr marL="274320" lvl="1" indent="0">
+              <a:buNone/>
+            </a:pPr>
+            <a:r>
+              <a:rPr lang="en-US" altLang="zh-TW" dirty="0" err="1"/>
+              <a:t>admin.site.register</a:t>
+            </a:r>
+            <a:r>
+              <a:rPr lang="en-US" altLang="zh-TW" dirty="0"/>
+              <a:t>(</a:t>
+            </a:r>
+            <a:r>
+              <a:rPr lang="en-US" altLang="zh-TW" dirty="0" err="1"/>
+              <a:t>models.Product</a:t>
+            </a:r>
+            <a:r>
+              <a:rPr lang="en-US" altLang="zh-TW" dirty="0"/>
+              <a:t>, </a:t>
+            </a:r>
+            <a:r>
+              <a:rPr lang="en-US" altLang="zh-TW" dirty="0" err="1">
+                <a:solidFill>
+                  <a:srgbClr val="FF0000"/>
+                </a:solidFill>
+              </a:rPr>
+              <a:t>ProductAdmin</a:t>
+            </a:r>
+            <a:r>
+              <a:rPr lang="en-US" altLang="zh-TW" dirty="0"/>
+              <a:t>)</a:t>
+            </a:r>
+            <a:endParaRPr lang="zh-TW" altLang="zh-TW" dirty="0"/>
+          </a:p>
+          <a:p>
+            <a:pPr marL="274320" lvl="1" indent="0">
+              <a:buNone/>
+            </a:pPr>
             <a:endParaRPr lang="zh-TW" altLang="zh-TW" dirty="0">
               <a:solidFill>
                 <a:srgbClr val="FF0000"/>
@@ -31443,7 +31492,7 @@
           <p:cNvPr id="6" name="圖片 5">
             <a:extLst>
               <a:ext uri="{FF2B5EF4-FFF2-40B4-BE49-F238E27FC236}">
-                <a16:creationId xmlns:a16="http://schemas.microsoft.com/office/drawing/2014/main" xmlns="" id="{DAD52F9F-4A65-424D-9A5B-1AFE509FF6C4}"/>
+                <a16:creationId xmlns="" xmlns:a16="http://schemas.microsoft.com/office/drawing/2014/main" id="{DAD52F9F-4A65-424D-9A5B-1AFE509FF6C4}"/>
               </a:ext>
             </a:extLst>
           </p:cNvPr>
@@ -31473,7 +31522,7 @@
           <p:cNvPr id="5" name="矩形 4">
             <a:extLst>
               <a:ext uri="{FF2B5EF4-FFF2-40B4-BE49-F238E27FC236}">
-                <a16:creationId xmlns:a16="http://schemas.microsoft.com/office/drawing/2014/main" xmlns="" id="{B86AB853-D4FB-8A89-18E8-4EC78EF016E5}"/>
+                <a16:creationId xmlns="" xmlns:a16="http://schemas.microsoft.com/office/drawing/2014/main" id="{B86AB853-D4FB-8A89-18E8-4EC78EF016E5}"/>
               </a:ext>
             </a:extLst>
           </p:cNvPr>
@@ -31523,7 +31572,7 @@
           <p:cNvPr id="7" name="矩形 6">
             <a:extLst>
               <a:ext uri="{FF2B5EF4-FFF2-40B4-BE49-F238E27FC236}">
-                <a16:creationId xmlns:a16="http://schemas.microsoft.com/office/drawing/2014/main" xmlns="" id="{FE3F41DA-CF78-69FC-A6CE-68E02F97A870}"/>
+                <a16:creationId xmlns="" xmlns:a16="http://schemas.microsoft.com/office/drawing/2014/main" id="{FE3F41DA-CF78-69FC-A6CE-68E02F97A870}"/>
               </a:ext>
             </a:extLst>
           </p:cNvPr>
@@ -32127,7 +32176,7 @@
           <p:cNvPr id="6" name="圖片 5">
             <a:extLst>
               <a:ext uri="{FF2B5EF4-FFF2-40B4-BE49-F238E27FC236}">
-                <a16:creationId xmlns:a16="http://schemas.microsoft.com/office/drawing/2014/main" xmlns="" id="{6F4E2B52-7A8D-C188-E5D8-A7F5F2DF12A0}"/>
+                <a16:creationId xmlns="" xmlns:a16="http://schemas.microsoft.com/office/drawing/2014/main" id="{6F4E2B52-7A8D-C188-E5D8-A7F5F2DF12A0}"/>
               </a:ext>
             </a:extLst>
           </p:cNvPr>
@@ -32157,7 +32206,7 @@
           <p:cNvPr id="8" name="矩形 7">
             <a:extLst>
               <a:ext uri="{FF2B5EF4-FFF2-40B4-BE49-F238E27FC236}">
-                <a16:creationId xmlns:a16="http://schemas.microsoft.com/office/drawing/2014/main" xmlns="" id="{37724FD5-B4E4-C8B2-1A46-0ABFE5548A08}"/>
+                <a16:creationId xmlns="" xmlns:a16="http://schemas.microsoft.com/office/drawing/2014/main" id="{37724FD5-B4E4-C8B2-1A46-0ABFE5548A08}"/>
               </a:ext>
             </a:extLst>
           </p:cNvPr>
@@ -32382,7 +32431,7 @@
         <p:cNvPr id="1" name="">
           <a:extLst>
             <a:ext uri="{FF2B5EF4-FFF2-40B4-BE49-F238E27FC236}">
-              <a16:creationId xmlns:a16="http://schemas.microsoft.com/office/drawing/2014/main" xmlns="" id="{5C878DD2-1051-94D0-1520-B012A14B974A}"/>
+              <a16:creationId xmlns="" xmlns:a16="http://schemas.microsoft.com/office/drawing/2014/main" id="{5C878DD2-1051-94D0-1520-B012A14B974A}"/>
             </a:ext>
           </a:extLst>
         </p:cNvPr>
@@ -32402,7 +32451,7 @@
           <p:cNvPr id="2" name="標題 1">
             <a:extLst>
               <a:ext uri="{FF2B5EF4-FFF2-40B4-BE49-F238E27FC236}">
-                <a16:creationId xmlns:a16="http://schemas.microsoft.com/office/drawing/2014/main" xmlns="" id="{8EC1744A-EB19-B3EA-9480-0683B537AE51}"/>
+                <a16:creationId xmlns="" xmlns:a16="http://schemas.microsoft.com/office/drawing/2014/main" id="{8EC1744A-EB19-B3EA-9480-0683B537AE51}"/>
               </a:ext>
             </a:extLst>
           </p:cNvPr>
@@ -32447,7 +32496,7 @@
           <p:cNvPr id="3" name="投影片編號版面配置區 2">
             <a:extLst>
               <a:ext uri="{FF2B5EF4-FFF2-40B4-BE49-F238E27FC236}">
-                <a16:creationId xmlns:a16="http://schemas.microsoft.com/office/drawing/2014/main" xmlns="" id="{1A0384DA-8146-4E85-F200-349E29E15EAF}"/>
+                <a16:creationId xmlns="" xmlns:a16="http://schemas.microsoft.com/office/drawing/2014/main" id="{1A0384DA-8146-4E85-F200-349E29E15EAF}"/>
               </a:ext>
             </a:extLst>
           </p:cNvPr>
@@ -32477,7 +32526,7 @@
           <p:cNvPr id="4" name="內容版面配置區 3">
             <a:extLst>
               <a:ext uri="{FF2B5EF4-FFF2-40B4-BE49-F238E27FC236}">
-                <a16:creationId xmlns:a16="http://schemas.microsoft.com/office/drawing/2014/main" xmlns="" id="{525E266E-C094-C63C-CBCD-B7EC86140C48}"/>
+                <a16:creationId xmlns="" xmlns:a16="http://schemas.microsoft.com/office/drawing/2014/main" id="{525E266E-C094-C63C-CBCD-B7EC86140C48}"/>
               </a:ext>
             </a:extLst>
           </p:cNvPr>
@@ -32506,7 +32555,7 @@
           <p:cNvPr id="6" name="圖片 5">
             <a:extLst>
               <a:ext uri="{FF2B5EF4-FFF2-40B4-BE49-F238E27FC236}">
-                <a16:creationId xmlns:a16="http://schemas.microsoft.com/office/drawing/2014/main" xmlns="" id="{505E569D-9516-6D26-0ECF-A4A6091FCC50}"/>
+                <a16:creationId xmlns="" xmlns:a16="http://schemas.microsoft.com/office/drawing/2014/main" id="{505E569D-9516-6D26-0ECF-A4A6091FCC50}"/>
               </a:ext>
             </a:extLst>
           </p:cNvPr>
@@ -32536,7 +32585,7 @@
           <p:cNvPr id="7" name="矩形 6">
             <a:extLst>
               <a:ext uri="{FF2B5EF4-FFF2-40B4-BE49-F238E27FC236}">
-                <a16:creationId xmlns:a16="http://schemas.microsoft.com/office/drawing/2014/main" xmlns="" id="{4B6FA882-9922-F811-BAEF-BEE07FF978ED}"/>
+                <a16:creationId xmlns="" xmlns:a16="http://schemas.microsoft.com/office/drawing/2014/main" id="{4B6FA882-9922-F811-BAEF-BEE07FF978ED}"/>
               </a:ext>
             </a:extLst>
           </p:cNvPr>
@@ -32767,11 +32816,11 @@
   <p:clrMapOvr>
     <a:masterClrMapping/>
   </p:clrMapOvr>
-  <mc:AlternateContent xmlns:mc="http://schemas.openxmlformats.org/markup-compatibility/2006">
-    <mc:Choice xmlns:p14="http://schemas.microsoft.com/office/powerpoint/2010/main" Requires="p14">
+  <mc:AlternateContent xmlns:mc="http://schemas.openxmlformats.org/markup-compatibility/2006" xmlns:p14="http://schemas.microsoft.com/office/powerpoint/2010/main">
+    <mc:Choice Requires="p14">
       <p:transition spd="slow" p14:dur="2000"/>
     </mc:Choice>
-    <mc:Fallback>
+    <mc:Fallback xmlns="">
       <p:transition spd="slow"/>
     </mc:Fallback>
   </mc:AlternateContent>
@@ -33064,11 +33113,11 @@
   <p:clrMapOvr>
     <a:masterClrMapping/>
   </p:clrMapOvr>
-  <mc:AlternateContent xmlns:mc="http://schemas.openxmlformats.org/markup-compatibility/2006">
-    <mc:Choice xmlns:p14="http://schemas.microsoft.com/office/powerpoint/2010/main" Requires="p14">
+  <mc:AlternateContent xmlns:mc="http://schemas.openxmlformats.org/markup-compatibility/2006" xmlns:p14="http://schemas.microsoft.com/office/powerpoint/2010/main">
+    <mc:Choice Requires="p14">
       <p:transition spd="slow" p14:dur="2000"/>
     </mc:Choice>
-    <mc:Fallback>
+    <mc:Fallback xmlns="">
       <p:transition spd="slow"/>
     </mc:Fallback>
   </mc:AlternateContent>
@@ -33292,11 +33341,11 @@
   <p:clrMapOvr>
     <a:masterClrMapping/>
   </p:clrMapOvr>
-  <mc:AlternateContent xmlns:mc="http://schemas.openxmlformats.org/markup-compatibility/2006">
-    <mc:Choice xmlns:p14="http://schemas.microsoft.com/office/powerpoint/2010/main" Requires="p14">
+  <mc:AlternateContent xmlns:mc="http://schemas.openxmlformats.org/markup-compatibility/2006" xmlns:p14="http://schemas.microsoft.com/office/powerpoint/2010/main">
+    <mc:Choice Requires="p14">
       <p:transition spd="slow" p14:dur="2000"/>
     </mc:Choice>
-    <mc:Fallback>
+    <mc:Fallback xmlns="">
       <p:transition spd="slow"/>
     </mc:Fallback>
   </mc:AlternateContent>
@@ -33635,11 +33684,11 @@
   <p:clrMapOvr>
     <a:masterClrMapping/>
   </p:clrMapOvr>
-  <mc:AlternateContent xmlns:mc="http://schemas.openxmlformats.org/markup-compatibility/2006">
-    <mc:Choice xmlns:p14="http://schemas.microsoft.com/office/powerpoint/2010/main" Requires="p14">
+  <mc:AlternateContent xmlns:mc="http://schemas.openxmlformats.org/markup-compatibility/2006" xmlns:p14="http://schemas.microsoft.com/office/powerpoint/2010/main">
+    <mc:Choice Requires="p14">
       <p:transition spd="slow" p14:dur="2000"/>
     </mc:Choice>
-    <mc:Fallback>
+    <mc:Fallback xmlns="">
       <p:transition spd="slow"/>
     </mc:Fallback>
   </mc:AlternateContent>
@@ -33739,49 +33788,49 @@
                 <a:gridCol w="1554335">
                   <a:extLst>
                     <a:ext uri="{9D8B030D-6E8A-4147-A177-3AD203B41FA5}">
-                      <a16:colId xmlns:a16="http://schemas.microsoft.com/office/drawing/2014/main" xmlns="" val="20000"/>
+                      <a16:colId xmlns="" xmlns:a16="http://schemas.microsoft.com/office/drawing/2014/main" val="20000"/>
                     </a:ext>
                   </a:extLst>
                 </a:gridCol>
                 <a:gridCol w="823087">
                   <a:extLst>
                     <a:ext uri="{9D8B030D-6E8A-4147-A177-3AD203B41FA5}">
-                      <a16:colId xmlns:a16="http://schemas.microsoft.com/office/drawing/2014/main" xmlns="" val="20001"/>
+                      <a16:colId xmlns="" xmlns:a16="http://schemas.microsoft.com/office/drawing/2014/main" val="20001"/>
                     </a:ext>
                   </a:extLst>
                 </a:gridCol>
                 <a:gridCol w="947850">
                   <a:extLst>
                     <a:ext uri="{9D8B030D-6E8A-4147-A177-3AD203B41FA5}">
-                      <a16:colId xmlns:a16="http://schemas.microsoft.com/office/drawing/2014/main" xmlns="" val="20002"/>
+                      <a16:colId xmlns="" xmlns:a16="http://schemas.microsoft.com/office/drawing/2014/main" val="20002"/>
                     </a:ext>
                   </a:extLst>
                 </a:gridCol>
                 <a:gridCol w="999834">
                   <a:extLst>
                     <a:ext uri="{9D8B030D-6E8A-4147-A177-3AD203B41FA5}">
-                      <a16:colId xmlns:a16="http://schemas.microsoft.com/office/drawing/2014/main" xmlns="" val="20003"/>
+                      <a16:colId xmlns="" xmlns:a16="http://schemas.microsoft.com/office/drawing/2014/main" val="20003"/>
                     </a:ext>
                   </a:extLst>
                 </a:gridCol>
                 <a:gridCol w="1360260">
                   <a:extLst>
                     <a:ext uri="{9D8B030D-6E8A-4147-A177-3AD203B41FA5}">
-                      <a16:colId xmlns:a16="http://schemas.microsoft.com/office/drawing/2014/main" xmlns="" val="20004"/>
+                      <a16:colId xmlns="" xmlns:a16="http://schemas.microsoft.com/office/drawing/2014/main" val="20004"/>
                     </a:ext>
                   </a:extLst>
                 </a:gridCol>
                 <a:gridCol w="917526">
                   <a:extLst>
                     <a:ext uri="{9D8B030D-6E8A-4147-A177-3AD203B41FA5}">
-                      <a16:colId xmlns:a16="http://schemas.microsoft.com/office/drawing/2014/main" xmlns="" val="20005"/>
+                      <a16:colId xmlns="" xmlns:a16="http://schemas.microsoft.com/office/drawing/2014/main" val="20005"/>
                     </a:ext>
                   </a:extLst>
                 </a:gridCol>
                 <a:gridCol w="1965012">
                   <a:extLst>
                     <a:ext uri="{9D8B030D-6E8A-4147-A177-3AD203B41FA5}">
-                      <a16:colId xmlns:a16="http://schemas.microsoft.com/office/drawing/2014/main" xmlns="" val="20006"/>
+                      <a16:colId xmlns="" xmlns:a16="http://schemas.microsoft.com/office/drawing/2014/main" val="20006"/>
                     </a:ext>
                   </a:extLst>
                 </a:gridCol>
@@ -34082,7 +34131,7 @@
                 </a:tc>
                 <a:extLst>
                   <a:ext uri="{0D108BD9-81ED-4DB2-BD59-A6C34878D82A}">
-                    <a16:rowId xmlns:a16="http://schemas.microsoft.com/office/drawing/2014/main" xmlns="" val="10000"/>
+                    <a16:rowId xmlns="" xmlns:a16="http://schemas.microsoft.com/office/drawing/2014/main" val="10000"/>
                   </a:ext>
                 </a:extLst>
               </a:tr>
@@ -34304,7 +34353,7 @@
                 </a:tc>
                 <a:extLst>
                   <a:ext uri="{0D108BD9-81ED-4DB2-BD59-A6C34878D82A}">
-                    <a16:rowId xmlns:a16="http://schemas.microsoft.com/office/drawing/2014/main" xmlns="" val="10001"/>
+                    <a16:rowId xmlns="" xmlns:a16="http://schemas.microsoft.com/office/drawing/2014/main" val="10001"/>
                   </a:ext>
                 </a:extLst>
               </a:tr>
@@ -34614,11 +34663,11 @@
   <p:clrMapOvr>
     <a:masterClrMapping/>
   </p:clrMapOvr>
-  <mc:AlternateContent xmlns:mc="http://schemas.openxmlformats.org/markup-compatibility/2006">
-    <mc:Choice xmlns:p14="http://schemas.microsoft.com/office/powerpoint/2010/main" Requires="p14">
+  <mc:AlternateContent xmlns:mc="http://schemas.openxmlformats.org/markup-compatibility/2006" xmlns:p14="http://schemas.microsoft.com/office/powerpoint/2010/main">
+    <mc:Choice Requires="p14">
       <p:transition spd="slow" p14:dur="2000"/>
     </mc:Choice>
-    <mc:Fallback>
+    <mc:Fallback xmlns="">
       <p:transition spd="slow"/>
     </mc:Fallback>
   </mc:AlternateContent>
@@ -34777,7 +34826,7 @@
           <p:cNvPr id="6" name="圖片 5">
             <a:extLst>
               <a:ext uri="{FF2B5EF4-FFF2-40B4-BE49-F238E27FC236}">
-                <a16:creationId xmlns:a16="http://schemas.microsoft.com/office/drawing/2014/main" xmlns="" id="{68BA4531-7FFC-F303-F0C3-CB4D209C4660}"/>
+                <a16:creationId xmlns="" xmlns:a16="http://schemas.microsoft.com/office/drawing/2014/main" id="{68BA4531-7FFC-F303-F0C3-CB4D209C4660}"/>
               </a:ext>
             </a:extLst>
           </p:cNvPr>
@@ -34812,11 +34861,11 @@
   <p:clrMapOvr>
     <a:masterClrMapping/>
   </p:clrMapOvr>
-  <mc:AlternateContent xmlns:mc="http://schemas.openxmlformats.org/markup-compatibility/2006">
-    <mc:Choice xmlns:p14="http://schemas.microsoft.com/office/powerpoint/2010/main" Requires="p14">
+  <mc:AlternateContent xmlns:mc="http://schemas.openxmlformats.org/markup-compatibility/2006" xmlns:p14="http://schemas.microsoft.com/office/powerpoint/2010/main">
+    <mc:Choice Requires="p14">
       <p:transition spd="slow" p14:dur="2000"/>
     </mc:Choice>
-    <mc:Fallback>
+    <mc:Fallback xmlns="">
       <p:transition spd="slow"/>
     </mc:Fallback>
   </mc:AlternateContent>
@@ -34937,7 +34986,7 @@
           <p:cNvPr id="6" name="圖片 5" descr="一張含有 文字 的圖片&#10;&#10;自動產生的描述">
             <a:extLst>
               <a:ext uri="{FF2B5EF4-FFF2-40B4-BE49-F238E27FC236}">
-                <a16:creationId xmlns:a16="http://schemas.microsoft.com/office/drawing/2014/main" xmlns="" id="{E1CE4656-8FBC-21AE-B61A-22AD580B9D53}"/>
+                <a16:creationId xmlns="" xmlns:a16="http://schemas.microsoft.com/office/drawing/2014/main" id="{E1CE4656-8FBC-21AE-B61A-22AD580B9D53}"/>
               </a:ext>
             </a:extLst>
           </p:cNvPr>
@@ -34972,11 +35021,11 @@
   <p:clrMapOvr>
     <a:masterClrMapping/>
   </p:clrMapOvr>
-  <mc:AlternateContent xmlns:mc="http://schemas.openxmlformats.org/markup-compatibility/2006">
-    <mc:Choice xmlns:p14="http://schemas.microsoft.com/office/powerpoint/2010/main" Requires="p14">
+  <mc:AlternateContent xmlns:mc="http://schemas.openxmlformats.org/markup-compatibility/2006" xmlns:p14="http://schemas.microsoft.com/office/powerpoint/2010/main">
+    <mc:Choice Requires="p14">
       <p:transition spd="slow" p14:dur="2000"/>
     </mc:Choice>
-    <mc:Fallback>
+    <mc:Fallback xmlns="">
       <p:transition spd="slow"/>
     </mc:Fallback>
   </mc:AlternateContent>
@@ -35089,7 +35138,7 @@
           <p:cNvPr id="6" name="圖片 5">
             <a:extLst>
               <a:ext uri="{FF2B5EF4-FFF2-40B4-BE49-F238E27FC236}">
-                <a16:creationId xmlns:a16="http://schemas.microsoft.com/office/drawing/2014/main" xmlns="" id="{C1035EDA-DED9-D12B-21F8-13F6EAA1F135}"/>
+                <a16:creationId xmlns="" xmlns:a16="http://schemas.microsoft.com/office/drawing/2014/main" id="{C1035EDA-DED9-D12B-21F8-13F6EAA1F135}"/>
               </a:ext>
             </a:extLst>
           </p:cNvPr>
@@ -35124,11 +35173,11 @@
   <p:clrMapOvr>
     <a:masterClrMapping/>
   </p:clrMapOvr>
-  <mc:AlternateContent xmlns:mc="http://schemas.openxmlformats.org/markup-compatibility/2006">
-    <mc:Choice xmlns:p14="http://schemas.microsoft.com/office/powerpoint/2010/main" Requires="p14">
+  <mc:AlternateContent xmlns:mc="http://schemas.openxmlformats.org/markup-compatibility/2006" xmlns:p14="http://schemas.microsoft.com/office/powerpoint/2010/main">
+    <mc:Choice Requires="p14">
       <p:transition spd="slow" p14:dur="2000"/>
     </mc:Choice>
-    <mc:Fallback>
+    <mc:Fallback xmlns="">
       <p:transition spd="slow"/>
     </mc:Fallback>
   </mc:AlternateContent>
@@ -35245,7 +35294,7 @@
           <p:cNvPr id="6" name="圖片 5" descr="一張含有 文字 的圖片&#10;&#10;自動產生的描述">
             <a:extLst>
               <a:ext uri="{FF2B5EF4-FFF2-40B4-BE49-F238E27FC236}">
-                <a16:creationId xmlns:a16="http://schemas.microsoft.com/office/drawing/2014/main" xmlns="" id="{9444F309-55B5-4723-7ABF-7AA1E734A0B6}"/>
+                <a16:creationId xmlns="" xmlns:a16="http://schemas.microsoft.com/office/drawing/2014/main" id="{9444F309-55B5-4723-7ABF-7AA1E734A0B6}"/>
               </a:ext>
             </a:extLst>
           </p:cNvPr>
@@ -35280,11 +35329,11 @@
   <p:clrMapOvr>
     <a:masterClrMapping/>
   </p:clrMapOvr>
-  <mc:AlternateContent xmlns:mc="http://schemas.openxmlformats.org/markup-compatibility/2006">
-    <mc:Choice xmlns:p14="http://schemas.microsoft.com/office/powerpoint/2010/main" Requires="p14">
+  <mc:AlternateContent xmlns:mc="http://schemas.openxmlformats.org/markup-compatibility/2006" xmlns:p14="http://schemas.microsoft.com/office/powerpoint/2010/main">
+    <mc:Choice Requires="p14">
       <p:transition spd="slow" p14:dur="2000"/>
     </mc:Choice>
-    <mc:Fallback>
+    <mc:Fallback xmlns="">
       <p:transition spd="slow"/>
     </mc:Fallback>
   </mc:AlternateContent>
@@ -35426,7 +35475,7 @@
           <p:cNvPr id="6" name="圖片 5" descr="一張含有 文字 的圖片&#10;&#10;自動產生的描述">
             <a:extLst>
               <a:ext uri="{FF2B5EF4-FFF2-40B4-BE49-F238E27FC236}">
-                <a16:creationId xmlns:a16="http://schemas.microsoft.com/office/drawing/2014/main" xmlns="" id="{FD17E760-DADE-CA07-96FF-08C7FE3E5F7E}"/>
+                <a16:creationId xmlns="" xmlns:a16="http://schemas.microsoft.com/office/drawing/2014/main" id="{FD17E760-DADE-CA07-96FF-08C7FE3E5F7E}"/>
               </a:ext>
             </a:extLst>
           </p:cNvPr>
@@ -35456,7 +35505,7 @@
           <p:cNvPr id="7" name="圖片 6" descr="一張含有 文字 的圖片&#10;&#10;自動產生的描述">
             <a:extLst>
               <a:ext uri="{FF2B5EF4-FFF2-40B4-BE49-F238E27FC236}">
-                <a16:creationId xmlns:a16="http://schemas.microsoft.com/office/drawing/2014/main" xmlns="" id="{83BDCF3F-F936-8A62-0CF4-2B3EE14E5E5C}"/>
+                <a16:creationId xmlns="" xmlns:a16="http://schemas.microsoft.com/office/drawing/2014/main" id="{83BDCF3F-F936-8A62-0CF4-2B3EE14E5E5C}"/>
               </a:ext>
             </a:extLst>
           </p:cNvPr>
@@ -35491,11 +35540,11 @@
   <p:clrMapOvr>
     <a:masterClrMapping/>
   </p:clrMapOvr>
-  <mc:AlternateContent xmlns:mc="http://schemas.openxmlformats.org/markup-compatibility/2006">
-    <mc:Choice xmlns:p14="http://schemas.microsoft.com/office/powerpoint/2010/main" Requires="p14">
+  <mc:AlternateContent xmlns:mc="http://schemas.openxmlformats.org/markup-compatibility/2006" xmlns:p14="http://schemas.microsoft.com/office/powerpoint/2010/main">
+    <mc:Choice Requires="p14">
       <p:transition spd="slow" p14:dur="2000"/>
     </mc:Choice>
-    <mc:Fallback>
+    <mc:Fallback xmlns="">
       <p:transition spd="slow"/>
     </mc:Fallback>
   </mc:AlternateContent>
@@ -36128,7 +36177,7 @@
           <p:cNvPr id="6" name="圖片 5" descr="一張含有 桌 的圖片&#10;&#10;自動產生的描述">
             <a:extLst>
               <a:ext uri="{FF2B5EF4-FFF2-40B4-BE49-F238E27FC236}">
-                <a16:creationId xmlns:a16="http://schemas.microsoft.com/office/drawing/2014/main" xmlns="" id="{2E87A1E7-E953-ABB8-090B-1FA6B95A444E}"/>
+                <a16:creationId xmlns="" xmlns:a16="http://schemas.microsoft.com/office/drawing/2014/main" id="{2E87A1E7-E953-ABB8-090B-1FA6B95A444E}"/>
               </a:ext>
             </a:extLst>
           </p:cNvPr>
@@ -36163,11 +36212,11 @@
   <p:clrMapOvr>
     <a:masterClrMapping/>
   </p:clrMapOvr>
-  <mc:AlternateContent xmlns:mc="http://schemas.openxmlformats.org/markup-compatibility/2006">
-    <mc:Choice xmlns:p14="http://schemas.microsoft.com/office/powerpoint/2010/main" Requires="p14">
+  <mc:AlternateContent xmlns:mc="http://schemas.openxmlformats.org/markup-compatibility/2006" xmlns:p14="http://schemas.microsoft.com/office/powerpoint/2010/main">
+    <mc:Choice Requires="p14">
       <p:transition spd="slow" p14:dur="2000"/>
     </mc:Choice>
-    <mc:Fallback>
+    <mc:Fallback xmlns="">
       <p:transition spd="slow"/>
     </mc:Fallback>
   </mc:AlternateContent>
@@ -36196,7 +36245,7 @@
           <p:cNvPr id="2" name="標題 1">
             <a:extLst>
               <a:ext uri="{FF2B5EF4-FFF2-40B4-BE49-F238E27FC236}">
-                <a16:creationId xmlns:a16="http://schemas.microsoft.com/office/drawing/2014/main" xmlns="" id="{251CA8F7-1061-6AC2-BEB4-BBDB9C8718AE}"/>
+                <a16:creationId xmlns="" xmlns:a16="http://schemas.microsoft.com/office/drawing/2014/main" id="{251CA8F7-1061-6AC2-BEB4-BBDB9C8718AE}"/>
               </a:ext>
             </a:extLst>
           </p:cNvPr>
@@ -36232,7 +36281,7 @@
           <p:cNvPr id="3" name="投影片編號版面配置區 2">
             <a:extLst>
               <a:ext uri="{FF2B5EF4-FFF2-40B4-BE49-F238E27FC236}">
-                <a16:creationId xmlns:a16="http://schemas.microsoft.com/office/drawing/2014/main" xmlns="" id="{B7031A96-CF5D-EC36-B616-B8D6EF162020}"/>
+                <a16:creationId xmlns="" xmlns:a16="http://schemas.microsoft.com/office/drawing/2014/main" id="{B7031A96-CF5D-EC36-B616-B8D6EF162020}"/>
               </a:ext>
             </a:extLst>
           </p:cNvPr>
@@ -36262,7 +36311,7 @@
           <p:cNvPr id="5" name="內容版面配置區 4">
             <a:extLst>
               <a:ext uri="{FF2B5EF4-FFF2-40B4-BE49-F238E27FC236}">
-                <a16:creationId xmlns:a16="http://schemas.microsoft.com/office/drawing/2014/main" xmlns="" id="{C688FCEC-F4EE-5F07-291F-51C8D82F2718}"/>
+                <a16:creationId xmlns="" xmlns:a16="http://schemas.microsoft.com/office/drawing/2014/main" id="{C688FCEC-F4EE-5F07-291F-51C8D82F2718}"/>
               </a:ext>
             </a:extLst>
           </p:cNvPr>
@@ -36300,7 +36349,7 @@
           <p:cNvPr id="6" name="圖片 5">
             <a:extLst>
               <a:ext uri="{FF2B5EF4-FFF2-40B4-BE49-F238E27FC236}">
-                <a16:creationId xmlns:a16="http://schemas.microsoft.com/office/drawing/2014/main" xmlns="" id="{A50A1F3C-3473-89D3-23FD-A08030EA6174}"/>
+                <a16:creationId xmlns="" xmlns:a16="http://schemas.microsoft.com/office/drawing/2014/main" id="{A50A1F3C-3473-89D3-23FD-A08030EA6174}"/>
               </a:ext>
             </a:extLst>
           </p:cNvPr>
@@ -36341,11 +36390,11 @@
   <p:clrMapOvr>
     <a:masterClrMapping/>
   </p:clrMapOvr>
-  <mc:AlternateContent xmlns:mc="http://schemas.openxmlformats.org/markup-compatibility/2006">
-    <mc:Choice xmlns:p14="http://schemas.microsoft.com/office/powerpoint/2010/main" Requires="p14">
+  <mc:AlternateContent xmlns:mc="http://schemas.openxmlformats.org/markup-compatibility/2006" xmlns:p14="http://schemas.microsoft.com/office/powerpoint/2010/main">
+    <mc:Choice Requires="p14">
       <p:transition spd="slow" p14:dur="2000"/>
     </mc:Choice>
-    <mc:Fallback>
+    <mc:Fallback xmlns="">
       <p:transition spd="slow"/>
     </mc:Fallback>
   </mc:AlternateContent>
@@ -36445,49 +36494,49 @@
                 <a:gridCol w="1593715">
                   <a:extLst>
                     <a:ext uri="{9D8B030D-6E8A-4147-A177-3AD203B41FA5}">
-                      <a16:colId xmlns:a16="http://schemas.microsoft.com/office/drawing/2014/main" xmlns="" val="20000"/>
+                      <a16:colId xmlns="" xmlns:a16="http://schemas.microsoft.com/office/drawing/2014/main" val="20000"/>
                     </a:ext>
                   </a:extLst>
                 </a:gridCol>
                 <a:gridCol w="843940">
                   <a:extLst>
                     <a:ext uri="{9D8B030D-6E8A-4147-A177-3AD203B41FA5}">
-                      <a16:colId xmlns:a16="http://schemas.microsoft.com/office/drawing/2014/main" xmlns="" val="20001"/>
+                      <a16:colId xmlns="" xmlns:a16="http://schemas.microsoft.com/office/drawing/2014/main" val="20001"/>
                     </a:ext>
                   </a:extLst>
                 </a:gridCol>
                 <a:gridCol w="971864">
                   <a:extLst>
                     <a:ext uri="{9D8B030D-6E8A-4147-A177-3AD203B41FA5}">
-                      <a16:colId xmlns:a16="http://schemas.microsoft.com/office/drawing/2014/main" xmlns="" val="20002"/>
+                      <a16:colId xmlns="" xmlns:a16="http://schemas.microsoft.com/office/drawing/2014/main" val="20002"/>
                     </a:ext>
                   </a:extLst>
                 </a:gridCol>
                 <a:gridCol w="1025166">
                   <a:extLst>
                     <a:ext uri="{9D8B030D-6E8A-4147-A177-3AD203B41FA5}">
-                      <a16:colId xmlns:a16="http://schemas.microsoft.com/office/drawing/2014/main" xmlns="" val="20003"/>
+                      <a16:colId xmlns="" xmlns:a16="http://schemas.microsoft.com/office/drawing/2014/main" val="20003"/>
                     </a:ext>
                   </a:extLst>
                 </a:gridCol>
                 <a:gridCol w="1394723">
                   <a:extLst>
                     <a:ext uri="{9D8B030D-6E8A-4147-A177-3AD203B41FA5}">
-                      <a16:colId xmlns:a16="http://schemas.microsoft.com/office/drawing/2014/main" xmlns="" val="20004"/>
+                      <a16:colId xmlns="" xmlns:a16="http://schemas.microsoft.com/office/drawing/2014/main" val="20004"/>
                     </a:ext>
                   </a:extLst>
                 </a:gridCol>
                 <a:gridCol w="940772">
                   <a:extLst>
                     <a:ext uri="{9D8B030D-6E8A-4147-A177-3AD203B41FA5}">
-                      <a16:colId xmlns:a16="http://schemas.microsoft.com/office/drawing/2014/main" xmlns="" val="20005"/>
+                      <a16:colId xmlns="" xmlns:a16="http://schemas.microsoft.com/office/drawing/2014/main" val="20005"/>
                     </a:ext>
                   </a:extLst>
                 </a:gridCol>
                 <a:gridCol w="2014797">
                   <a:extLst>
                     <a:ext uri="{9D8B030D-6E8A-4147-A177-3AD203B41FA5}">
-                      <a16:colId xmlns:a16="http://schemas.microsoft.com/office/drawing/2014/main" xmlns="" val="20006"/>
+                      <a16:colId xmlns="" xmlns:a16="http://schemas.microsoft.com/office/drawing/2014/main" val="20006"/>
                     </a:ext>
                   </a:extLst>
                 </a:gridCol>
@@ -36809,7 +36858,7 @@
                 </a:tc>
                 <a:extLst>
                   <a:ext uri="{0D108BD9-81ED-4DB2-BD59-A6C34878D82A}">
-                    <a16:rowId xmlns:a16="http://schemas.microsoft.com/office/drawing/2014/main" xmlns="" val="10000"/>
+                    <a16:rowId xmlns="" xmlns:a16="http://schemas.microsoft.com/office/drawing/2014/main" val="10000"/>
                   </a:ext>
                 </a:extLst>
               </a:tr>
@@ -37019,7 +37068,7 @@
                 </a:tc>
                 <a:extLst>
                   <a:ext uri="{0D108BD9-81ED-4DB2-BD59-A6C34878D82A}">
-                    <a16:rowId xmlns:a16="http://schemas.microsoft.com/office/drawing/2014/main" xmlns="" val="10001"/>
+                    <a16:rowId xmlns="" xmlns:a16="http://schemas.microsoft.com/office/drawing/2014/main" val="10001"/>
                   </a:ext>
                 </a:extLst>
               </a:tr>
@@ -37110,7 +37159,7 @@
           <p:cNvPr id="2" name="標題 1">
             <a:extLst>
               <a:ext uri="{FF2B5EF4-FFF2-40B4-BE49-F238E27FC236}">
-                <a16:creationId xmlns:a16="http://schemas.microsoft.com/office/drawing/2014/main" xmlns="" id="{686E4A1B-D137-C3A9-99AE-7DEC3B36D3EB}"/>
+                <a16:creationId xmlns="" xmlns:a16="http://schemas.microsoft.com/office/drawing/2014/main" id="{686E4A1B-D137-C3A9-99AE-7DEC3B36D3EB}"/>
               </a:ext>
             </a:extLst>
           </p:cNvPr>
@@ -37142,7 +37191,7 @@
           <p:cNvPr id="3" name="投影片編號版面配置區 2">
             <a:extLst>
               <a:ext uri="{FF2B5EF4-FFF2-40B4-BE49-F238E27FC236}">
-                <a16:creationId xmlns:a16="http://schemas.microsoft.com/office/drawing/2014/main" xmlns="" id="{218AF755-12E0-3EEC-7EB6-250B6117CE38}"/>
+                <a16:creationId xmlns="" xmlns:a16="http://schemas.microsoft.com/office/drawing/2014/main" id="{218AF755-12E0-3EEC-7EB6-250B6117CE38}"/>
               </a:ext>
             </a:extLst>
           </p:cNvPr>
@@ -37172,7 +37221,7 @@
           <p:cNvPr id="5" name="內容版面配置區 4">
             <a:extLst>
               <a:ext uri="{FF2B5EF4-FFF2-40B4-BE49-F238E27FC236}">
-                <a16:creationId xmlns:a16="http://schemas.microsoft.com/office/drawing/2014/main" xmlns="" id="{1B717794-2B2A-8EA0-612D-C01667D5E5EC}"/>
+                <a16:creationId xmlns="" xmlns:a16="http://schemas.microsoft.com/office/drawing/2014/main" id="{1B717794-2B2A-8EA0-612D-C01667D5E5EC}"/>
               </a:ext>
             </a:extLst>
           </p:cNvPr>
@@ -37210,7 +37259,7 @@
           <p:cNvPr id="6" name="圖片 5">
             <a:extLst>
               <a:ext uri="{FF2B5EF4-FFF2-40B4-BE49-F238E27FC236}">
-                <a16:creationId xmlns:a16="http://schemas.microsoft.com/office/drawing/2014/main" xmlns="" id="{E34F1170-35E6-8C36-43EA-7477DC2B3984}"/>
+                <a16:creationId xmlns="" xmlns:a16="http://schemas.microsoft.com/office/drawing/2014/main" id="{E34F1170-35E6-8C36-43EA-7477DC2B3984}"/>
               </a:ext>
             </a:extLst>
           </p:cNvPr>
@@ -37251,11 +37300,11 @@
   <p:clrMapOvr>
     <a:masterClrMapping/>
   </p:clrMapOvr>
-  <mc:AlternateContent xmlns:mc="http://schemas.openxmlformats.org/markup-compatibility/2006">
-    <mc:Choice xmlns:p14="http://schemas.microsoft.com/office/powerpoint/2010/main" Requires="p14">
+  <mc:AlternateContent xmlns:mc="http://schemas.openxmlformats.org/markup-compatibility/2006" xmlns:p14="http://schemas.microsoft.com/office/powerpoint/2010/main">
+    <mc:Choice Requires="p14">
       <p:transition spd="slow" p14:dur="2000"/>
     </mc:Choice>
-    <mc:Fallback>
+    <mc:Fallback xmlns="">
       <p:transition spd="slow"/>
     </mc:Fallback>
   </mc:AlternateContent>
@@ -37284,7 +37333,7 @@
           <p:cNvPr id="2" name="標題 1">
             <a:extLst>
               <a:ext uri="{FF2B5EF4-FFF2-40B4-BE49-F238E27FC236}">
-                <a16:creationId xmlns:a16="http://schemas.microsoft.com/office/drawing/2014/main" xmlns="" id="{686E4A1B-D137-C3A9-99AE-7DEC3B36D3EB}"/>
+                <a16:creationId xmlns="" xmlns:a16="http://schemas.microsoft.com/office/drawing/2014/main" id="{686E4A1B-D137-C3A9-99AE-7DEC3B36D3EB}"/>
               </a:ext>
             </a:extLst>
           </p:cNvPr>
@@ -37316,7 +37365,7 @@
           <p:cNvPr id="3" name="投影片編號版面配置區 2">
             <a:extLst>
               <a:ext uri="{FF2B5EF4-FFF2-40B4-BE49-F238E27FC236}">
-                <a16:creationId xmlns:a16="http://schemas.microsoft.com/office/drawing/2014/main" xmlns="" id="{218AF755-12E0-3EEC-7EB6-250B6117CE38}"/>
+                <a16:creationId xmlns="" xmlns:a16="http://schemas.microsoft.com/office/drawing/2014/main" id="{218AF755-12E0-3EEC-7EB6-250B6117CE38}"/>
               </a:ext>
             </a:extLst>
           </p:cNvPr>
@@ -37346,7 +37395,7 @@
           <p:cNvPr id="8" name="內容版面配置區 7">
             <a:extLst>
               <a:ext uri="{FF2B5EF4-FFF2-40B4-BE49-F238E27FC236}">
-                <a16:creationId xmlns:a16="http://schemas.microsoft.com/office/drawing/2014/main" xmlns="" id="{5B3D6FDE-6DAD-903E-DD6D-B127EB8741B5}"/>
+                <a16:creationId xmlns="" xmlns:a16="http://schemas.microsoft.com/office/drawing/2014/main" id="{5B3D6FDE-6DAD-903E-DD6D-B127EB8741B5}"/>
               </a:ext>
             </a:extLst>
           </p:cNvPr>
@@ -37384,7 +37433,7 @@
           <p:cNvPr id="9" name="圖片 8">
             <a:extLst>
               <a:ext uri="{FF2B5EF4-FFF2-40B4-BE49-F238E27FC236}">
-                <a16:creationId xmlns:a16="http://schemas.microsoft.com/office/drawing/2014/main" xmlns="" id="{0DD9C506-325D-5D4E-865E-B3DBE5AA07BA}"/>
+                <a16:creationId xmlns="" xmlns:a16="http://schemas.microsoft.com/office/drawing/2014/main" id="{0DD9C506-325D-5D4E-865E-B3DBE5AA07BA}"/>
               </a:ext>
             </a:extLst>
           </p:cNvPr>
@@ -37420,7 +37469,7 @@
           <p:cNvPr id="10" name="圖片 9">
             <a:extLst>
               <a:ext uri="{FF2B5EF4-FFF2-40B4-BE49-F238E27FC236}">
-                <a16:creationId xmlns:a16="http://schemas.microsoft.com/office/drawing/2014/main" xmlns="" id="{434BB1DF-DC72-0FAF-E679-40C17F56E2D8}"/>
+                <a16:creationId xmlns="" xmlns:a16="http://schemas.microsoft.com/office/drawing/2014/main" id="{434BB1DF-DC72-0FAF-E679-40C17F56E2D8}"/>
               </a:ext>
             </a:extLst>
           </p:cNvPr>
@@ -37461,11 +37510,11 @@
   <p:clrMapOvr>
     <a:masterClrMapping/>
   </p:clrMapOvr>
-  <mc:AlternateContent xmlns:mc="http://schemas.openxmlformats.org/markup-compatibility/2006">
-    <mc:Choice xmlns:p14="http://schemas.microsoft.com/office/powerpoint/2010/main" Requires="p14">
+  <mc:AlternateContent xmlns:mc="http://schemas.openxmlformats.org/markup-compatibility/2006" xmlns:p14="http://schemas.microsoft.com/office/powerpoint/2010/main">
+    <mc:Choice Requires="p14">
       <p:transition spd="slow" p14:dur="2000"/>
     </mc:Choice>
-    <mc:Fallback>
+    <mc:Fallback xmlns="">
       <p:transition spd="slow"/>
     </mc:Fallback>
   </mc:AlternateContent>
@@ -37494,7 +37543,7 @@
           <p:cNvPr id="2" name="標題 1">
             <a:extLst>
               <a:ext uri="{FF2B5EF4-FFF2-40B4-BE49-F238E27FC236}">
-                <a16:creationId xmlns:a16="http://schemas.microsoft.com/office/drawing/2014/main" xmlns="" id="{CA36970A-CCCD-9743-9ADE-0A65B14B2EEA}"/>
+                <a16:creationId xmlns="" xmlns:a16="http://schemas.microsoft.com/office/drawing/2014/main" id="{CA36970A-CCCD-9743-9ADE-0A65B14B2EEA}"/>
               </a:ext>
             </a:extLst>
           </p:cNvPr>
@@ -37526,7 +37575,7 @@
           <p:cNvPr id="3" name="投影片編號版面配置區 2">
             <a:extLst>
               <a:ext uri="{FF2B5EF4-FFF2-40B4-BE49-F238E27FC236}">
-                <a16:creationId xmlns:a16="http://schemas.microsoft.com/office/drawing/2014/main" xmlns="" id="{38C202F4-A0E7-5DC6-C93F-3114F7231D45}"/>
+                <a16:creationId xmlns="" xmlns:a16="http://schemas.microsoft.com/office/drawing/2014/main" id="{38C202F4-A0E7-5DC6-C93F-3114F7231D45}"/>
               </a:ext>
             </a:extLst>
           </p:cNvPr>
@@ -37556,7 +37605,7 @@
           <p:cNvPr id="5" name="內容版面配置區 4" descr="一張含有 文字 的圖片&#10;&#10;自動產生的描述">
             <a:extLst>
               <a:ext uri="{FF2B5EF4-FFF2-40B4-BE49-F238E27FC236}">
-                <a16:creationId xmlns:a16="http://schemas.microsoft.com/office/drawing/2014/main" xmlns="" id="{F71516B3-CBDA-92A5-5C6B-A61ED9B4A5F3}"/>
+                <a16:creationId xmlns="" xmlns:a16="http://schemas.microsoft.com/office/drawing/2014/main" id="{F71516B3-CBDA-92A5-5C6B-A61ED9B4A5F3}"/>
               </a:ext>
             </a:extLst>
           </p:cNvPr>
@@ -37593,11 +37642,11 @@
   <p:clrMapOvr>
     <a:masterClrMapping/>
   </p:clrMapOvr>
-  <mc:AlternateContent xmlns:mc="http://schemas.openxmlformats.org/markup-compatibility/2006">
-    <mc:Choice xmlns:p14="http://schemas.microsoft.com/office/powerpoint/2010/main" Requires="p14">
+  <mc:AlternateContent xmlns:mc="http://schemas.openxmlformats.org/markup-compatibility/2006" xmlns:p14="http://schemas.microsoft.com/office/powerpoint/2010/main">
+    <mc:Choice Requires="p14">
       <p:transition spd="slow" p14:dur="2000"/>
     </mc:Choice>
-    <mc:Fallback>
+    <mc:Fallback xmlns="">
       <p:transition spd="slow"/>
     </mc:Fallback>
   </mc:AlternateContent>
@@ -37626,7 +37675,7 @@
           <p:cNvPr id="2" name="標題 1">
             <a:extLst>
               <a:ext uri="{FF2B5EF4-FFF2-40B4-BE49-F238E27FC236}">
-                <a16:creationId xmlns:a16="http://schemas.microsoft.com/office/drawing/2014/main" xmlns="" id="{EBA5FDBD-A1DC-AD88-B51D-F5810167AF3E}"/>
+                <a16:creationId xmlns="" xmlns:a16="http://schemas.microsoft.com/office/drawing/2014/main" id="{EBA5FDBD-A1DC-AD88-B51D-F5810167AF3E}"/>
               </a:ext>
             </a:extLst>
           </p:cNvPr>
@@ -37655,7 +37704,7 @@
           <p:cNvPr id="3" name="投影片編號版面配置區 2">
             <a:extLst>
               <a:ext uri="{FF2B5EF4-FFF2-40B4-BE49-F238E27FC236}">
-                <a16:creationId xmlns:a16="http://schemas.microsoft.com/office/drawing/2014/main" xmlns="" id="{F7EAE09C-53B7-6427-BA81-FA717275BD77}"/>
+                <a16:creationId xmlns="" xmlns:a16="http://schemas.microsoft.com/office/drawing/2014/main" id="{F7EAE09C-53B7-6427-BA81-FA717275BD77}"/>
               </a:ext>
             </a:extLst>
           </p:cNvPr>
@@ -37685,7 +37734,7 @@
           <p:cNvPr id="4" name="內容版面配置區 3">
             <a:extLst>
               <a:ext uri="{FF2B5EF4-FFF2-40B4-BE49-F238E27FC236}">
-                <a16:creationId xmlns:a16="http://schemas.microsoft.com/office/drawing/2014/main" xmlns="" id="{10D34B33-CB1C-B5AE-27AE-134045BD91F5}"/>
+                <a16:creationId xmlns="" xmlns:a16="http://schemas.microsoft.com/office/drawing/2014/main" id="{10D34B33-CB1C-B5AE-27AE-134045BD91F5}"/>
               </a:ext>
             </a:extLst>
           </p:cNvPr>
@@ -37714,7 +37763,7 @@
           <p:cNvPr id="5" name="圖片 4">
             <a:extLst>
               <a:ext uri="{FF2B5EF4-FFF2-40B4-BE49-F238E27FC236}">
-                <a16:creationId xmlns:a16="http://schemas.microsoft.com/office/drawing/2014/main" xmlns="" id="{9E27A75E-7E4A-FDD8-2E97-82FE28C62C21}"/>
+                <a16:creationId xmlns="" xmlns:a16="http://schemas.microsoft.com/office/drawing/2014/main" id="{9E27A75E-7E4A-FDD8-2E97-82FE28C62C21}"/>
               </a:ext>
             </a:extLst>
           </p:cNvPr>
@@ -37774,7 +37823,7 @@
           <p:cNvPr id="2" name="標題 1">
             <a:extLst>
               <a:ext uri="{FF2B5EF4-FFF2-40B4-BE49-F238E27FC236}">
-                <a16:creationId xmlns:a16="http://schemas.microsoft.com/office/drawing/2014/main" xmlns="" id="{3548E094-6E23-833C-4A70-992CCC950AB0}"/>
+                <a16:creationId xmlns="" xmlns:a16="http://schemas.microsoft.com/office/drawing/2014/main" id="{3548E094-6E23-833C-4A70-992CCC950AB0}"/>
               </a:ext>
             </a:extLst>
           </p:cNvPr>
@@ -37803,7 +37852,7 @@
           <p:cNvPr id="3" name="投影片編號版面配置區 2">
             <a:extLst>
               <a:ext uri="{FF2B5EF4-FFF2-40B4-BE49-F238E27FC236}">
-                <a16:creationId xmlns:a16="http://schemas.microsoft.com/office/drawing/2014/main" xmlns="" id="{492993CA-3D86-C007-7864-F2736EF5F14B}"/>
+                <a16:creationId xmlns="" xmlns:a16="http://schemas.microsoft.com/office/drawing/2014/main" id="{492993CA-3D86-C007-7864-F2736EF5F14B}"/>
               </a:ext>
             </a:extLst>
           </p:cNvPr>
@@ -37833,7 +37882,7 @@
           <p:cNvPr id="4" name="內容版面配置區 3">
             <a:extLst>
               <a:ext uri="{FF2B5EF4-FFF2-40B4-BE49-F238E27FC236}">
-                <a16:creationId xmlns:a16="http://schemas.microsoft.com/office/drawing/2014/main" xmlns="" id="{CFFE446E-0A9C-4DB5-0761-888DF5A5B80E}"/>
+                <a16:creationId xmlns="" xmlns:a16="http://schemas.microsoft.com/office/drawing/2014/main" id="{CFFE446E-0A9C-4DB5-0761-888DF5A5B80E}"/>
               </a:ext>
             </a:extLst>
           </p:cNvPr>
@@ -37896,7 +37945,7 @@
           <p:cNvPr id="5" name="圖片 4">
             <a:extLst>
               <a:ext uri="{FF2B5EF4-FFF2-40B4-BE49-F238E27FC236}">
-                <a16:creationId xmlns:a16="http://schemas.microsoft.com/office/drawing/2014/main" xmlns="" id="{573AF959-337C-C408-5009-48D4F696954A}"/>
+                <a16:creationId xmlns="" xmlns:a16="http://schemas.microsoft.com/office/drawing/2014/main" id="{573AF959-337C-C408-5009-48D4F696954A}"/>
               </a:ext>
             </a:extLst>
           </p:cNvPr>
@@ -37931,11 +37980,11 @@
   <p:clrMapOvr>
     <a:masterClrMapping/>
   </p:clrMapOvr>
-  <mc:AlternateContent xmlns:mc="http://schemas.openxmlformats.org/markup-compatibility/2006">
-    <mc:Choice xmlns:p14="http://schemas.microsoft.com/office/powerpoint/2010/main" Requires="p14">
+  <mc:AlternateContent xmlns:mc="http://schemas.openxmlformats.org/markup-compatibility/2006" xmlns:p14="http://schemas.microsoft.com/office/powerpoint/2010/main">
+    <mc:Choice Requires="p14">
       <p:transition spd="slow" p14:dur="2000"/>
     </mc:Choice>
-    <mc:Fallback>
+    <mc:Fallback xmlns="">
       <p:transition spd="slow"/>
     </mc:Fallback>
   </mc:AlternateContent>
@@ -37964,7 +38013,7 @@
           <p:cNvPr id="2" name="標題 1">
             <a:extLst>
               <a:ext uri="{FF2B5EF4-FFF2-40B4-BE49-F238E27FC236}">
-                <a16:creationId xmlns:a16="http://schemas.microsoft.com/office/drawing/2014/main" xmlns="" id="{D96B1E27-CA82-F03C-5ABF-463DF02C9FBB}"/>
+                <a16:creationId xmlns="" xmlns:a16="http://schemas.microsoft.com/office/drawing/2014/main" id="{D96B1E27-CA82-F03C-5ABF-463DF02C9FBB}"/>
               </a:ext>
             </a:extLst>
           </p:cNvPr>
@@ -37993,7 +38042,7 @@
           <p:cNvPr id="3" name="投影片編號版面配置區 2">
             <a:extLst>
               <a:ext uri="{FF2B5EF4-FFF2-40B4-BE49-F238E27FC236}">
-                <a16:creationId xmlns:a16="http://schemas.microsoft.com/office/drawing/2014/main" xmlns="" id="{560CB3DA-CBFB-E3DF-DFA4-2F3D5927CE0F}"/>
+                <a16:creationId xmlns="" xmlns:a16="http://schemas.microsoft.com/office/drawing/2014/main" id="{560CB3DA-CBFB-E3DF-DFA4-2F3D5927CE0F}"/>
               </a:ext>
             </a:extLst>
           </p:cNvPr>
@@ -38023,7 +38072,7 @@
           <p:cNvPr id="5" name="內容版面配置區 4">
             <a:extLst>
               <a:ext uri="{FF2B5EF4-FFF2-40B4-BE49-F238E27FC236}">
-                <a16:creationId xmlns:a16="http://schemas.microsoft.com/office/drawing/2014/main" xmlns="" id="{720B5298-6D59-5AFD-433F-1F851C73B04C}"/>
+                <a16:creationId xmlns="" xmlns:a16="http://schemas.microsoft.com/office/drawing/2014/main" id="{720B5298-6D59-5AFD-433F-1F851C73B04C}"/>
               </a:ext>
             </a:extLst>
           </p:cNvPr>
@@ -38060,11 +38109,11 @@
   <p:clrMapOvr>
     <a:masterClrMapping/>
   </p:clrMapOvr>
-  <mc:AlternateContent xmlns:mc="http://schemas.openxmlformats.org/markup-compatibility/2006">
-    <mc:Choice xmlns:p14="http://schemas.microsoft.com/office/powerpoint/2010/main" Requires="p14">
+  <mc:AlternateContent xmlns:mc="http://schemas.openxmlformats.org/markup-compatibility/2006" xmlns:p14="http://schemas.microsoft.com/office/powerpoint/2010/main">
+    <mc:Choice Requires="p14">
       <p:transition spd="slow" p14:dur="2000"/>
     </mc:Choice>
-    <mc:Fallback>
+    <mc:Fallback xmlns="">
       <p:transition spd="slow"/>
     </mc:Fallback>
   </mc:AlternateContent>
@@ -38093,7 +38142,7 @@
           <p:cNvPr id="2" name="標題 1">
             <a:extLst>
               <a:ext uri="{FF2B5EF4-FFF2-40B4-BE49-F238E27FC236}">
-                <a16:creationId xmlns:a16="http://schemas.microsoft.com/office/drawing/2014/main" xmlns="" id="{A672736E-6720-BE44-3592-2F1E68EBEA30}"/>
+                <a16:creationId xmlns="" xmlns:a16="http://schemas.microsoft.com/office/drawing/2014/main" id="{A672736E-6720-BE44-3592-2F1E68EBEA30}"/>
               </a:ext>
             </a:extLst>
           </p:cNvPr>
@@ -38122,7 +38171,7 @@
           <p:cNvPr id="3" name="投影片編號版面配置區 2">
             <a:extLst>
               <a:ext uri="{FF2B5EF4-FFF2-40B4-BE49-F238E27FC236}">
-                <a16:creationId xmlns:a16="http://schemas.microsoft.com/office/drawing/2014/main" xmlns="" id="{EBF2EEB3-5F6E-82E7-C3B8-A4945D6F1F05}"/>
+                <a16:creationId xmlns="" xmlns:a16="http://schemas.microsoft.com/office/drawing/2014/main" id="{EBF2EEB3-5F6E-82E7-C3B8-A4945D6F1F05}"/>
               </a:ext>
             </a:extLst>
           </p:cNvPr>
@@ -38152,7 +38201,7 @@
           <p:cNvPr id="4" name="內容版面配置區 3">
             <a:extLst>
               <a:ext uri="{FF2B5EF4-FFF2-40B4-BE49-F238E27FC236}">
-                <a16:creationId xmlns:a16="http://schemas.microsoft.com/office/drawing/2014/main" xmlns="" id="{A8DAE699-1B27-08DF-9111-454015D4D6E2}"/>
+                <a16:creationId xmlns="" xmlns:a16="http://schemas.microsoft.com/office/drawing/2014/main" id="{A8DAE699-1B27-08DF-9111-454015D4D6E2}"/>
               </a:ext>
             </a:extLst>
           </p:cNvPr>
@@ -38189,7 +38238,7 @@
           <p:cNvPr id="5" name="圖片 4">
             <a:extLst>
               <a:ext uri="{FF2B5EF4-FFF2-40B4-BE49-F238E27FC236}">
-                <a16:creationId xmlns:a16="http://schemas.microsoft.com/office/drawing/2014/main" xmlns="" id="{FDFA09BA-C19D-C458-DFC1-4158D957BC52}"/>
+                <a16:creationId xmlns="" xmlns:a16="http://schemas.microsoft.com/office/drawing/2014/main" id="{FDFA09BA-C19D-C458-DFC1-4158D957BC52}"/>
               </a:ext>
             </a:extLst>
           </p:cNvPr>
@@ -38224,11 +38273,11 @@
   <p:clrMapOvr>
     <a:masterClrMapping/>
   </p:clrMapOvr>
-  <mc:AlternateContent xmlns:mc="http://schemas.openxmlformats.org/markup-compatibility/2006">
-    <mc:Choice xmlns:p14="http://schemas.microsoft.com/office/powerpoint/2010/main" Requires="p14">
+  <mc:AlternateContent xmlns:mc="http://schemas.openxmlformats.org/markup-compatibility/2006" xmlns:p14="http://schemas.microsoft.com/office/powerpoint/2010/main">
+    <mc:Choice Requires="p14">
       <p:transition spd="slow" p14:dur="2000"/>
     </mc:Choice>
-    <mc:Fallback>
+    <mc:Fallback xmlns="">
       <p:transition spd="slow"/>
     </mc:Fallback>
   </mc:AlternateContent>
@@ -38257,7 +38306,7 @@
           <p:cNvPr id="2" name="標題 1">
             <a:extLst>
               <a:ext uri="{FF2B5EF4-FFF2-40B4-BE49-F238E27FC236}">
-                <a16:creationId xmlns:a16="http://schemas.microsoft.com/office/drawing/2014/main" xmlns="" id="{418DA5E6-367F-2540-5BF5-667F96638769}"/>
+                <a16:creationId xmlns="" xmlns:a16="http://schemas.microsoft.com/office/drawing/2014/main" id="{418DA5E6-367F-2540-5BF5-667F96638769}"/>
               </a:ext>
             </a:extLst>
           </p:cNvPr>
@@ -38289,7 +38338,7 @@
           <p:cNvPr id="3" name="投影片編號版面配置區 2">
             <a:extLst>
               <a:ext uri="{FF2B5EF4-FFF2-40B4-BE49-F238E27FC236}">
-                <a16:creationId xmlns:a16="http://schemas.microsoft.com/office/drawing/2014/main" xmlns="" id="{DE759FA6-8C53-FD80-D4D0-95B98D9F39EE}"/>
+                <a16:creationId xmlns="" xmlns:a16="http://schemas.microsoft.com/office/drawing/2014/main" id="{DE759FA6-8C53-FD80-D4D0-95B98D9F39EE}"/>
               </a:ext>
             </a:extLst>
           </p:cNvPr>
@@ -38319,7 +38368,7 @@
           <p:cNvPr id="4" name="內容版面配置區 3">
             <a:extLst>
               <a:ext uri="{FF2B5EF4-FFF2-40B4-BE49-F238E27FC236}">
-                <a16:creationId xmlns:a16="http://schemas.microsoft.com/office/drawing/2014/main" xmlns="" id="{93139690-6F31-016F-6801-9136F6EC3ECB}"/>
+                <a16:creationId xmlns="" xmlns:a16="http://schemas.microsoft.com/office/drawing/2014/main" id="{93139690-6F31-016F-6801-9136F6EC3ECB}"/>
               </a:ext>
             </a:extLst>
           </p:cNvPr>
@@ -38659,11 +38708,11 @@
   <p:clrMapOvr>
     <a:masterClrMapping/>
   </p:clrMapOvr>
-  <mc:AlternateContent xmlns:mc="http://schemas.openxmlformats.org/markup-compatibility/2006">
-    <mc:Choice xmlns:p14="http://schemas.microsoft.com/office/powerpoint/2010/main" Requires="p14">
+  <mc:AlternateContent xmlns:mc="http://schemas.openxmlformats.org/markup-compatibility/2006" xmlns:p14="http://schemas.microsoft.com/office/powerpoint/2010/main">
+    <mc:Choice Requires="p14">
       <p:transition spd="slow" p14:dur="2000"/>
     </mc:Choice>
-    <mc:Fallback>
+    <mc:Fallback xmlns="">
       <p:transition spd="slow"/>
     </mc:Fallback>
   </mc:AlternateContent>
@@ -38692,7 +38741,7 @@
           <p:cNvPr id="2" name="標題 1">
             <a:extLst>
               <a:ext uri="{FF2B5EF4-FFF2-40B4-BE49-F238E27FC236}">
-                <a16:creationId xmlns:a16="http://schemas.microsoft.com/office/drawing/2014/main" xmlns="" id="{3107F563-926B-55A2-536C-A0BF8ABE9518}"/>
+                <a16:creationId xmlns="" xmlns:a16="http://schemas.microsoft.com/office/drawing/2014/main" id="{3107F563-926B-55A2-536C-A0BF8ABE9518}"/>
               </a:ext>
             </a:extLst>
           </p:cNvPr>
@@ -38739,7 +38788,7 @@
           <p:cNvPr id="3" name="投影片編號版面配置區 2">
             <a:extLst>
               <a:ext uri="{FF2B5EF4-FFF2-40B4-BE49-F238E27FC236}">
-                <a16:creationId xmlns:a16="http://schemas.microsoft.com/office/drawing/2014/main" xmlns="" id="{683EADF1-C74C-A256-A1E9-CBE1D5A77BA1}"/>
+                <a16:creationId xmlns="" xmlns:a16="http://schemas.microsoft.com/office/drawing/2014/main" id="{683EADF1-C74C-A256-A1E9-CBE1D5A77BA1}"/>
               </a:ext>
             </a:extLst>
           </p:cNvPr>
@@ -38769,7 +38818,7 @@
           <p:cNvPr id="5" name="內容版面配置區 4">
             <a:extLst>
               <a:ext uri="{FF2B5EF4-FFF2-40B4-BE49-F238E27FC236}">
-                <a16:creationId xmlns:a16="http://schemas.microsoft.com/office/drawing/2014/main" xmlns="" id="{BB5A10C5-9B94-6349-43E8-2491B13A75DB}"/>
+                <a16:creationId xmlns="" xmlns:a16="http://schemas.microsoft.com/office/drawing/2014/main" id="{BB5A10C5-9B94-6349-43E8-2491B13A75DB}"/>
               </a:ext>
             </a:extLst>
           </p:cNvPr>
@@ -38806,11 +38855,11 @@
   <p:clrMapOvr>
     <a:masterClrMapping/>
   </p:clrMapOvr>
-  <mc:AlternateContent xmlns:mc="http://schemas.openxmlformats.org/markup-compatibility/2006">
-    <mc:Choice xmlns:p14="http://schemas.microsoft.com/office/powerpoint/2010/main" Requires="p14">
+  <mc:AlternateContent xmlns:mc="http://schemas.openxmlformats.org/markup-compatibility/2006" xmlns:p14="http://schemas.microsoft.com/office/powerpoint/2010/main">
+    <mc:Choice Requires="p14">
       <p:transition spd="slow" p14:dur="2000"/>
     </mc:Choice>
-    <mc:Fallback>
+    <mc:Fallback xmlns="">
       <p:transition spd="slow"/>
     </mc:Fallback>
   </mc:AlternateContent>
@@ -38839,7 +38888,7 @@
           <p:cNvPr id="2" name="標題 1">
             <a:extLst>
               <a:ext uri="{FF2B5EF4-FFF2-40B4-BE49-F238E27FC236}">
-                <a16:creationId xmlns:a16="http://schemas.microsoft.com/office/drawing/2014/main" xmlns="" id="{F2E55848-6447-E98E-FE20-EF2ADE409A52}"/>
+                <a16:creationId xmlns="" xmlns:a16="http://schemas.microsoft.com/office/drawing/2014/main" id="{F2E55848-6447-E98E-FE20-EF2ADE409A52}"/>
               </a:ext>
             </a:extLst>
           </p:cNvPr>
@@ -38885,7 +38934,7 @@
           <p:cNvPr id="3" name="投影片編號版面配置區 2">
             <a:extLst>
               <a:ext uri="{FF2B5EF4-FFF2-40B4-BE49-F238E27FC236}">
-                <a16:creationId xmlns:a16="http://schemas.microsoft.com/office/drawing/2014/main" xmlns="" id="{90E96E4E-26C7-A24A-92F0-46FC8B1EACE6}"/>
+                <a16:creationId xmlns="" xmlns:a16="http://schemas.microsoft.com/office/drawing/2014/main" id="{90E96E4E-26C7-A24A-92F0-46FC8B1EACE6}"/>
               </a:ext>
             </a:extLst>
           </p:cNvPr>
@@ -38915,7 +38964,7 @@
           <p:cNvPr id="4" name="內容版面配置區 3">
             <a:extLst>
               <a:ext uri="{FF2B5EF4-FFF2-40B4-BE49-F238E27FC236}">
-                <a16:creationId xmlns:a16="http://schemas.microsoft.com/office/drawing/2014/main" xmlns="" id="{B1694446-5EE1-93EE-D497-5E011B4C015D}"/>
+                <a16:creationId xmlns="" xmlns:a16="http://schemas.microsoft.com/office/drawing/2014/main" id="{B1694446-5EE1-93EE-D497-5E011B4C015D}"/>
               </a:ext>
             </a:extLst>
           </p:cNvPr>
@@ -39253,11 +39302,11 @@
   <p:clrMapOvr>
     <a:masterClrMapping/>
   </p:clrMapOvr>
-  <mc:AlternateContent xmlns:mc="http://schemas.openxmlformats.org/markup-compatibility/2006">
-    <mc:Choice xmlns:p14="http://schemas.microsoft.com/office/powerpoint/2010/main" Requires="p14">
+  <mc:AlternateContent xmlns:mc="http://schemas.openxmlformats.org/markup-compatibility/2006" xmlns:p14="http://schemas.microsoft.com/office/powerpoint/2010/main">
+    <mc:Choice Requires="p14">
       <p:transition spd="slow" p14:dur="2000"/>
     </mc:Choice>
-    <mc:Fallback>
+    <mc:Fallback xmlns="">
       <p:transition spd="slow"/>
     </mc:Fallback>
   </mc:AlternateContent>
@@ -39396,7 +39445,7 @@
           <p:cNvPr id="6" name="矩形 5">
             <a:extLst>
               <a:ext uri="{FF2B5EF4-FFF2-40B4-BE49-F238E27FC236}">
-                <a16:creationId xmlns:a16="http://schemas.microsoft.com/office/drawing/2014/main" xmlns="" id="{D9BBB12C-D489-B70A-7915-BE5D93EB2CB0}"/>
+                <a16:creationId xmlns="" xmlns:a16="http://schemas.microsoft.com/office/drawing/2014/main" id="{D9BBB12C-D489-B70A-7915-BE5D93EB2CB0}"/>
               </a:ext>
             </a:extLst>
           </p:cNvPr>
@@ -39446,7 +39495,7 @@
           <p:cNvPr id="7" name="矩形 6">
             <a:extLst>
               <a:ext uri="{FF2B5EF4-FFF2-40B4-BE49-F238E27FC236}">
-                <a16:creationId xmlns:a16="http://schemas.microsoft.com/office/drawing/2014/main" xmlns="" id="{879397ED-AAFF-93EC-AE82-45E3A4AF0BB3}"/>
+                <a16:creationId xmlns="" xmlns:a16="http://schemas.microsoft.com/office/drawing/2014/main" id="{879397ED-AAFF-93EC-AE82-45E3A4AF0BB3}"/>
               </a:ext>
             </a:extLst>
           </p:cNvPr>
@@ -39496,7 +39545,7 @@
           <p:cNvPr id="8" name="矩形 7">
             <a:extLst>
               <a:ext uri="{FF2B5EF4-FFF2-40B4-BE49-F238E27FC236}">
-                <a16:creationId xmlns:a16="http://schemas.microsoft.com/office/drawing/2014/main" xmlns="" id="{969918D7-09C0-F37E-8886-7ABB7875725D}"/>
+                <a16:creationId xmlns="" xmlns:a16="http://schemas.microsoft.com/office/drawing/2014/main" id="{969918D7-09C0-F37E-8886-7ABB7875725D}"/>
               </a:ext>
             </a:extLst>
           </p:cNvPr>
@@ -39583,7 +39632,7 @@
           <p:cNvPr id="2" name="標題 1">
             <a:extLst>
               <a:ext uri="{FF2B5EF4-FFF2-40B4-BE49-F238E27FC236}">
-                <a16:creationId xmlns:a16="http://schemas.microsoft.com/office/drawing/2014/main" xmlns="" id="{128A2035-0DCB-7EDB-E6B2-77E7311FFFA7}"/>
+                <a16:creationId xmlns="" xmlns:a16="http://schemas.microsoft.com/office/drawing/2014/main" id="{128A2035-0DCB-7EDB-E6B2-77E7311FFFA7}"/>
               </a:ext>
             </a:extLst>
           </p:cNvPr>
@@ -39645,7 +39694,7 @@
           <p:cNvPr id="3" name="投影片編號版面配置區 2">
             <a:extLst>
               <a:ext uri="{FF2B5EF4-FFF2-40B4-BE49-F238E27FC236}">
-                <a16:creationId xmlns:a16="http://schemas.microsoft.com/office/drawing/2014/main" xmlns="" id="{CBBB20C0-B459-DB01-7437-CF81EF44A2A7}"/>
+                <a16:creationId xmlns="" xmlns:a16="http://schemas.microsoft.com/office/drawing/2014/main" id="{CBBB20C0-B459-DB01-7437-CF81EF44A2A7}"/>
               </a:ext>
             </a:extLst>
           </p:cNvPr>
@@ -39675,7 +39724,7 @@
           <p:cNvPr id="4" name="內容版面配置區 3">
             <a:extLst>
               <a:ext uri="{FF2B5EF4-FFF2-40B4-BE49-F238E27FC236}">
-                <a16:creationId xmlns:a16="http://schemas.microsoft.com/office/drawing/2014/main" xmlns="" id="{91E6FC6C-CD98-9ECD-3D22-0D5E6D669981}"/>
+                <a16:creationId xmlns="" xmlns:a16="http://schemas.microsoft.com/office/drawing/2014/main" id="{91E6FC6C-CD98-9ECD-3D22-0D5E6D669981}"/>
               </a:ext>
             </a:extLst>
           </p:cNvPr>
@@ -40109,11 +40158,11 @@
   <p:clrMapOvr>
     <a:masterClrMapping/>
   </p:clrMapOvr>
-  <mc:AlternateContent xmlns:mc="http://schemas.openxmlformats.org/markup-compatibility/2006">
-    <mc:Choice xmlns:p14="http://schemas.microsoft.com/office/powerpoint/2010/main" Requires="p14">
+  <mc:AlternateContent xmlns:mc="http://schemas.openxmlformats.org/markup-compatibility/2006" xmlns:p14="http://schemas.microsoft.com/office/powerpoint/2010/main">
+    <mc:Choice Requires="p14">
       <p:transition spd="slow" p14:dur="2000"/>
     </mc:Choice>
-    <mc:Fallback>
+    <mc:Fallback xmlns="">
       <p:transition spd="slow"/>
     </mc:Fallback>
   </mc:AlternateContent>
@@ -40142,7 +40191,7 @@
           <p:cNvPr id="2" name="標題 1">
             <a:extLst>
               <a:ext uri="{FF2B5EF4-FFF2-40B4-BE49-F238E27FC236}">
-                <a16:creationId xmlns:a16="http://schemas.microsoft.com/office/drawing/2014/main" xmlns="" id="{3F6350A3-06E5-B951-8188-DDF92B963739}"/>
+                <a16:creationId xmlns="" xmlns:a16="http://schemas.microsoft.com/office/drawing/2014/main" id="{3F6350A3-06E5-B951-8188-DDF92B963739}"/>
               </a:ext>
             </a:extLst>
           </p:cNvPr>
@@ -40170,7 +40219,7 @@
           <p:cNvPr id="3" name="投影片編號版面配置區 2">
             <a:extLst>
               <a:ext uri="{FF2B5EF4-FFF2-40B4-BE49-F238E27FC236}">
-                <a16:creationId xmlns:a16="http://schemas.microsoft.com/office/drawing/2014/main" xmlns="" id="{A8EA23F0-6D7D-717C-0FB5-4EC587D8DD89}"/>
+                <a16:creationId xmlns="" xmlns:a16="http://schemas.microsoft.com/office/drawing/2014/main" id="{A8EA23F0-6D7D-717C-0FB5-4EC587D8DD89}"/>
               </a:ext>
             </a:extLst>
           </p:cNvPr>
@@ -40200,7 +40249,7 @@
           <p:cNvPr id="5" name="內容版面配置區 4">
             <a:extLst>
               <a:ext uri="{FF2B5EF4-FFF2-40B4-BE49-F238E27FC236}">
-                <a16:creationId xmlns:a16="http://schemas.microsoft.com/office/drawing/2014/main" xmlns="" id="{E605F1F7-1731-B893-31C3-DBB112A91E27}"/>
+                <a16:creationId xmlns="" xmlns:a16="http://schemas.microsoft.com/office/drawing/2014/main" id="{E605F1F7-1731-B893-31C3-DBB112A91E27}"/>
               </a:ext>
             </a:extLst>
           </p:cNvPr>
@@ -40237,11 +40286,11 @@
   <p:clrMapOvr>
     <a:masterClrMapping/>
   </p:clrMapOvr>
-  <mc:AlternateContent xmlns:mc="http://schemas.openxmlformats.org/markup-compatibility/2006">
-    <mc:Choice xmlns:p14="http://schemas.microsoft.com/office/powerpoint/2010/main" Requires="p14">
+  <mc:AlternateContent xmlns:mc="http://schemas.openxmlformats.org/markup-compatibility/2006" xmlns:p14="http://schemas.microsoft.com/office/powerpoint/2010/main">
+    <mc:Choice Requires="p14">
       <p:transition spd="slow" p14:dur="2000"/>
     </mc:Choice>
-    <mc:Fallback>
+    <mc:Fallback xmlns="">
       <p:transition spd="slow"/>
     </mc:Fallback>
   </mc:AlternateContent>
@@ -40363,14 +40412,14 @@
                 <a:gridCol w="2883706">
                   <a:extLst>
                     <a:ext uri="{9D8B030D-6E8A-4147-A177-3AD203B41FA5}">
-                      <a16:colId xmlns:a16="http://schemas.microsoft.com/office/drawing/2014/main" xmlns="" val="20000"/>
+                      <a16:colId xmlns="" xmlns:a16="http://schemas.microsoft.com/office/drawing/2014/main" val="20000"/>
                     </a:ext>
                   </a:extLst>
                 </a:gridCol>
                 <a:gridCol w="5779030">
                   <a:extLst>
                     <a:ext uri="{9D8B030D-6E8A-4147-A177-3AD203B41FA5}">
-                      <a16:colId xmlns:a16="http://schemas.microsoft.com/office/drawing/2014/main" xmlns="" val="20001"/>
+                      <a16:colId xmlns="" xmlns:a16="http://schemas.microsoft.com/office/drawing/2014/main" val="20001"/>
                     </a:ext>
                   </a:extLst>
                 </a:gridCol>
@@ -40436,7 +40485,7 @@
                 </a:tc>
                 <a:extLst>
                   <a:ext uri="{0D108BD9-81ED-4DB2-BD59-A6C34878D82A}">
-                    <a16:rowId xmlns:a16="http://schemas.microsoft.com/office/drawing/2014/main" xmlns="" val="10000"/>
+                    <a16:rowId xmlns="" xmlns:a16="http://schemas.microsoft.com/office/drawing/2014/main" val="10000"/>
                   </a:ext>
                 </a:extLst>
               </a:tr>
@@ -40501,7 +40550,7 @@
                 </a:tc>
                 <a:extLst>
                   <a:ext uri="{0D108BD9-81ED-4DB2-BD59-A6C34878D82A}">
-                    <a16:rowId xmlns:a16="http://schemas.microsoft.com/office/drawing/2014/main" xmlns="" val="10001"/>
+                    <a16:rowId xmlns="" xmlns:a16="http://schemas.microsoft.com/office/drawing/2014/main" val="10001"/>
                   </a:ext>
                 </a:extLst>
               </a:tr>
@@ -40566,7 +40615,7 @@
                 </a:tc>
                 <a:extLst>
                   <a:ext uri="{0D108BD9-81ED-4DB2-BD59-A6C34878D82A}">
-                    <a16:rowId xmlns:a16="http://schemas.microsoft.com/office/drawing/2014/main" xmlns="" val="10002"/>
+                    <a16:rowId xmlns="" xmlns:a16="http://schemas.microsoft.com/office/drawing/2014/main" val="10002"/>
                   </a:ext>
                 </a:extLst>
               </a:tr>
@@ -40631,7 +40680,7 @@
                 </a:tc>
                 <a:extLst>
                   <a:ext uri="{0D108BD9-81ED-4DB2-BD59-A6C34878D82A}">
-                    <a16:rowId xmlns:a16="http://schemas.microsoft.com/office/drawing/2014/main" xmlns="" val="10003"/>
+                    <a16:rowId xmlns="" xmlns:a16="http://schemas.microsoft.com/office/drawing/2014/main" val="10003"/>
                   </a:ext>
                 </a:extLst>
               </a:tr>
@@ -40696,7 +40745,7 @@
                 </a:tc>
                 <a:extLst>
                   <a:ext uri="{0D108BD9-81ED-4DB2-BD59-A6C34878D82A}">
-                    <a16:rowId xmlns:a16="http://schemas.microsoft.com/office/drawing/2014/main" xmlns="" val="10004"/>
+                    <a16:rowId xmlns="" xmlns:a16="http://schemas.microsoft.com/office/drawing/2014/main" val="10004"/>
                   </a:ext>
                 </a:extLst>
               </a:tr>
@@ -41226,7 +41275,7 @@
   <a:extraClrSchemeLst/>
   <a:extLst>
     <a:ext uri="{05A4C25C-085E-4340-85A3-A5531E510DB2}">
-      <thm15:themeFamily xmlns:thm15="http://schemas.microsoft.com/office/thememl/2012/main" xmlns="" name="Office Theme" id="{62F939B6-93AF-4DB8-9C6B-D6C7DFDC589F}" vid="{4A3C46E8-61CC-4603-A589-7422A47A8E4A}"/>
+      <thm15:themeFamily xmlns="" xmlns:thm15="http://schemas.microsoft.com/office/thememl/2012/main" name="Office Theme" id="{62F939B6-93AF-4DB8-9C6B-D6C7DFDC589F}" vid="{4A3C46E8-61CC-4603-A589-7422A47A8E4A}"/>
     </a:ext>
   </a:extLst>
 </a:theme>
